--- a/docs/Apresentacao-Gestao360-Comercial.pptx
+++ b/docs/Apresentacao-Gestao360-Comercial.pptx
@@ -315,9 +315,9 @@
           <a:p>
             <a:fld id="{5BCAD085-E8A6-8845-BD4E-CB4CCA059FC4}" type="datetimeFigureOut">
               <a:rPr lang="en-US" smtClean="0"/>
-              <a:t>7/7/2026</a:t>
+              <a:t>7/8/2026</a:t>
             </a:fld>
-            <a:endParaRPr lang="en-US"/>
+            <a:endParaRPr lang="en-US" dirty="0"/>
           </a:p>
         </p:txBody>
       </p:sp>
@@ -336,7 +336,7 @@
           <a:bodyPr/>
           <a:lstStyle/>
           <a:p>
-            <a:endParaRPr lang="en-US"/>
+            <a:endParaRPr lang="en-US" dirty="0"/>
           </a:p>
         </p:txBody>
       </p:sp>
@@ -359,7 +359,7 @@
               <a:rPr lang="en-US" smtClean="0"/>
               <a:t>‹nº›</a:t>
             </a:fld>
-            <a:endParaRPr lang="en-US"/>
+            <a:endParaRPr lang="en-US" dirty="0"/>
           </a:p>
         </p:txBody>
       </p:sp>
@@ -483,9 +483,9 @@
           <a:p>
             <a:fld id="{5BCAD085-E8A6-8845-BD4E-CB4CCA059FC4}" type="datetimeFigureOut">
               <a:rPr lang="en-US" smtClean="0"/>
-              <a:t>7/7/2026</a:t>
+              <a:t>7/8/2026</a:t>
             </a:fld>
-            <a:endParaRPr lang="en-US"/>
+            <a:endParaRPr lang="en-US" dirty="0"/>
           </a:p>
         </p:txBody>
       </p:sp>
@@ -504,7 +504,7 @@
           <a:bodyPr/>
           <a:lstStyle/>
           <a:p>
-            <a:endParaRPr lang="en-US"/>
+            <a:endParaRPr lang="en-US" dirty="0"/>
           </a:p>
         </p:txBody>
       </p:sp>
@@ -527,7 +527,7 @@
               <a:rPr lang="en-US" smtClean="0"/>
               <a:t>‹nº›</a:t>
             </a:fld>
-            <a:endParaRPr lang="en-US"/>
+            <a:endParaRPr lang="en-US" dirty="0"/>
           </a:p>
         </p:txBody>
       </p:sp>
@@ -661,9 +661,9 @@
           <a:p>
             <a:fld id="{5BCAD085-E8A6-8845-BD4E-CB4CCA059FC4}" type="datetimeFigureOut">
               <a:rPr lang="en-US" smtClean="0"/>
-              <a:t>7/7/2026</a:t>
+              <a:t>7/8/2026</a:t>
             </a:fld>
-            <a:endParaRPr lang="en-US"/>
+            <a:endParaRPr lang="en-US" dirty="0"/>
           </a:p>
         </p:txBody>
       </p:sp>
@@ -682,7 +682,7 @@
           <a:bodyPr/>
           <a:lstStyle/>
           <a:p>
-            <a:endParaRPr lang="en-US"/>
+            <a:endParaRPr lang="en-US" dirty="0"/>
           </a:p>
         </p:txBody>
       </p:sp>
@@ -705,7 +705,7 @@
               <a:rPr lang="en-US" smtClean="0"/>
               <a:t>‹nº›</a:t>
             </a:fld>
-            <a:endParaRPr lang="en-US"/>
+            <a:endParaRPr lang="en-US" dirty="0"/>
           </a:p>
         </p:txBody>
       </p:sp>
@@ -829,9 +829,9 @@
           <a:p>
             <a:fld id="{5BCAD085-E8A6-8845-BD4E-CB4CCA059FC4}" type="datetimeFigureOut">
               <a:rPr lang="en-US" smtClean="0"/>
-              <a:t>7/7/2026</a:t>
+              <a:t>7/8/2026</a:t>
             </a:fld>
-            <a:endParaRPr lang="en-US"/>
+            <a:endParaRPr lang="en-US" dirty="0"/>
           </a:p>
         </p:txBody>
       </p:sp>
@@ -850,7 +850,7 @@
           <a:bodyPr/>
           <a:lstStyle/>
           <a:p>
-            <a:endParaRPr lang="en-US"/>
+            <a:endParaRPr lang="en-US" dirty="0"/>
           </a:p>
         </p:txBody>
       </p:sp>
@@ -873,7 +873,7 @@
               <a:rPr lang="en-US" smtClean="0"/>
               <a:t>‹nº›</a:t>
             </a:fld>
-            <a:endParaRPr lang="en-US"/>
+            <a:endParaRPr lang="en-US" dirty="0"/>
           </a:p>
         </p:txBody>
       </p:sp>
@@ -1074,9 +1074,9 @@
           <a:p>
             <a:fld id="{5BCAD085-E8A6-8845-BD4E-CB4CCA059FC4}" type="datetimeFigureOut">
               <a:rPr lang="en-US" smtClean="0"/>
-              <a:t>7/7/2026</a:t>
+              <a:t>7/8/2026</a:t>
             </a:fld>
-            <a:endParaRPr lang="en-US"/>
+            <a:endParaRPr lang="en-US" dirty="0"/>
           </a:p>
         </p:txBody>
       </p:sp>
@@ -1095,7 +1095,7 @@
           <a:bodyPr/>
           <a:lstStyle/>
           <a:p>
-            <a:endParaRPr lang="en-US"/>
+            <a:endParaRPr lang="en-US" dirty="0"/>
           </a:p>
         </p:txBody>
       </p:sp>
@@ -1118,7 +1118,7 @@
               <a:rPr lang="en-US" smtClean="0"/>
               <a:t>‹nº›</a:t>
             </a:fld>
-            <a:endParaRPr lang="en-US"/>
+            <a:endParaRPr lang="en-US" dirty="0"/>
           </a:p>
         </p:txBody>
       </p:sp>
@@ -1359,9 +1359,9 @@
           <a:p>
             <a:fld id="{5BCAD085-E8A6-8845-BD4E-CB4CCA059FC4}" type="datetimeFigureOut">
               <a:rPr lang="en-US" smtClean="0"/>
-              <a:t>7/7/2026</a:t>
+              <a:t>7/8/2026</a:t>
             </a:fld>
-            <a:endParaRPr lang="en-US"/>
+            <a:endParaRPr lang="en-US" dirty="0"/>
           </a:p>
         </p:txBody>
       </p:sp>
@@ -1380,7 +1380,7 @@
           <a:bodyPr/>
           <a:lstStyle/>
           <a:p>
-            <a:endParaRPr lang="en-US"/>
+            <a:endParaRPr lang="en-US" dirty="0"/>
           </a:p>
         </p:txBody>
       </p:sp>
@@ -1403,7 +1403,7 @@
               <a:rPr lang="en-US" smtClean="0"/>
               <a:t>‹nº›</a:t>
             </a:fld>
-            <a:endParaRPr lang="en-US"/>
+            <a:endParaRPr lang="en-US" dirty="0"/>
           </a:p>
         </p:txBody>
       </p:sp>
@@ -1778,9 +1778,9 @@
           <a:p>
             <a:fld id="{5BCAD085-E8A6-8845-BD4E-CB4CCA059FC4}" type="datetimeFigureOut">
               <a:rPr lang="en-US" smtClean="0"/>
-              <a:t>7/7/2026</a:t>
+              <a:t>7/8/2026</a:t>
             </a:fld>
-            <a:endParaRPr lang="en-US"/>
+            <a:endParaRPr lang="en-US" dirty="0"/>
           </a:p>
         </p:txBody>
       </p:sp>
@@ -1799,7 +1799,7 @@
           <a:bodyPr/>
           <a:lstStyle/>
           <a:p>
-            <a:endParaRPr lang="en-US"/>
+            <a:endParaRPr lang="en-US" dirty="0"/>
           </a:p>
         </p:txBody>
       </p:sp>
@@ -1822,7 +1822,7 @@
               <a:rPr lang="en-US" smtClean="0"/>
               <a:t>‹nº›</a:t>
             </a:fld>
-            <a:endParaRPr lang="en-US"/>
+            <a:endParaRPr lang="en-US" dirty="0"/>
           </a:p>
         </p:txBody>
       </p:sp>
@@ -1895,9 +1895,9 @@
           <a:p>
             <a:fld id="{5BCAD085-E8A6-8845-BD4E-CB4CCA059FC4}" type="datetimeFigureOut">
               <a:rPr lang="en-US" smtClean="0"/>
-              <a:t>7/7/2026</a:t>
+              <a:t>7/8/2026</a:t>
             </a:fld>
-            <a:endParaRPr lang="en-US"/>
+            <a:endParaRPr lang="en-US" dirty="0"/>
           </a:p>
         </p:txBody>
       </p:sp>
@@ -1916,7 +1916,7 @@
           <a:bodyPr/>
           <a:lstStyle/>
           <a:p>
-            <a:endParaRPr lang="en-US"/>
+            <a:endParaRPr lang="en-US" dirty="0"/>
           </a:p>
         </p:txBody>
       </p:sp>
@@ -1939,7 +1939,7 @@
               <a:rPr lang="en-US" smtClean="0"/>
               <a:t>‹nº›</a:t>
             </a:fld>
-            <a:endParaRPr lang="en-US"/>
+            <a:endParaRPr lang="en-US" dirty="0"/>
           </a:p>
         </p:txBody>
       </p:sp>
@@ -1990,9 +1990,9 @@
           <a:p>
             <a:fld id="{5BCAD085-E8A6-8845-BD4E-CB4CCA059FC4}" type="datetimeFigureOut">
               <a:rPr lang="en-US" smtClean="0"/>
-              <a:t>7/7/2026</a:t>
+              <a:t>7/8/2026</a:t>
             </a:fld>
-            <a:endParaRPr lang="en-US"/>
+            <a:endParaRPr lang="en-US" dirty="0"/>
           </a:p>
         </p:txBody>
       </p:sp>
@@ -2011,7 +2011,7 @@
           <a:bodyPr/>
           <a:lstStyle/>
           <a:p>
-            <a:endParaRPr lang="en-US"/>
+            <a:endParaRPr lang="en-US" dirty="0"/>
           </a:p>
         </p:txBody>
       </p:sp>
@@ -2034,7 +2034,7 @@
               <a:rPr lang="en-US" smtClean="0"/>
               <a:t>‹nº›</a:t>
             </a:fld>
-            <a:endParaRPr lang="en-US"/>
+            <a:endParaRPr lang="en-US" dirty="0"/>
           </a:p>
         </p:txBody>
       </p:sp>
@@ -2265,9 +2265,9 @@
           <a:p>
             <a:fld id="{5BCAD085-E8A6-8845-BD4E-CB4CCA059FC4}" type="datetimeFigureOut">
               <a:rPr lang="en-US" smtClean="0"/>
-              <a:t>7/7/2026</a:t>
+              <a:t>7/8/2026</a:t>
             </a:fld>
-            <a:endParaRPr lang="en-US"/>
+            <a:endParaRPr lang="en-US" dirty="0"/>
           </a:p>
         </p:txBody>
       </p:sp>
@@ -2286,7 +2286,7 @@
           <a:bodyPr/>
           <a:lstStyle/>
           <a:p>
-            <a:endParaRPr lang="en-US"/>
+            <a:endParaRPr lang="en-US" dirty="0"/>
           </a:p>
         </p:txBody>
       </p:sp>
@@ -2309,7 +2309,7 @@
               <a:rPr lang="en-US" smtClean="0"/>
               <a:t>‹nº›</a:t>
             </a:fld>
-            <a:endParaRPr lang="en-US"/>
+            <a:endParaRPr lang="en-US" dirty="0"/>
           </a:p>
         </p:txBody>
       </p:sp>
@@ -2431,7 +2431,7 @@
             </a:lvl9pPr>
           </a:lstStyle>
           <a:p>
-            <a:endParaRPr lang="en-US"/>
+            <a:endParaRPr lang="en-US" dirty="0"/>
           </a:p>
         </p:txBody>
       </p:sp>
@@ -2517,9 +2517,9 @@
           <a:p>
             <a:fld id="{5BCAD085-E8A6-8845-BD4E-CB4CCA059FC4}" type="datetimeFigureOut">
               <a:rPr lang="en-US" smtClean="0"/>
-              <a:t>7/7/2026</a:t>
+              <a:t>7/8/2026</a:t>
             </a:fld>
-            <a:endParaRPr lang="en-US"/>
+            <a:endParaRPr lang="en-US" dirty="0"/>
           </a:p>
         </p:txBody>
       </p:sp>
@@ -2538,7 +2538,7 @@
           <a:bodyPr/>
           <a:lstStyle/>
           <a:p>
-            <a:endParaRPr lang="en-US"/>
+            <a:endParaRPr lang="en-US" dirty="0"/>
           </a:p>
         </p:txBody>
       </p:sp>
@@ -2561,7 +2561,7 @@
               <a:rPr lang="en-US" smtClean="0"/>
               <a:t>‹nº›</a:t>
             </a:fld>
-            <a:endParaRPr lang="en-US"/>
+            <a:endParaRPr lang="en-US" dirty="0"/>
           </a:p>
         </p:txBody>
       </p:sp>
@@ -2728,9 +2728,9 @@
           <a:p>
             <a:fld id="{5BCAD085-E8A6-8845-BD4E-CB4CCA059FC4}" type="datetimeFigureOut">
               <a:rPr lang="en-US" smtClean="0"/>
-              <a:t>7/7/2026</a:t>
+              <a:t>7/8/2026</a:t>
             </a:fld>
-            <a:endParaRPr lang="en-US"/>
+            <a:endParaRPr lang="en-US" dirty="0"/>
           </a:p>
         </p:txBody>
       </p:sp>
@@ -2767,7 +2767,7 @@
             </a:lvl1pPr>
           </a:lstStyle>
           <a:p>
-            <a:endParaRPr lang="en-US"/>
+            <a:endParaRPr lang="en-US" dirty="0"/>
           </a:p>
         </p:txBody>
       </p:sp>
@@ -2808,7 +2808,7 @@
               <a:rPr lang="en-US" smtClean="0"/>
               <a:t>‹nº›</a:t>
             </a:fld>
-            <a:endParaRPr lang="en-US"/>
+            <a:endParaRPr lang="en-US" dirty="0"/>
           </a:p>
         </p:txBody>
       </p:sp>
@@ -4175,7 +4175,7 @@
         <p:spPr>
           <a:xfrm>
             <a:off x="640080" y="868680"/>
-            <a:ext cx="10789920" cy="822960"/>
+            <a:ext cx="10789920" cy="492443"/>
           </a:xfrm>
           <a:prstGeom prst="rect">
             <a:avLst/>
@@ -4206,94 +4206,7 @@
                 </a:solidFill>
                 <a:latin typeface="Segoe UI Semibold"/>
               </a:rPr>
-              <a:t>Escolha o plano na medida da sua </a:t>
-            </a:r>
-            <a:r>
-              <a:rPr lang="pt-BR" sz="3200" b="1" noProof="0" dirty="0" err="1">
-                <a:solidFill>
-                  <a:srgbClr val="0F1B2E"/>
-                </a:solidFill>
-                <a:latin typeface="Segoe UI Semibold"/>
-              </a:rPr>
-              <a:t>operacao</a:t>
-            </a:r>
-            <a:endParaRPr lang="pt-BR" sz="3200" b="1" noProof="0" dirty="0">
-              <a:solidFill>
-                <a:srgbClr val="0F1B2E"/>
-              </a:solidFill>
-              <a:latin typeface="Segoe UI Semibold"/>
-            </a:endParaRPr>
-          </a:p>
-        </p:txBody>
-      </p:sp>
-      <p:sp>
-        <p:nvSpPr>
-          <p:cNvPr id="5" name="TextBox 4"/>
-          <p:cNvSpPr txBox="1"/>
-          <p:nvPr/>
-        </p:nvSpPr>
-        <p:spPr>
-          <a:xfrm>
-            <a:off x="502920" y="6446520"/>
-            <a:ext cx="5486400" cy="320040"/>
-          </a:xfrm>
-          <a:prstGeom prst="rect">
-            <a:avLst/>
-          </a:prstGeom>
-          <a:noFill/>
-        </p:spPr>
-        <p:txBody>
-          <a:bodyPr wrap="square" lIns="0" tIns="0" rIns="0" bIns="0" anchor="t">
-            <a:spAutoFit/>
-          </a:bodyPr>
-          <a:lstStyle/>
-          <a:p>
-            <a:pPr algn="l">
-              <a:lnSpc>
-                <a:spcPct val="100000"/>
-              </a:lnSpc>
-              <a:spcBef>
-                <a:spcPts val="0"/>
-              </a:spcBef>
-              <a:spcAft>
-                <a:spcPts val="400"/>
-              </a:spcAft>
-            </a:pPr>
-            <a:r>
-              <a:rPr lang="pt-BR" sz="900" b="1" noProof="0" dirty="0">
-                <a:solidFill>
-                  <a:srgbClr val="2B5CE6"/>
-                </a:solidFill>
-                <a:latin typeface="Segoe UI"/>
-              </a:rPr>
-              <a:t>GESTAO 360</a:t>
-            </a:r>
-            <a:r>
-              <a:rPr lang="pt-BR" sz="900" b="0" noProof="0" dirty="0">
-                <a:solidFill>
-                  <a:srgbClr val="5B6B82"/>
-                </a:solidFill>
-                <a:latin typeface="Segoe UI"/>
-              </a:rPr>
-              <a:t>   •   Plataforma corporativa de </a:t>
-            </a:r>
-            <a:r>
-              <a:rPr lang="pt-BR" sz="900" b="0" noProof="0" dirty="0" err="1">
-                <a:solidFill>
-                  <a:srgbClr val="5B6B82"/>
-                </a:solidFill>
-                <a:latin typeface="Segoe UI"/>
-              </a:rPr>
-              <a:t>gestao</a:t>
-            </a:r>
-            <a:r>
-              <a:rPr lang="pt-BR" sz="900" b="0" noProof="0" dirty="0">
-                <a:solidFill>
-                  <a:srgbClr val="5B6B82"/>
-                </a:solidFill>
-                <a:latin typeface="Segoe UI"/>
-              </a:rPr>
-              <a:t>   •   gestao360.org</a:t>
+              <a:t>Escolha o plano na medida da sua operação</a:t>
             </a:r>
           </a:p>
         </p:txBody>
@@ -4497,7 +4410,7 @@
         <p:spPr>
           <a:xfrm>
             <a:off x="914400" y="2468880"/>
-            <a:ext cx="2148840" cy="502920"/>
+            <a:ext cx="2148840" cy="323165"/>
           </a:xfrm>
           <a:prstGeom prst="rect">
             <a:avLst/>
@@ -4528,25 +4441,7 @@
                 </a:solidFill>
                 <a:latin typeface="Segoe UI"/>
               </a:rPr>
-              <a:t>Para </a:t>
-            </a:r>
-            <a:r>
-              <a:rPr lang="pt-BR" sz="1050" b="0" noProof="0" dirty="0" err="1">
-                <a:solidFill>
-                  <a:srgbClr val="5B6B82"/>
-                </a:solidFill>
-                <a:latin typeface="Segoe UI"/>
-              </a:rPr>
-              <a:t>comecar</a:t>
-            </a:r>
-            <a:r>
-              <a:rPr lang="pt-BR" sz="1050" b="0" noProof="0" dirty="0">
-                <a:solidFill>
-                  <a:srgbClr val="5B6B82"/>
-                </a:solidFill>
-                <a:latin typeface="Segoe UI"/>
-              </a:rPr>
-              <a:t> a gerir por indicadores</a:t>
+              <a:t>Para começar a gerir por indicadores</a:t>
             </a:r>
           </a:p>
         </p:txBody>
@@ -4560,7 +4455,7 @@
         <p:spPr>
           <a:xfrm>
             <a:off x="914400" y="3063240"/>
-            <a:ext cx="2148840" cy="640080"/>
+            <a:ext cx="2148840" cy="415498"/>
           </a:xfrm>
           <a:prstGeom prst="rect">
             <a:avLst/>
@@ -4600,23 +4495,8 @@
                 </a:solidFill>
                 <a:latin typeface="Segoe UI"/>
               </a:rPr>
-              <a:t> /</a:t>
-            </a:r>
-            <a:r>
-              <a:rPr lang="pt-BR" sz="1200" b="0" noProof="0" dirty="0" err="1">
-                <a:solidFill>
-                  <a:srgbClr val="5B6B82"/>
-                </a:solidFill>
-                <a:latin typeface="Segoe UI"/>
-              </a:rPr>
-              <a:t>mes</a:t>
-            </a:r>
-            <a:endParaRPr lang="pt-BR" sz="1200" b="0" noProof="0" dirty="0">
-              <a:solidFill>
-                <a:srgbClr val="5B6B82"/>
-              </a:solidFill>
-              <a:latin typeface="Segoe UI"/>
-            </a:endParaRPr>
+              <a:t> /mês</a:t>
+            </a:r>
           </a:p>
         </p:txBody>
       </p:sp>
@@ -4629,7 +4509,7 @@
         <p:spPr>
           <a:xfrm>
             <a:off x="914400" y="3611880"/>
-            <a:ext cx="2148840" cy="274320"/>
+            <a:ext cx="2148840" cy="161583"/>
           </a:xfrm>
           <a:prstGeom prst="rect">
             <a:avLst/>
@@ -4660,23 +4540,8 @@
                 </a:solidFill>
                 <a:latin typeface="Segoe UI"/>
               </a:rPr>
-              <a:t>Setup </a:t>
-            </a:r>
-            <a:r>
-              <a:rPr lang="pt-BR" sz="1050" b="1" noProof="0" dirty="0" err="1">
-                <a:solidFill>
-                  <a:srgbClr val="2B5CE6"/>
-                </a:solidFill>
-                <a:latin typeface="Segoe UI"/>
-              </a:rPr>
-              <a:t>gratis</a:t>
-            </a:r>
-            <a:endParaRPr lang="pt-BR" sz="1050" b="1" noProof="0" dirty="0">
-              <a:solidFill>
-                <a:srgbClr val="2B5CE6"/>
-              </a:solidFill>
-              <a:latin typeface="Segoe UI"/>
-            </a:endParaRPr>
+              <a:t>Setup grátis</a:t>
+            </a:r>
           </a:p>
         </p:txBody>
       </p:sp>
@@ -4734,7 +4599,7 @@
         <p:spPr>
           <a:xfrm>
             <a:off x="914400" y="4133088"/>
-            <a:ext cx="1234440" cy="274320"/>
+            <a:ext cx="1234440" cy="146194"/>
           </a:xfrm>
           <a:prstGeom prst="rect">
             <a:avLst/>
@@ -4759,20 +4624,14 @@
               </a:spcAft>
             </a:pPr>
             <a:r>
-              <a:rPr lang="pt-BR" sz="950" b="0" noProof="0" dirty="0" err="1">
+              <a:rPr lang="pt-BR" sz="950" b="0" noProof="0" dirty="0">
                 <a:solidFill>
                   <a:srgbClr val="5B6B82"/>
                 </a:solidFill>
                 <a:latin typeface="Segoe UI"/>
               </a:rPr>
-              <a:t>Usuarios</a:t>
-            </a:r>
-            <a:endParaRPr lang="pt-BR" sz="950" b="0" noProof="0" dirty="0">
-              <a:solidFill>
-                <a:srgbClr val="5B6B82"/>
-              </a:solidFill>
-              <a:latin typeface="Segoe UI"/>
-            </a:endParaRPr>
+              <a:t>Usuários</a:t>
+            </a:r>
           </a:p>
         </p:txBody>
       </p:sp>
@@ -4913,13 +4772,13 @@
       </p:sp>
       <p:sp>
         <p:nvSpPr>
-          <p:cNvPr id="18" name="TextBox 17"/>
+          <p:cNvPr id="20" name="TextBox 19"/>
           <p:cNvSpPr txBox="1"/>
           <p:nvPr/>
         </p:nvSpPr>
         <p:spPr>
           <a:xfrm>
-            <a:off x="914400" y="4709160"/>
+            <a:off x="914400" y="4676688"/>
             <a:ext cx="1234440" cy="274320"/>
           </a:xfrm>
           <a:prstGeom prst="rect">
@@ -4951,21 +4810,21 @@
                 </a:solidFill>
                 <a:latin typeface="Segoe UI"/>
               </a:rPr>
-              <a:t>Armazenamento</a:t>
-            </a:r>
-          </a:p>
-        </p:txBody>
-      </p:sp>
-      <p:sp>
-        <p:nvSpPr>
-          <p:cNvPr id="19" name="TextBox 18"/>
+              <a:t>Suporte</a:t>
+            </a:r>
+          </a:p>
+        </p:txBody>
+      </p:sp>
+      <p:sp>
+        <p:nvSpPr>
+          <p:cNvPr id="21" name="TextBox 20"/>
           <p:cNvSpPr txBox="1"/>
           <p:nvPr/>
         </p:nvSpPr>
         <p:spPr>
           <a:xfrm>
-            <a:off x="2011680" y="4709160"/>
-            <a:ext cx="1051560" cy="274320"/>
+            <a:off x="2011680" y="4676688"/>
+            <a:ext cx="1051560" cy="146194"/>
           </a:xfrm>
           <a:prstGeom prst="rect">
             <a:avLst/>
@@ -4996,20 +4855,20 @@
                 </a:solidFill>
                 <a:latin typeface="Segoe UI"/>
               </a:rPr>
-              <a:t>10 GB</a:t>
-            </a:r>
-          </a:p>
-        </p:txBody>
-      </p:sp>
-      <p:sp>
-        <p:nvSpPr>
-          <p:cNvPr id="20" name="TextBox 19"/>
+              <a:t>Padrão</a:t>
+            </a:r>
+          </a:p>
+        </p:txBody>
+      </p:sp>
+      <p:sp>
+        <p:nvSpPr>
+          <p:cNvPr id="22" name="TextBox 21"/>
           <p:cNvSpPr txBox="1"/>
           <p:nvPr/>
         </p:nvSpPr>
         <p:spPr>
           <a:xfrm>
-            <a:off x="914400" y="4997196"/>
+            <a:off x="914400" y="4964724"/>
             <a:ext cx="1234440" cy="274320"/>
           </a:xfrm>
           <a:prstGeom prst="rect">
@@ -5041,21 +4900,21 @@
                 </a:solidFill>
                 <a:latin typeface="Segoe UI"/>
               </a:rPr>
-              <a:t>Suporte</a:t>
-            </a:r>
-          </a:p>
-        </p:txBody>
-      </p:sp>
-      <p:sp>
-        <p:nvSpPr>
-          <p:cNvPr id="21" name="TextBox 20"/>
+              <a:t>SLA</a:t>
+            </a:r>
+          </a:p>
+        </p:txBody>
+      </p:sp>
+      <p:sp>
+        <p:nvSpPr>
+          <p:cNvPr id="23" name="TextBox 22"/>
           <p:cNvSpPr txBox="1"/>
           <p:nvPr/>
         </p:nvSpPr>
         <p:spPr>
           <a:xfrm>
-            <a:off x="2011680" y="4997196"/>
-            <a:ext cx="1051560" cy="274320"/>
+            <a:off x="2011680" y="4964724"/>
+            <a:ext cx="1051560" cy="146194"/>
           </a:xfrm>
           <a:prstGeom prst="rect">
             <a:avLst/>
@@ -5080,33 +4939,27 @@
               </a:spcAft>
             </a:pPr>
             <a:r>
-              <a:rPr lang="pt-BR" sz="950" b="1" noProof="0" dirty="0" err="1">
+              <a:rPr lang="pt-BR" sz="950" b="1" noProof="0" dirty="0">
                 <a:solidFill>
                   <a:srgbClr val="0F1B2E"/>
                 </a:solidFill>
                 <a:latin typeface="Segoe UI"/>
               </a:rPr>
-              <a:t>Padrao</a:t>
-            </a:r>
-            <a:endParaRPr lang="pt-BR" sz="950" b="1" noProof="0" dirty="0">
-              <a:solidFill>
-                <a:srgbClr val="0F1B2E"/>
-              </a:solidFill>
-              <a:latin typeface="Segoe UI"/>
-            </a:endParaRPr>
-          </a:p>
-        </p:txBody>
-      </p:sp>
-      <p:sp>
-        <p:nvSpPr>
-          <p:cNvPr id="22" name="TextBox 21"/>
+              <a:t>Prox. dia útil</a:t>
+            </a:r>
+          </a:p>
+        </p:txBody>
+      </p:sp>
+      <p:sp>
+        <p:nvSpPr>
+          <p:cNvPr id="24" name="TextBox 23"/>
           <p:cNvSpPr txBox="1"/>
           <p:nvPr/>
         </p:nvSpPr>
         <p:spPr>
           <a:xfrm>
-            <a:off x="914400" y="5285232"/>
-            <a:ext cx="1234440" cy="274320"/>
+            <a:off x="914400" y="5252760"/>
+            <a:ext cx="1234440" cy="146194"/>
           </a:xfrm>
           <a:prstGeom prst="rect">
             <a:avLst/>
@@ -5137,128 +4990,8 @@
                 </a:solidFill>
                 <a:latin typeface="Segoe UI"/>
               </a:rPr>
-              <a:t>SLA</a:t>
-            </a:r>
-          </a:p>
-        </p:txBody>
-      </p:sp>
-      <p:sp>
-        <p:nvSpPr>
-          <p:cNvPr id="23" name="TextBox 22"/>
-          <p:cNvSpPr txBox="1"/>
-          <p:nvPr/>
-        </p:nvSpPr>
-        <p:spPr>
-          <a:xfrm>
-            <a:off x="2011680" y="5285232"/>
-            <a:ext cx="1051560" cy="274320"/>
-          </a:xfrm>
-          <a:prstGeom prst="rect">
-            <a:avLst/>
-          </a:prstGeom>
-          <a:noFill/>
-        </p:spPr>
-        <p:txBody>
-          <a:bodyPr wrap="square" lIns="0" tIns="0" rIns="0" bIns="0" anchor="t">
-            <a:spAutoFit/>
-          </a:bodyPr>
-          <a:lstStyle/>
-          <a:p>
-            <a:pPr algn="r">
-              <a:lnSpc>
-                <a:spcPct val="100000"/>
-              </a:lnSpc>
-              <a:spcBef>
-                <a:spcPts val="0"/>
-              </a:spcBef>
-              <a:spcAft>
-                <a:spcPts val="400"/>
-              </a:spcAft>
-            </a:pPr>
-            <a:r>
-              <a:rPr lang="pt-BR" sz="950" b="1" noProof="0" dirty="0">
-                <a:solidFill>
-                  <a:srgbClr val="0F1B2E"/>
-                </a:solidFill>
-                <a:latin typeface="Segoe UI"/>
-              </a:rPr>
-              <a:t>Prox. dia </a:t>
-            </a:r>
-            <a:r>
-              <a:rPr lang="pt-BR" sz="950" b="1" noProof="0" dirty="0" err="1">
-                <a:solidFill>
-                  <a:srgbClr val="0F1B2E"/>
-                </a:solidFill>
-                <a:latin typeface="Segoe UI"/>
-              </a:rPr>
-              <a:t>util</a:t>
-            </a:r>
-            <a:endParaRPr lang="pt-BR" sz="950" b="1" noProof="0" dirty="0">
-              <a:solidFill>
-                <a:srgbClr val="0F1B2E"/>
-              </a:solidFill>
-              <a:latin typeface="Segoe UI"/>
-            </a:endParaRPr>
-          </a:p>
-        </p:txBody>
-      </p:sp>
-      <p:sp>
-        <p:nvSpPr>
-          <p:cNvPr id="24" name="TextBox 23"/>
-          <p:cNvSpPr txBox="1"/>
-          <p:nvPr/>
-        </p:nvSpPr>
-        <p:spPr>
-          <a:xfrm>
-            <a:off x="914400" y="5573268"/>
-            <a:ext cx="1234440" cy="274320"/>
-          </a:xfrm>
-          <a:prstGeom prst="rect">
-            <a:avLst/>
-          </a:prstGeom>
-          <a:noFill/>
-        </p:spPr>
-        <p:txBody>
-          <a:bodyPr wrap="square" lIns="0" tIns="0" rIns="0" bIns="0" anchor="t">
-            <a:spAutoFit/>
-          </a:bodyPr>
-          <a:lstStyle/>
-          <a:p>
-            <a:pPr algn="l">
-              <a:lnSpc>
-                <a:spcPct val="100000"/>
-              </a:lnSpc>
-              <a:spcBef>
-                <a:spcPts val="0"/>
-              </a:spcBef>
-              <a:spcAft>
-                <a:spcPts val="400"/>
-              </a:spcAft>
-            </a:pPr>
-            <a:r>
-              <a:rPr lang="pt-BR" sz="950" b="0" noProof="0" dirty="0">
-                <a:solidFill>
-                  <a:srgbClr val="5B6B82"/>
-                </a:solidFill>
-                <a:latin typeface="Segoe UI"/>
-              </a:rPr>
-              <a:t>Teste </a:t>
-            </a:r>
-            <a:r>
-              <a:rPr lang="pt-BR" sz="950" b="0" noProof="0" dirty="0" err="1">
-                <a:solidFill>
-                  <a:srgbClr val="5B6B82"/>
-                </a:solidFill>
-                <a:latin typeface="Segoe UI"/>
-              </a:rPr>
-              <a:t>gratis</a:t>
-            </a:r>
-            <a:endParaRPr lang="pt-BR" sz="950" b="0" noProof="0" dirty="0">
-              <a:solidFill>
-                <a:srgbClr val="5B6B82"/>
-              </a:solidFill>
-              <a:latin typeface="Segoe UI"/>
-            </a:endParaRPr>
+              <a:t>Teste grátis</a:t>
+            </a:r>
           </a:p>
         </p:txBody>
       </p:sp>
@@ -5270,7 +5003,7 @@
         </p:nvSpPr>
         <p:spPr>
           <a:xfrm>
-            <a:off x="2011680" y="5573268"/>
+            <a:off x="2011680" y="5252760"/>
             <a:ext cx="1051560" cy="274320"/>
           </a:xfrm>
           <a:prstGeom prst="rect">
@@ -5555,7 +5288,7 @@
         <p:spPr>
           <a:xfrm>
             <a:off x="3758184" y="2304288"/>
-            <a:ext cx="2148840" cy="502920"/>
+            <a:ext cx="2148840" cy="323165"/>
           </a:xfrm>
           <a:prstGeom prst="rect">
             <a:avLst/>
@@ -5580,38 +5313,14 @@
               </a:spcAft>
             </a:pPr>
             <a:r>
-              <a:rPr lang="pt-BR" sz="1050" b="0" noProof="0" dirty="0" err="1">
+              <a:rPr lang="pt-BR" sz="1050" b="0" noProof="0" dirty="0">
                 <a:solidFill>
                   <a:srgbClr val="5B6B82"/>
                 </a:solidFill>
                 <a:latin typeface="Segoe UI"/>
               </a:rPr>
-              <a:t>Estrategia</a:t>
-            </a:r>
-            <a:r>
-              <a:rPr lang="pt-BR" sz="1050" b="0" noProof="0" dirty="0">
-                <a:solidFill>
-                  <a:srgbClr val="5B6B82"/>
-                </a:solidFill>
-                <a:latin typeface="Segoe UI"/>
-              </a:rPr>
-              <a:t> + qualidade + </a:t>
-            </a:r>
-            <a:r>
-              <a:rPr lang="pt-BR" sz="1050" b="0" noProof="0" dirty="0" err="1">
-                <a:solidFill>
-                  <a:srgbClr val="5B6B82"/>
-                </a:solidFill>
-                <a:latin typeface="Segoe UI"/>
-              </a:rPr>
-              <a:t>comunicacao</a:t>
-            </a:r>
-            <a:endParaRPr lang="pt-BR" sz="1050" b="0" noProof="0" dirty="0">
-              <a:solidFill>
-                <a:srgbClr val="5B6B82"/>
-              </a:solidFill>
-              <a:latin typeface="Segoe UI"/>
-            </a:endParaRPr>
+              <a:t>Estratégia + qualidade + comunicação</a:t>
+            </a:r>
           </a:p>
         </p:txBody>
       </p:sp>
@@ -5624,7 +5333,7 @@
         <p:spPr>
           <a:xfrm>
             <a:off x="3758184" y="2898648"/>
-            <a:ext cx="2148840" cy="640080"/>
+            <a:ext cx="2148840" cy="415498"/>
           </a:xfrm>
           <a:prstGeom prst="rect">
             <a:avLst/>
@@ -5664,23 +5373,8 @@
                 </a:solidFill>
                 <a:latin typeface="Segoe UI"/>
               </a:rPr>
-              <a:t> /</a:t>
-            </a:r>
-            <a:r>
-              <a:rPr lang="pt-BR" sz="1200" b="0" noProof="0" dirty="0" err="1">
-                <a:solidFill>
-                  <a:srgbClr val="5B6B82"/>
-                </a:solidFill>
-                <a:latin typeface="Segoe UI"/>
-              </a:rPr>
-              <a:t>mes</a:t>
-            </a:r>
-            <a:endParaRPr lang="pt-BR" sz="1200" b="0" noProof="0" dirty="0">
-              <a:solidFill>
-                <a:srgbClr val="5B6B82"/>
-              </a:solidFill>
-              <a:latin typeface="Segoe UI"/>
-            </a:endParaRPr>
+              <a:t> /mês</a:t>
+            </a:r>
           </a:p>
         </p:txBody>
       </p:sp>
@@ -5783,7 +5477,7 @@
         <p:spPr>
           <a:xfrm>
             <a:off x="3758184" y="3968496"/>
-            <a:ext cx="1234440" cy="274320"/>
+            <a:ext cx="1234440" cy="146194"/>
           </a:xfrm>
           <a:prstGeom prst="rect">
             <a:avLst/>
@@ -5808,20 +5502,14 @@
               </a:spcAft>
             </a:pPr>
             <a:r>
-              <a:rPr lang="pt-BR" sz="950" b="0" noProof="0" dirty="0" err="1">
+              <a:rPr lang="pt-BR" sz="950" b="0" noProof="0" dirty="0">
                 <a:solidFill>
                   <a:srgbClr val="5B6B82"/>
                 </a:solidFill>
                 <a:latin typeface="Segoe UI"/>
               </a:rPr>
-              <a:t>Usuarios</a:t>
-            </a:r>
-            <a:endParaRPr lang="pt-BR" sz="950" b="0" noProof="0" dirty="0">
-              <a:solidFill>
-                <a:srgbClr val="5B6B82"/>
-              </a:solidFill>
-              <a:latin typeface="Segoe UI"/>
-            </a:endParaRPr>
+              <a:t>Usuários</a:t>
+            </a:r>
           </a:p>
         </p:txBody>
       </p:sp>
@@ -5962,13 +5650,13 @@
       </p:sp>
       <p:sp>
         <p:nvSpPr>
-          <p:cNvPr id="39" name="TextBox 38"/>
+          <p:cNvPr id="41" name="TextBox 40"/>
           <p:cNvSpPr txBox="1"/>
           <p:nvPr/>
         </p:nvSpPr>
         <p:spPr>
           <a:xfrm>
-            <a:off x="3758184" y="4544568"/>
+            <a:off x="3758184" y="4540371"/>
             <a:ext cx="1234440" cy="274320"/>
           </a:xfrm>
           <a:prstGeom prst="rect">
@@ -6000,21 +5688,21 @@
                 </a:solidFill>
                 <a:latin typeface="Segoe UI"/>
               </a:rPr>
-              <a:t>Armazenamento</a:t>
-            </a:r>
-          </a:p>
-        </p:txBody>
-      </p:sp>
-      <p:sp>
-        <p:nvSpPr>
-          <p:cNvPr id="40" name="TextBox 39"/>
+              <a:t>Suporte</a:t>
+            </a:r>
+          </a:p>
+        </p:txBody>
+      </p:sp>
+      <p:sp>
+        <p:nvSpPr>
+          <p:cNvPr id="42" name="TextBox 41"/>
           <p:cNvSpPr txBox="1"/>
           <p:nvPr/>
         </p:nvSpPr>
         <p:spPr>
           <a:xfrm>
-            <a:off x="4855464" y="4544568"/>
-            <a:ext cx="1051560" cy="274320"/>
+            <a:off x="4855464" y="4540371"/>
+            <a:ext cx="1051560" cy="146194"/>
           </a:xfrm>
           <a:prstGeom prst="rect">
             <a:avLst/>
@@ -6045,20 +5733,20 @@
                 </a:solidFill>
                 <a:latin typeface="Segoe UI"/>
               </a:rPr>
-              <a:t>50 GB</a:t>
-            </a:r>
-          </a:p>
-        </p:txBody>
-      </p:sp>
-      <p:sp>
-        <p:nvSpPr>
-          <p:cNvPr id="41" name="TextBox 40"/>
+              <a:t>Prioritário</a:t>
+            </a:r>
+          </a:p>
+        </p:txBody>
+      </p:sp>
+      <p:sp>
+        <p:nvSpPr>
+          <p:cNvPr id="43" name="TextBox 42"/>
           <p:cNvSpPr txBox="1"/>
           <p:nvPr/>
         </p:nvSpPr>
         <p:spPr>
           <a:xfrm>
-            <a:off x="3758184" y="4832604"/>
+            <a:off x="3758184" y="4828407"/>
             <a:ext cx="1234440" cy="274320"/>
           </a:xfrm>
           <a:prstGeom prst="rect">
@@ -6090,20 +5778,20 @@
                 </a:solidFill>
                 <a:latin typeface="Segoe UI"/>
               </a:rPr>
-              <a:t>Suporte</a:t>
-            </a:r>
-          </a:p>
-        </p:txBody>
-      </p:sp>
-      <p:sp>
-        <p:nvSpPr>
-          <p:cNvPr id="42" name="TextBox 41"/>
+              <a:t>SLA</a:t>
+            </a:r>
+          </a:p>
+        </p:txBody>
+      </p:sp>
+      <p:sp>
+        <p:nvSpPr>
+          <p:cNvPr id="44" name="TextBox 43"/>
           <p:cNvSpPr txBox="1"/>
           <p:nvPr/>
         </p:nvSpPr>
         <p:spPr>
           <a:xfrm>
-            <a:off x="4855464" y="4832604"/>
+            <a:off x="4855464" y="4828407"/>
             <a:ext cx="1051560" cy="274320"/>
           </a:xfrm>
           <a:prstGeom prst="rect">
@@ -6129,33 +5817,27 @@
               </a:spcAft>
             </a:pPr>
             <a:r>
-              <a:rPr lang="pt-BR" sz="950" b="1" noProof="0" dirty="0" err="1">
+              <a:rPr lang="pt-BR" sz="950" b="1" noProof="0" dirty="0">
                 <a:solidFill>
                   <a:srgbClr val="0F1B2E"/>
                 </a:solidFill>
                 <a:latin typeface="Segoe UI"/>
               </a:rPr>
-              <a:t>Prioritario</a:t>
-            </a:r>
-            <a:endParaRPr lang="pt-BR" sz="950" b="1" noProof="0" dirty="0">
-              <a:solidFill>
-                <a:srgbClr val="0F1B2E"/>
-              </a:solidFill>
-              <a:latin typeface="Segoe UI"/>
-            </a:endParaRPr>
-          </a:p>
-        </p:txBody>
-      </p:sp>
-      <p:sp>
-        <p:nvSpPr>
-          <p:cNvPr id="43" name="TextBox 42"/>
+              <a:t>8h uteis</a:t>
+            </a:r>
+          </a:p>
+        </p:txBody>
+      </p:sp>
+      <p:sp>
+        <p:nvSpPr>
+          <p:cNvPr id="45" name="TextBox 44"/>
           <p:cNvSpPr txBox="1"/>
           <p:nvPr/>
         </p:nvSpPr>
         <p:spPr>
           <a:xfrm>
-            <a:off x="3758184" y="5120640"/>
-            <a:ext cx="1234440" cy="274320"/>
+            <a:off x="3758184" y="5116443"/>
+            <a:ext cx="1234440" cy="146194"/>
           </a:xfrm>
           <a:prstGeom prst="rect">
             <a:avLst/>
@@ -6186,113 +5868,8 @@
                 </a:solidFill>
                 <a:latin typeface="Segoe UI"/>
               </a:rPr>
-              <a:t>SLA</a:t>
-            </a:r>
-          </a:p>
-        </p:txBody>
-      </p:sp>
-      <p:sp>
-        <p:nvSpPr>
-          <p:cNvPr id="44" name="TextBox 43"/>
-          <p:cNvSpPr txBox="1"/>
-          <p:nvPr/>
-        </p:nvSpPr>
-        <p:spPr>
-          <a:xfrm>
-            <a:off x="4855464" y="5120640"/>
-            <a:ext cx="1051560" cy="274320"/>
-          </a:xfrm>
-          <a:prstGeom prst="rect">
-            <a:avLst/>
-          </a:prstGeom>
-          <a:noFill/>
-        </p:spPr>
-        <p:txBody>
-          <a:bodyPr wrap="square" lIns="0" tIns="0" rIns="0" bIns="0" anchor="t">
-            <a:spAutoFit/>
-          </a:bodyPr>
-          <a:lstStyle/>
-          <a:p>
-            <a:pPr algn="r">
-              <a:lnSpc>
-                <a:spcPct val="100000"/>
-              </a:lnSpc>
-              <a:spcBef>
-                <a:spcPts val="0"/>
-              </a:spcBef>
-              <a:spcAft>
-                <a:spcPts val="400"/>
-              </a:spcAft>
-            </a:pPr>
-            <a:r>
-              <a:rPr lang="pt-BR" sz="950" b="1" noProof="0" dirty="0">
-                <a:solidFill>
-                  <a:srgbClr val="0F1B2E"/>
-                </a:solidFill>
-                <a:latin typeface="Segoe UI"/>
-              </a:rPr>
-              <a:t>8h uteis</a:t>
-            </a:r>
-          </a:p>
-        </p:txBody>
-      </p:sp>
-      <p:sp>
-        <p:nvSpPr>
-          <p:cNvPr id="45" name="TextBox 44"/>
-          <p:cNvSpPr txBox="1"/>
-          <p:nvPr/>
-        </p:nvSpPr>
-        <p:spPr>
-          <a:xfrm>
-            <a:off x="3758184" y="5408676"/>
-            <a:ext cx="1234440" cy="274320"/>
-          </a:xfrm>
-          <a:prstGeom prst="rect">
-            <a:avLst/>
-          </a:prstGeom>
-          <a:noFill/>
-        </p:spPr>
-        <p:txBody>
-          <a:bodyPr wrap="square" lIns="0" tIns="0" rIns="0" bIns="0" anchor="t">
-            <a:spAutoFit/>
-          </a:bodyPr>
-          <a:lstStyle/>
-          <a:p>
-            <a:pPr algn="l">
-              <a:lnSpc>
-                <a:spcPct val="100000"/>
-              </a:lnSpc>
-              <a:spcBef>
-                <a:spcPts val="0"/>
-              </a:spcBef>
-              <a:spcAft>
-                <a:spcPts val="400"/>
-              </a:spcAft>
-            </a:pPr>
-            <a:r>
-              <a:rPr lang="pt-BR" sz="950" b="0" noProof="0" dirty="0">
-                <a:solidFill>
-                  <a:srgbClr val="5B6B82"/>
-                </a:solidFill>
-                <a:latin typeface="Segoe UI"/>
-              </a:rPr>
-              <a:t>Teste </a:t>
-            </a:r>
-            <a:r>
-              <a:rPr lang="pt-BR" sz="950" b="0" noProof="0" dirty="0" err="1">
-                <a:solidFill>
-                  <a:srgbClr val="5B6B82"/>
-                </a:solidFill>
-                <a:latin typeface="Segoe UI"/>
-              </a:rPr>
-              <a:t>gratis</a:t>
-            </a:r>
-            <a:endParaRPr lang="pt-BR" sz="950" b="0" noProof="0" dirty="0">
-              <a:solidFill>
-                <a:srgbClr val="5B6B82"/>
-              </a:solidFill>
-              <a:latin typeface="Segoe UI"/>
-            </a:endParaRPr>
+              <a:t>Teste grátis</a:t>
+            </a:r>
           </a:p>
         </p:txBody>
       </p:sp>
@@ -6304,7 +5881,7 @@
         </p:nvSpPr>
         <p:spPr>
           <a:xfrm>
-            <a:off x="4855464" y="5408676"/>
+            <a:off x="4855464" y="5116443"/>
             <a:ext cx="1051560" cy="274320"/>
           </a:xfrm>
           <a:prstGeom prst="rect">
@@ -6495,7 +6072,7 @@
         <p:spPr>
           <a:xfrm>
             <a:off x="6601968" y="2468880"/>
-            <a:ext cx="2148840" cy="502920"/>
+            <a:ext cx="2148840" cy="161583"/>
           </a:xfrm>
           <a:prstGeom prst="rect">
             <a:avLst/>
@@ -6526,25 +6103,7 @@
                 </a:solidFill>
                 <a:latin typeface="Segoe UI"/>
               </a:rPr>
-              <a:t>Pessoas e </a:t>
-            </a:r>
-            <a:r>
-              <a:rPr lang="pt-BR" sz="1050" b="0" noProof="0" dirty="0" err="1">
-                <a:solidFill>
-                  <a:srgbClr val="5B6B82"/>
-                </a:solidFill>
-                <a:latin typeface="Segoe UI"/>
-              </a:rPr>
-              <a:t>seguranca</a:t>
-            </a:r>
-            <a:r>
-              <a:rPr lang="pt-BR" sz="1050" b="0" noProof="0" dirty="0">
-                <a:solidFill>
-                  <a:srgbClr val="5B6B82"/>
-                </a:solidFill>
-                <a:latin typeface="Segoe UI"/>
-              </a:rPr>
-              <a:t> no pacote</a:t>
+              <a:t>Pessoas e segurança no pacote</a:t>
             </a:r>
           </a:p>
         </p:txBody>
@@ -6558,7 +6117,7 @@
         <p:spPr>
           <a:xfrm>
             <a:off x="6601968" y="3063240"/>
-            <a:ext cx="2148840" cy="640080"/>
+            <a:ext cx="2148840" cy="415498"/>
           </a:xfrm>
           <a:prstGeom prst="rect">
             <a:avLst/>
@@ -6598,23 +6157,8 @@
                 </a:solidFill>
                 <a:latin typeface="Segoe UI"/>
               </a:rPr>
-              <a:t> /</a:t>
-            </a:r>
-            <a:r>
-              <a:rPr lang="pt-BR" sz="1200" b="0" noProof="0" dirty="0" err="1">
-                <a:solidFill>
-                  <a:srgbClr val="5B6B82"/>
-                </a:solidFill>
-                <a:latin typeface="Segoe UI"/>
-              </a:rPr>
-              <a:t>mes</a:t>
-            </a:r>
-            <a:endParaRPr lang="pt-BR" sz="1200" b="0" noProof="0" dirty="0">
-              <a:solidFill>
-                <a:srgbClr val="5B6B82"/>
-              </a:solidFill>
-              <a:latin typeface="Segoe UI"/>
-            </a:endParaRPr>
+              <a:t> /mês</a:t>
+            </a:r>
           </a:p>
         </p:txBody>
       </p:sp>
@@ -6717,7 +6261,7 @@
         <p:spPr>
           <a:xfrm>
             <a:off x="6601968" y="4133088"/>
-            <a:ext cx="1234440" cy="274320"/>
+            <a:ext cx="1234440" cy="146194"/>
           </a:xfrm>
           <a:prstGeom prst="rect">
             <a:avLst/>
@@ -6742,20 +6286,14 @@
               </a:spcAft>
             </a:pPr>
             <a:r>
-              <a:rPr lang="pt-BR" sz="950" b="0" noProof="0" dirty="0" err="1">
+              <a:rPr lang="pt-BR" sz="950" b="0" noProof="0" dirty="0">
                 <a:solidFill>
                   <a:srgbClr val="5B6B82"/>
                 </a:solidFill>
                 <a:latin typeface="Segoe UI"/>
               </a:rPr>
-              <a:t>Usuarios</a:t>
-            </a:r>
-            <a:endParaRPr lang="pt-BR" sz="950" b="0" noProof="0" dirty="0">
-              <a:solidFill>
-                <a:srgbClr val="5B6B82"/>
-              </a:solidFill>
-              <a:latin typeface="Segoe UI"/>
-            </a:endParaRPr>
+              <a:t>Usuários</a:t>
+            </a:r>
           </a:p>
         </p:txBody>
       </p:sp>
@@ -6896,13 +6434,13 @@
       </p:sp>
       <p:sp>
         <p:nvSpPr>
-          <p:cNvPr id="58" name="TextBox 57"/>
+          <p:cNvPr id="60" name="TextBox 59"/>
           <p:cNvSpPr txBox="1"/>
           <p:nvPr/>
         </p:nvSpPr>
         <p:spPr>
           <a:xfrm>
-            <a:off x="6601968" y="4709160"/>
+            <a:off x="6601968" y="4733248"/>
             <a:ext cx="1234440" cy="274320"/>
           </a:xfrm>
           <a:prstGeom prst="rect">
@@ -6934,20 +6472,20 @@
                 </a:solidFill>
                 <a:latin typeface="Segoe UI"/>
               </a:rPr>
-              <a:t>Armazenamento</a:t>
-            </a:r>
-          </a:p>
-        </p:txBody>
-      </p:sp>
-      <p:sp>
-        <p:nvSpPr>
-          <p:cNvPr id="59" name="TextBox 58"/>
+              <a:t>Suporte</a:t>
+            </a:r>
+          </a:p>
+        </p:txBody>
+      </p:sp>
+      <p:sp>
+        <p:nvSpPr>
+          <p:cNvPr id="61" name="TextBox 60"/>
           <p:cNvSpPr txBox="1"/>
           <p:nvPr/>
         </p:nvSpPr>
         <p:spPr>
           <a:xfrm>
-            <a:off x="7699248" y="4709160"/>
+            <a:off x="7699248" y="4733248"/>
             <a:ext cx="1051560" cy="274320"/>
           </a:xfrm>
           <a:prstGeom prst="rect">
@@ -6979,20 +6517,20 @@
                 </a:solidFill>
                 <a:latin typeface="Segoe UI"/>
               </a:rPr>
-              <a:t>200 GB</a:t>
-            </a:r>
-          </a:p>
-        </p:txBody>
-      </p:sp>
-      <p:sp>
-        <p:nvSpPr>
-          <p:cNvPr id="60" name="TextBox 59"/>
+              <a:t>Dedicado</a:t>
+            </a:r>
+          </a:p>
+        </p:txBody>
+      </p:sp>
+      <p:sp>
+        <p:nvSpPr>
+          <p:cNvPr id="62" name="TextBox 61"/>
           <p:cNvSpPr txBox="1"/>
           <p:nvPr/>
         </p:nvSpPr>
         <p:spPr>
           <a:xfrm>
-            <a:off x="6601968" y="4997196"/>
+            <a:off x="6601968" y="5021284"/>
             <a:ext cx="1234440" cy="274320"/>
           </a:xfrm>
           <a:prstGeom prst="rect">
@@ -7024,20 +6562,20 @@
                 </a:solidFill>
                 <a:latin typeface="Segoe UI"/>
               </a:rPr>
-              <a:t>Suporte</a:t>
-            </a:r>
-          </a:p>
-        </p:txBody>
-      </p:sp>
-      <p:sp>
-        <p:nvSpPr>
-          <p:cNvPr id="61" name="TextBox 60"/>
+              <a:t>SLA</a:t>
+            </a:r>
+          </a:p>
+        </p:txBody>
+      </p:sp>
+      <p:sp>
+        <p:nvSpPr>
+          <p:cNvPr id="63" name="TextBox 62"/>
           <p:cNvSpPr txBox="1"/>
           <p:nvPr/>
         </p:nvSpPr>
         <p:spPr>
           <a:xfrm>
-            <a:off x="7699248" y="4997196"/>
+            <a:off x="7699248" y="5021284"/>
             <a:ext cx="1051560" cy="274320"/>
           </a:xfrm>
           <a:prstGeom prst="rect">
@@ -7069,21 +6607,21 @@
                 </a:solidFill>
                 <a:latin typeface="Segoe UI"/>
               </a:rPr>
-              <a:t>Dedicado</a:t>
-            </a:r>
-          </a:p>
-        </p:txBody>
-      </p:sp>
-      <p:sp>
-        <p:nvSpPr>
-          <p:cNvPr id="62" name="TextBox 61"/>
+              <a:t>4h uteis</a:t>
+            </a:r>
+          </a:p>
+        </p:txBody>
+      </p:sp>
+      <p:sp>
+        <p:nvSpPr>
+          <p:cNvPr id="64" name="TextBox 63"/>
           <p:cNvSpPr txBox="1"/>
           <p:nvPr/>
         </p:nvSpPr>
         <p:spPr>
           <a:xfrm>
-            <a:off x="6601968" y="5285232"/>
-            <a:ext cx="1234440" cy="274320"/>
+            <a:off x="6601968" y="5309320"/>
+            <a:ext cx="1234440" cy="146194"/>
           </a:xfrm>
           <a:prstGeom prst="rect">
             <a:avLst/>
@@ -7114,113 +6652,8 @@
                 </a:solidFill>
                 <a:latin typeface="Segoe UI"/>
               </a:rPr>
-              <a:t>SLA</a:t>
-            </a:r>
-          </a:p>
-        </p:txBody>
-      </p:sp>
-      <p:sp>
-        <p:nvSpPr>
-          <p:cNvPr id="63" name="TextBox 62"/>
-          <p:cNvSpPr txBox="1"/>
-          <p:nvPr/>
-        </p:nvSpPr>
-        <p:spPr>
-          <a:xfrm>
-            <a:off x="7699248" y="5285232"/>
-            <a:ext cx="1051560" cy="274320"/>
-          </a:xfrm>
-          <a:prstGeom prst="rect">
-            <a:avLst/>
-          </a:prstGeom>
-          <a:noFill/>
-        </p:spPr>
-        <p:txBody>
-          <a:bodyPr wrap="square" lIns="0" tIns="0" rIns="0" bIns="0" anchor="t">
-            <a:spAutoFit/>
-          </a:bodyPr>
-          <a:lstStyle/>
-          <a:p>
-            <a:pPr algn="r">
-              <a:lnSpc>
-                <a:spcPct val="100000"/>
-              </a:lnSpc>
-              <a:spcBef>
-                <a:spcPts val="0"/>
-              </a:spcBef>
-              <a:spcAft>
-                <a:spcPts val="400"/>
-              </a:spcAft>
-            </a:pPr>
-            <a:r>
-              <a:rPr lang="pt-BR" sz="950" b="1" noProof="0" dirty="0">
-                <a:solidFill>
-                  <a:srgbClr val="0F1B2E"/>
-                </a:solidFill>
-                <a:latin typeface="Segoe UI"/>
-              </a:rPr>
-              <a:t>4h uteis</a:t>
-            </a:r>
-          </a:p>
-        </p:txBody>
-      </p:sp>
-      <p:sp>
-        <p:nvSpPr>
-          <p:cNvPr id="64" name="TextBox 63"/>
-          <p:cNvSpPr txBox="1"/>
-          <p:nvPr/>
-        </p:nvSpPr>
-        <p:spPr>
-          <a:xfrm>
-            <a:off x="6601968" y="5573268"/>
-            <a:ext cx="1234440" cy="274320"/>
-          </a:xfrm>
-          <a:prstGeom prst="rect">
-            <a:avLst/>
-          </a:prstGeom>
-          <a:noFill/>
-        </p:spPr>
-        <p:txBody>
-          <a:bodyPr wrap="square" lIns="0" tIns="0" rIns="0" bIns="0" anchor="t">
-            <a:spAutoFit/>
-          </a:bodyPr>
-          <a:lstStyle/>
-          <a:p>
-            <a:pPr algn="l">
-              <a:lnSpc>
-                <a:spcPct val="100000"/>
-              </a:lnSpc>
-              <a:spcBef>
-                <a:spcPts val="0"/>
-              </a:spcBef>
-              <a:spcAft>
-                <a:spcPts val="400"/>
-              </a:spcAft>
-            </a:pPr>
-            <a:r>
-              <a:rPr lang="pt-BR" sz="950" b="0" noProof="0" dirty="0">
-                <a:solidFill>
-                  <a:srgbClr val="5B6B82"/>
-                </a:solidFill>
-                <a:latin typeface="Segoe UI"/>
-              </a:rPr>
-              <a:t>Teste </a:t>
-            </a:r>
-            <a:r>
-              <a:rPr lang="pt-BR" sz="950" b="0" noProof="0" dirty="0" err="1">
-                <a:solidFill>
-                  <a:srgbClr val="5B6B82"/>
-                </a:solidFill>
-                <a:latin typeface="Segoe UI"/>
-              </a:rPr>
-              <a:t>gratis</a:t>
-            </a:r>
-            <a:endParaRPr lang="pt-BR" sz="950" b="0" noProof="0" dirty="0">
-              <a:solidFill>
-                <a:srgbClr val="5B6B82"/>
-              </a:solidFill>
-              <a:latin typeface="Segoe UI"/>
-            </a:endParaRPr>
+              <a:t>Teste grátis</a:t>
+            </a:r>
           </a:p>
         </p:txBody>
       </p:sp>
@@ -7232,7 +6665,7 @@
         </p:nvSpPr>
         <p:spPr>
           <a:xfrm>
-            <a:off x="7699248" y="5573268"/>
+            <a:off x="7699248" y="5309320"/>
             <a:ext cx="1051560" cy="274320"/>
           </a:xfrm>
           <a:prstGeom prst="rect">
@@ -7423,7 +6856,7 @@
         <p:spPr>
           <a:xfrm>
             <a:off x="9445752" y="2468880"/>
-            <a:ext cx="2148840" cy="502920"/>
+            <a:ext cx="2148840" cy="161583"/>
           </a:xfrm>
           <a:prstGeom prst="rect">
             <a:avLst/>
@@ -7454,25 +6887,7 @@
                 </a:solidFill>
                 <a:latin typeface="Segoe UI"/>
               </a:rPr>
-              <a:t>Plataforma completa, </a:t>
-            </a:r>
-            <a:r>
-              <a:rPr lang="pt-BR" sz="1050" b="0" noProof="0" dirty="0" err="1">
-                <a:solidFill>
-                  <a:srgbClr val="5B6B82"/>
-                </a:solidFill>
-                <a:latin typeface="Segoe UI"/>
-              </a:rPr>
-              <a:t>incl</a:t>
-            </a:r>
-            <a:r>
-              <a:rPr lang="pt-BR" sz="1050" b="0" noProof="0" dirty="0">
-                <a:solidFill>
-                  <a:srgbClr val="5B6B82"/>
-                </a:solidFill>
-                <a:latin typeface="Segoe UI"/>
-              </a:rPr>
-              <a:t>. Premio</a:t>
+              <a:t>Plataforma completa, inc.. Premio</a:t>
             </a:r>
           </a:p>
         </p:txBody>
@@ -7486,7 +6901,7 @@
         <p:spPr>
           <a:xfrm>
             <a:off x="9445752" y="3063240"/>
-            <a:ext cx="2148840" cy="640080"/>
+            <a:ext cx="2148840" cy="415498"/>
           </a:xfrm>
           <a:prstGeom prst="rect">
             <a:avLst/>
@@ -7526,23 +6941,8 @@
                 </a:solidFill>
                 <a:latin typeface="Segoe UI"/>
               </a:rPr>
-              <a:t> /</a:t>
-            </a:r>
-            <a:r>
-              <a:rPr lang="pt-BR" sz="1200" b="0" noProof="0" dirty="0" err="1">
-                <a:solidFill>
-                  <a:srgbClr val="5B6B82"/>
-                </a:solidFill>
-                <a:latin typeface="Segoe UI"/>
-              </a:rPr>
-              <a:t>mes</a:t>
-            </a:r>
-            <a:endParaRPr lang="pt-BR" sz="1200" b="0" noProof="0" dirty="0">
-              <a:solidFill>
-                <a:srgbClr val="5B6B82"/>
-              </a:solidFill>
-              <a:latin typeface="Segoe UI"/>
-            </a:endParaRPr>
+              <a:t> /mês</a:t>
+            </a:r>
           </a:p>
         </p:txBody>
       </p:sp>
@@ -7645,7 +7045,7 @@
         <p:spPr>
           <a:xfrm>
             <a:off x="9445752" y="4133088"/>
-            <a:ext cx="1234440" cy="274320"/>
+            <a:ext cx="1234440" cy="146194"/>
           </a:xfrm>
           <a:prstGeom prst="rect">
             <a:avLst/>
@@ -7670,20 +7070,14 @@
               </a:spcAft>
             </a:pPr>
             <a:r>
-              <a:rPr lang="pt-BR" sz="950" b="0" noProof="0" dirty="0" err="1">
+              <a:rPr lang="pt-BR" sz="950" b="0" noProof="0" dirty="0">
                 <a:solidFill>
                   <a:srgbClr val="5B6B82"/>
                 </a:solidFill>
                 <a:latin typeface="Segoe UI"/>
               </a:rPr>
-              <a:t>Usuarios</a:t>
-            </a:r>
-            <a:endParaRPr lang="pt-BR" sz="950" b="0" noProof="0" dirty="0">
-              <a:solidFill>
-                <a:srgbClr val="5B6B82"/>
-              </a:solidFill>
-              <a:latin typeface="Segoe UI"/>
-            </a:endParaRPr>
+              <a:t>Usuários</a:t>
+            </a:r>
           </a:p>
         </p:txBody>
       </p:sp>
@@ -7824,13 +7218,13 @@
       </p:sp>
       <p:sp>
         <p:nvSpPr>
-          <p:cNvPr id="77" name="TextBox 76"/>
+          <p:cNvPr id="79" name="TextBox 78"/>
           <p:cNvSpPr txBox="1"/>
           <p:nvPr/>
         </p:nvSpPr>
         <p:spPr>
           <a:xfrm>
-            <a:off x="9445752" y="4709160"/>
+            <a:off x="9445752" y="4695536"/>
             <a:ext cx="1234440" cy="274320"/>
           </a:xfrm>
           <a:prstGeom prst="rect">
@@ -7862,20 +7256,20 @@
                 </a:solidFill>
                 <a:latin typeface="Segoe UI"/>
               </a:rPr>
-              <a:t>Armazenamento</a:t>
-            </a:r>
-          </a:p>
-        </p:txBody>
-      </p:sp>
-      <p:sp>
-        <p:nvSpPr>
-          <p:cNvPr id="78" name="TextBox 77"/>
+              <a:t>Suporte</a:t>
+            </a:r>
+          </a:p>
+        </p:txBody>
+      </p:sp>
+      <p:sp>
+        <p:nvSpPr>
+          <p:cNvPr id="80" name="TextBox 79"/>
           <p:cNvSpPr txBox="1"/>
           <p:nvPr/>
         </p:nvSpPr>
         <p:spPr>
           <a:xfrm>
-            <a:off x="10543032" y="4709160"/>
+            <a:off x="10543032" y="4695536"/>
             <a:ext cx="1051560" cy="274320"/>
           </a:xfrm>
           <a:prstGeom prst="rect">
@@ -7907,20 +7301,20 @@
                 </a:solidFill>
                 <a:latin typeface="Segoe UI"/>
               </a:rPr>
-              <a:t>Ilimitado</a:t>
-            </a:r>
-          </a:p>
-        </p:txBody>
-      </p:sp>
-      <p:sp>
-        <p:nvSpPr>
-          <p:cNvPr id="79" name="TextBox 78"/>
+              <a:t>SLA customizado</a:t>
+            </a:r>
+          </a:p>
+        </p:txBody>
+      </p:sp>
+      <p:sp>
+        <p:nvSpPr>
+          <p:cNvPr id="81" name="TextBox 80"/>
           <p:cNvSpPr txBox="1"/>
           <p:nvPr/>
         </p:nvSpPr>
         <p:spPr>
           <a:xfrm>
-            <a:off x="9445752" y="4997196"/>
+            <a:off x="9445752" y="4983572"/>
             <a:ext cx="1234440" cy="274320"/>
           </a:xfrm>
           <a:prstGeom prst="rect">
@@ -7952,20 +7346,20 @@
                 </a:solidFill>
                 <a:latin typeface="Segoe UI"/>
               </a:rPr>
-              <a:t>Suporte</a:t>
-            </a:r>
-          </a:p>
-        </p:txBody>
-      </p:sp>
-      <p:sp>
-        <p:nvSpPr>
-          <p:cNvPr id="80" name="TextBox 79"/>
+              <a:t>SLA</a:t>
+            </a:r>
+          </a:p>
+        </p:txBody>
+      </p:sp>
+      <p:sp>
+        <p:nvSpPr>
+          <p:cNvPr id="82" name="TextBox 81"/>
           <p:cNvSpPr txBox="1"/>
           <p:nvPr/>
         </p:nvSpPr>
         <p:spPr>
           <a:xfrm>
-            <a:off x="10543032" y="4997196"/>
+            <a:off x="10543032" y="4983572"/>
             <a:ext cx="1051560" cy="274320"/>
           </a:xfrm>
           <a:prstGeom prst="rect">
@@ -7997,21 +7391,21 @@
                 </a:solidFill>
                 <a:latin typeface="Segoe UI"/>
               </a:rPr>
-              <a:t>SLA customizado</a:t>
-            </a:r>
-          </a:p>
-        </p:txBody>
-      </p:sp>
-      <p:sp>
-        <p:nvSpPr>
-          <p:cNvPr id="81" name="TextBox 80"/>
+              <a:t>Contrato</a:t>
+            </a:r>
+          </a:p>
+        </p:txBody>
+      </p:sp>
+      <p:sp>
+        <p:nvSpPr>
+          <p:cNvPr id="83" name="TextBox 82"/>
           <p:cNvSpPr txBox="1"/>
           <p:nvPr/>
         </p:nvSpPr>
         <p:spPr>
           <a:xfrm>
-            <a:off x="9445752" y="5285232"/>
-            <a:ext cx="1234440" cy="274320"/>
+            <a:off x="9445752" y="5271608"/>
+            <a:ext cx="1234440" cy="146194"/>
           </a:xfrm>
           <a:prstGeom prst="rect">
             <a:avLst/>
@@ -8042,20 +7436,20 @@
                 </a:solidFill>
                 <a:latin typeface="Segoe UI"/>
               </a:rPr>
-              <a:t>SLA</a:t>
-            </a:r>
-          </a:p>
-        </p:txBody>
-      </p:sp>
-      <p:sp>
-        <p:nvSpPr>
-          <p:cNvPr id="82" name="TextBox 81"/>
+              <a:t>Teste grátis</a:t>
+            </a:r>
+          </a:p>
+        </p:txBody>
+      </p:sp>
+      <p:sp>
+        <p:nvSpPr>
+          <p:cNvPr id="84" name="TextBox 83"/>
           <p:cNvSpPr txBox="1"/>
           <p:nvPr/>
         </p:nvSpPr>
         <p:spPr>
           <a:xfrm>
-            <a:off x="10543032" y="5285232"/>
+            <a:off x="10543032" y="5271608"/>
             <a:ext cx="1051560" cy="274320"/>
           </a:xfrm>
           <a:prstGeom prst="rect">
@@ -8087,21 +7481,21 @@
                 </a:solidFill>
                 <a:latin typeface="Segoe UI"/>
               </a:rPr>
-              <a:t>Contrato</a:t>
-            </a:r>
-          </a:p>
-        </p:txBody>
-      </p:sp>
-      <p:sp>
-        <p:nvSpPr>
-          <p:cNvPr id="83" name="TextBox 82"/>
+              <a:t>30 dias</a:t>
+            </a:r>
+          </a:p>
+        </p:txBody>
+      </p:sp>
+      <p:sp>
+        <p:nvSpPr>
+          <p:cNvPr id="85" name="TextBox 84"/>
           <p:cNvSpPr txBox="1"/>
           <p:nvPr/>
         </p:nvSpPr>
         <p:spPr>
           <a:xfrm>
-            <a:off x="9445752" y="5573268"/>
-            <a:ext cx="1234440" cy="274320"/>
+            <a:off x="640080" y="6089904"/>
+            <a:ext cx="10972800" cy="138499"/>
           </a:xfrm>
           <a:prstGeom prst="rect">
             <a:avLst/>
@@ -8126,136 +7520,13 @@
               </a:spcAft>
             </a:pPr>
             <a:r>
-              <a:rPr lang="pt-BR" sz="950" b="0" noProof="0" dirty="0">
+              <a:rPr lang="pt-BR" sz="900" b="0" noProof="0" dirty="0">
                 <a:solidFill>
                   <a:srgbClr val="5B6B82"/>
                 </a:solidFill>
                 <a:latin typeface="Segoe UI"/>
               </a:rPr>
-              <a:t>Teste </a:t>
-            </a:r>
-            <a:r>
-              <a:rPr lang="pt-BR" sz="950" b="0" noProof="0" dirty="0" err="1">
-                <a:solidFill>
-                  <a:srgbClr val="5B6B82"/>
-                </a:solidFill>
-                <a:latin typeface="Segoe UI"/>
-              </a:rPr>
-              <a:t>gratis</a:t>
-            </a:r>
-            <a:endParaRPr lang="pt-BR" sz="950" b="0" noProof="0" dirty="0">
-              <a:solidFill>
-                <a:srgbClr val="5B6B82"/>
-              </a:solidFill>
-              <a:latin typeface="Segoe UI"/>
-            </a:endParaRPr>
-          </a:p>
-        </p:txBody>
-      </p:sp>
-      <p:sp>
-        <p:nvSpPr>
-          <p:cNvPr id="84" name="TextBox 83"/>
-          <p:cNvSpPr txBox="1"/>
-          <p:nvPr/>
-        </p:nvSpPr>
-        <p:spPr>
-          <a:xfrm>
-            <a:off x="10543032" y="5573268"/>
-            <a:ext cx="1051560" cy="274320"/>
-          </a:xfrm>
-          <a:prstGeom prst="rect">
-            <a:avLst/>
-          </a:prstGeom>
-          <a:noFill/>
-        </p:spPr>
-        <p:txBody>
-          <a:bodyPr wrap="square" lIns="0" tIns="0" rIns="0" bIns="0" anchor="t">
-            <a:spAutoFit/>
-          </a:bodyPr>
-          <a:lstStyle/>
-          <a:p>
-            <a:pPr algn="r">
-              <a:lnSpc>
-                <a:spcPct val="100000"/>
-              </a:lnSpc>
-              <a:spcBef>
-                <a:spcPts val="0"/>
-              </a:spcBef>
-              <a:spcAft>
-                <a:spcPts val="400"/>
-              </a:spcAft>
-            </a:pPr>
-            <a:r>
-              <a:rPr lang="pt-BR" sz="950" b="1" noProof="0" dirty="0">
-                <a:solidFill>
-                  <a:srgbClr val="0F1B2E"/>
-                </a:solidFill>
-                <a:latin typeface="Segoe UI"/>
-              </a:rPr>
-              <a:t>30 dias</a:t>
-            </a:r>
-          </a:p>
-        </p:txBody>
-      </p:sp>
-      <p:sp>
-        <p:nvSpPr>
-          <p:cNvPr id="85" name="TextBox 84"/>
-          <p:cNvSpPr txBox="1"/>
-          <p:nvPr/>
-        </p:nvSpPr>
-        <p:spPr>
-          <a:xfrm>
-            <a:off x="640080" y="6089904"/>
-            <a:ext cx="10972800" cy="274320"/>
-          </a:xfrm>
-          <a:prstGeom prst="rect">
-            <a:avLst/>
-          </a:prstGeom>
-          <a:noFill/>
-        </p:spPr>
-        <p:txBody>
-          <a:bodyPr wrap="square" lIns="0" tIns="0" rIns="0" bIns="0" anchor="t">
-            <a:spAutoFit/>
-          </a:bodyPr>
-          <a:lstStyle/>
-          <a:p>
-            <a:pPr algn="l">
-              <a:lnSpc>
-                <a:spcPct val="100000"/>
-              </a:lnSpc>
-              <a:spcBef>
-                <a:spcPts val="0"/>
-              </a:spcBef>
-              <a:spcAft>
-                <a:spcPts val="400"/>
-              </a:spcAft>
-            </a:pPr>
-            <a:r>
-              <a:rPr lang="pt-BR" sz="900" b="0" noProof="0" dirty="0">
-                <a:solidFill>
-                  <a:srgbClr val="5B6B82"/>
-                </a:solidFill>
-                <a:latin typeface="Segoe UI"/>
-              </a:rPr>
-              <a:t>Valores de referencia da plataforma. Plano Personalizado </a:t>
-            </a:r>
-            <a:r>
-              <a:rPr lang="pt-BR" sz="900" b="0" noProof="0" dirty="0" err="1">
-                <a:solidFill>
-                  <a:srgbClr val="5B6B82"/>
-                </a:solidFill>
-                <a:latin typeface="Segoe UI"/>
-              </a:rPr>
-              <a:t>disponivel</a:t>
-            </a:r>
-            <a:r>
-              <a:rPr lang="pt-BR" sz="900" b="0" noProof="0" dirty="0">
-                <a:solidFill>
-                  <a:srgbClr val="5B6B82"/>
-                </a:solidFill>
-                <a:latin typeface="Segoe UI"/>
-              </a:rPr>
-              <a:t> sob contrato para necessidades especificas.</a:t>
+              <a:t>Valores de referencia da plataforma. Plano Personalizado disponível sob contrato para necessidades especificas.</a:t>
             </a:r>
           </a:p>
         </p:txBody>
@@ -8430,78 +7701,6 @@
       </p:sp>
       <p:sp>
         <p:nvSpPr>
-          <p:cNvPr id="5" name="TextBox 4"/>
-          <p:cNvSpPr txBox="1"/>
-          <p:nvPr/>
-        </p:nvSpPr>
-        <p:spPr>
-          <a:xfrm>
-            <a:off x="502920" y="6446520"/>
-            <a:ext cx="5486400" cy="320040"/>
-          </a:xfrm>
-          <a:prstGeom prst="rect">
-            <a:avLst/>
-          </a:prstGeom>
-          <a:noFill/>
-        </p:spPr>
-        <p:txBody>
-          <a:bodyPr wrap="square" lIns="0" tIns="0" rIns="0" bIns="0" anchor="t">
-            <a:spAutoFit/>
-          </a:bodyPr>
-          <a:lstStyle/>
-          <a:p>
-            <a:pPr algn="l">
-              <a:lnSpc>
-                <a:spcPct val="100000"/>
-              </a:lnSpc>
-              <a:spcBef>
-                <a:spcPts val="0"/>
-              </a:spcBef>
-              <a:spcAft>
-                <a:spcPts val="400"/>
-              </a:spcAft>
-            </a:pPr>
-            <a:r>
-              <a:rPr lang="pt-BR" sz="900" b="1" noProof="0" dirty="0">
-                <a:solidFill>
-                  <a:srgbClr val="2B5CE6"/>
-                </a:solidFill>
-                <a:latin typeface="Segoe UI"/>
-              </a:rPr>
-              <a:t>GESTAO 360</a:t>
-            </a:r>
-            <a:r>
-              <a:rPr lang="pt-BR" sz="900" b="0" noProof="0" dirty="0">
-                <a:solidFill>
-                  <a:srgbClr val="5B6B82"/>
-                </a:solidFill>
-                <a:latin typeface="Segoe UI"/>
-              </a:rPr>
-              <a:t>   •   Plataforma corporativa de </a:t>
-            </a:r>
-            <a:r>
-              <a:rPr lang="pt-BR" sz="900" b="0" noProof="0" dirty="0" err="1">
-                <a:solidFill>
-                  <a:srgbClr val="5B6B82"/>
-                </a:solidFill>
-                <a:latin typeface="Segoe UI"/>
-              </a:rPr>
-              <a:t>gestao</a:t>
-            </a:r>
-            <a:r>
-              <a:rPr lang="pt-BR" sz="900" b="0" noProof="0" dirty="0">
-                <a:solidFill>
-                  <a:srgbClr val="5B6B82"/>
-                </a:solidFill>
-                <a:latin typeface="Segoe UI"/>
-              </a:rPr>
-              <a:t>   •   gestao360.org</a:t>
-            </a:r>
-          </a:p>
-        </p:txBody>
-      </p:sp>
-      <p:sp>
-        <p:nvSpPr>
           <p:cNvPr id="6" name="TextBox 5"/>
           <p:cNvSpPr txBox="1"/>
           <p:nvPr/>
@@ -8554,14 +7753,14 @@
           <p:nvPr>
             <p:extLst>
               <p:ext uri="{D42A27DB-BD31-4B8C-83A1-F6EECF244321}">
-                <p14:modId xmlns:p14="http://schemas.microsoft.com/office/powerpoint/2010/main" val="1247677663"/>
+                <p14:modId xmlns:p14="http://schemas.microsoft.com/office/powerpoint/2010/main" val="1587915187"/>
               </p:ext>
             </p:extLst>
           </p:nvPr>
         </p:nvGraphicFramePr>
         <p:xfrm>
           <a:off x="640080" y="1783080"/>
-          <a:ext cx="10908792" cy="4279392"/>
+          <a:ext cx="10908792" cy="3803904"/>
         </p:xfrm>
         <a:graphic>
           <a:graphicData uri="http://schemas.openxmlformats.org/drawingml/2006/table">
@@ -8850,22 +8049,13 @@
                     <a:p>
                       <a:pPr algn="l"/>
                       <a:r>
-                        <a:rPr lang="pt-BR" sz="1200" b="1" noProof="0" dirty="0" err="1">
-                          <a:solidFill>
-                            <a:srgbClr val="0F1B2E"/>
-                          </a:solidFill>
-                          <a:latin typeface="Segoe UI"/>
-                        </a:rPr>
-                        <a:t>Implantacao</a:t>
-                      </a:r>
-                      <a:r>
                         <a:rPr lang="pt-BR" sz="1200" b="1" noProof="0" dirty="0">
                           <a:solidFill>
                             <a:srgbClr val="0F1B2E"/>
                           </a:solidFill>
                           <a:latin typeface="Segoe UI"/>
                         </a:rPr>
-                        <a:t> (setup)</a:t>
+                        <a:t>Implantação (setup)</a:t>
                       </a:r>
                     </a:p>
                   </a:txBody>
@@ -8882,20 +8072,14 @@
                     <a:p>
                       <a:pPr algn="ctr"/>
                       <a:r>
-                        <a:rPr lang="pt-BR" sz="1200" b="1" noProof="0" dirty="0" err="1">
+                        <a:rPr lang="pt-BR" sz="1200" b="1" noProof="0" dirty="0">
                           <a:solidFill>
                             <a:srgbClr val="2B5CE6"/>
                           </a:solidFill>
                           <a:latin typeface="Segoe UI"/>
                         </a:rPr>
-                        <a:t>Gratis</a:t>
+                        <a:t>Grátis</a:t>
                       </a:r>
-                      <a:endParaRPr lang="pt-BR" sz="1200" b="1" noProof="0" dirty="0">
-                        <a:solidFill>
-                          <a:srgbClr val="2B5CE6"/>
-                        </a:solidFill>
-                        <a:latin typeface="Segoe UI"/>
-                      </a:endParaRPr>
                     </a:p>
                   </a:txBody>
                   <a:tcPr marL="128016" marT="27432" marB="27432" anchor="ctr">
@@ -8987,22 +8171,13 @@
                     <a:p>
                       <a:pPr algn="l"/>
                       <a:r>
-                        <a:rPr lang="pt-BR" sz="1200" b="1" noProof="0" dirty="0" err="1">
-                          <a:solidFill>
-                            <a:srgbClr val="0F1B2E"/>
-                          </a:solidFill>
-                          <a:latin typeface="Segoe UI"/>
-                        </a:rPr>
-                        <a:t>Usuarios</a:t>
-                      </a:r>
-                      <a:r>
                         <a:rPr lang="pt-BR" sz="1200" b="1" noProof="0" dirty="0">
                           <a:solidFill>
                             <a:srgbClr val="0F1B2E"/>
                           </a:solidFill>
                           <a:latin typeface="Segoe UI"/>
                         </a:rPr>
-                        <a:t> inclusos</a:t>
+                        <a:t>Usuários inclusos</a:t>
                       </a:r>
                     </a:p>
                   </a:txBody>
@@ -9246,13 +8421,13 @@
                           </a:solidFill>
                           <a:latin typeface="Segoe UI"/>
                         </a:rPr>
-                        <a:t>Armazenamento</a:t>
+                        <a:t>Nível de suporte</a:t>
                       </a:r>
                     </a:p>
                   </a:txBody>
                   <a:tcPr marL="128016" marT="27432" marB="27432" anchor="ctr">
                     <a:solidFill>
-                      <a:srgbClr val="FFFFFF"/>
+                      <a:srgbClr val="EEF3FA"/>
                     </a:solidFill>
                   </a:tcPr>
                 </a:tc>
@@ -9269,13 +8444,13 @@
                           </a:solidFill>
                           <a:latin typeface="Segoe UI"/>
                         </a:rPr>
-                        <a:t>10 GB</a:t>
+                        <a:t>Padrão</a:t>
                       </a:r>
                     </a:p>
                   </a:txBody>
                   <a:tcPr marL="128016" marT="27432" marB="27432" anchor="ctr">
                     <a:solidFill>
-                      <a:srgbClr val="FFFFFF"/>
+                      <a:srgbClr val="EEF3FA"/>
                     </a:solidFill>
                   </a:tcPr>
                 </a:tc>
@@ -9292,151 +8467,8 @@
                           </a:solidFill>
                           <a:latin typeface="Segoe UI"/>
                         </a:rPr>
-                        <a:t>50 GB</a:t>
+                        <a:t>Prioritário</a:t>
                       </a:r>
-                    </a:p>
-                  </a:txBody>
-                  <a:tcPr marL="128016" marT="27432" marB="27432" anchor="ctr">
-                    <a:solidFill>
-                      <a:srgbClr val="FFFFFF"/>
-                    </a:solidFill>
-                  </a:tcPr>
-                </a:tc>
-                <a:tc>
-                  <a:txBody>
-                    <a:bodyPr/>
-                    <a:lstStyle/>
-                    <a:p>
-                      <a:pPr algn="ctr"/>
-                      <a:r>
-                        <a:rPr lang="pt-BR" sz="1200" b="0" noProof="0" dirty="0">
-                          <a:solidFill>
-                            <a:srgbClr val="0F1B2E"/>
-                          </a:solidFill>
-                          <a:latin typeface="Segoe UI"/>
-                        </a:rPr>
-                        <a:t>200 GB</a:t>
-                      </a:r>
-                    </a:p>
-                  </a:txBody>
-                  <a:tcPr marL="128016" marT="27432" marB="27432" anchor="ctr">
-                    <a:solidFill>
-                      <a:srgbClr val="FFFFFF"/>
-                    </a:solidFill>
-                  </a:tcPr>
-                </a:tc>
-                <a:tc>
-                  <a:txBody>
-                    <a:bodyPr/>
-                    <a:lstStyle/>
-                    <a:p>
-                      <a:pPr algn="ctr"/>
-                      <a:r>
-                        <a:rPr lang="pt-BR" sz="1200" b="0" noProof="0" dirty="0">
-                          <a:solidFill>
-                            <a:srgbClr val="0F1B2E"/>
-                          </a:solidFill>
-                          <a:latin typeface="Segoe UI"/>
-                        </a:rPr>
-                        <a:t>Ilimitado</a:t>
-                      </a:r>
-                    </a:p>
-                  </a:txBody>
-                  <a:tcPr marL="128016" marT="27432" marB="27432" anchor="ctr">
-                    <a:solidFill>
-                      <a:srgbClr val="FFFFFF"/>
-                    </a:solidFill>
-                  </a:tcPr>
-                </a:tc>
-                <a:extLst>
-                  <a:ext uri="{0D108BD9-81ED-4DB2-BD59-A6C34878D82A}">
-                    <a16:rowId xmlns:a16="http://schemas.microsoft.com/office/drawing/2014/main" val="10005"/>
-                  </a:ext>
-                </a:extLst>
-              </a:tr>
-              <a:tr h="475488">
-                <a:tc>
-                  <a:txBody>
-                    <a:bodyPr/>
-                    <a:lstStyle/>
-                    <a:p>
-                      <a:pPr algn="l"/>
-                      <a:r>
-                        <a:rPr lang="pt-BR" sz="1200" b="1" noProof="0" dirty="0" err="1">
-                          <a:solidFill>
-                            <a:srgbClr val="0F1B2E"/>
-                          </a:solidFill>
-                          <a:latin typeface="Segoe UI"/>
-                        </a:rPr>
-                        <a:t>Nivel</a:t>
-                      </a:r>
-                      <a:r>
-                        <a:rPr lang="pt-BR" sz="1200" b="1" noProof="0" dirty="0">
-                          <a:solidFill>
-                            <a:srgbClr val="0F1B2E"/>
-                          </a:solidFill>
-                          <a:latin typeface="Segoe UI"/>
-                        </a:rPr>
-                        <a:t> de suporte</a:t>
-                      </a:r>
-                    </a:p>
-                  </a:txBody>
-                  <a:tcPr marL="128016" marT="27432" marB="27432" anchor="ctr">
-                    <a:solidFill>
-                      <a:srgbClr val="EEF3FA"/>
-                    </a:solidFill>
-                  </a:tcPr>
-                </a:tc>
-                <a:tc>
-                  <a:txBody>
-                    <a:bodyPr/>
-                    <a:lstStyle/>
-                    <a:p>
-                      <a:pPr algn="ctr"/>
-                      <a:r>
-                        <a:rPr lang="pt-BR" sz="1200" b="0" noProof="0" dirty="0" err="1">
-                          <a:solidFill>
-                            <a:srgbClr val="0F1B2E"/>
-                          </a:solidFill>
-                          <a:latin typeface="Segoe UI"/>
-                        </a:rPr>
-                        <a:t>Padrao</a:t>
-                      </a:r>
-                      <a:endParaRPr lang="pt-BR" sz="1200" b="0" noProof="0" dirty="0">
-                        <a:solidFill>
-                          <a:srgbClr val="0F1B2E"/>
-                        </a:solidFill>
-                        <a:latin typeface="Segoe UI"/>
-                      </a:endParaRPr>
-                    </a:p>
-                  </a:txBody>
-                  <a:tcPr marL="128016" marT="27432" marB="27432" anchor="ctr">
-                    <a:solidFill>
-                      <a:srgbClr val="EEF3FA"/>
-                    </a:solidFill>
-                  </a:tcPr>
-                </a:tc>
-                <a:tc>
-                  <a:txBody>
-                    <a:bodyPr/>
-                    <a:lstStyle/>
-                    <a:p>
-                      <a:pPr algn="ctr"/>
-                      <a:r>
-                        <a:rPr lang="pt-BR" sz="1200" b="0" noProof="0" dirty="0" err="1">
-                          <a:solidFill>
-                            <a:srgbClr val="0F1B2E"/>
-                          </a:solidFill>
-                          <a:latin typeface="Segoe UI"/>
-                        </a:rPr>
-                        <a:t>Prioritario</a:t>
-                      </a:r>
-                      <a:endParaRPr lang="pt-BR" sz="1200" b="0" noProof="0" dirty="0">
-                        <a:solidFill>
-                          <a:srgbClr val="0F1B2E"/>
-                        </a:solidFill>
-                        <a:latin typeface="Segoe UI"/>
-                      </a:endParaRPr>
                     </a:p>
                   </a:txBody>
                   <a:tcPr marL="128016" marT="27432" marB="27432" anchor="ctr">
@@ -9481,25 +8513,7 @@
                           </a:solidFill>
                           <a:latin typeface="Segoe UI"/>
                         </a:rPr>
-                        <a:t>SLA </a:t>
-                      </a:r>
-                      <a:r>
-                        <a:rPr lang="pt-BR" sz="1200" b="0" noProof="0" dirty="0" err="1">
-                          <a:solidFill>
-                            <a:srgbClr val="0F1B2E"/>
-                          </a:solidFill>
-                          <a:latin typeface="Segoe UI"/>
-                        </a:rPr>
-                        <a:t>custom</a:t>
-                      </a:r>
-                      <a:r>
-                        <a:rPr lang="pt-BR" sz="1200" b="0" noProof="0" dirty="0">
-                          <a:solidFill>
-                            <a:srgbClr val="0F1B2E"/>
-                          </a:solidFill>
-                          <a:latin typeface="Segoe UI"/>
-                        </a:rPr>
-                        <a:t>.</a:t>
+                        <a:t>SLA Custom.</a:t>
                       </a:r>
                     </a:p>
                   </a:txBody>
@@ -9552,23 +8566,8 @@
                           </a:solidFill>
                           <a:latin typeface="Segoe UI"/>
                         </a:rPr>
-                        <a:t>Prox. dia </a:t>
+                        <a:t>Prox. dia útil</a:t>
                       </a:r>
-                      <a:r>
-                        <a:rPr lang="pt-BR" sz="1200" b="0" noProof="0" dirty="0" err="1">
-                          <a:solidFill>
-                            <a:srgbClr val="0F1B2E"/>
-                          </a:solidFill>
-                          <a:latin typeface="Segoe UI"/>
-                        </a:rPr>
-                        <a:t>util</a:t>
-                      </a:r>
-                      <a:endParaRPr lang="pt-BR" sz="1200" b="0" noProof="0" dirty="0">
-                        <a:solidFill>
-                          <a:srgbClr val="0F1B2E"/>
-                        </a:solidFill>
-                        <a:latin typeface="Segoe UI"/>
-                      </a:endParaRPr>
                     </a:p>
                   </a:txBody>
                   <a:tcPr marL="128016" marT="27432" marB="27432" anchor="ctr">
@@ -9910,7 +8909,7 @@
         <p:spPr>
           <a:xfrm>
             <a:off x="640080" y="868680"/>
-            <a:ext cx="10789920" cy="822960"/>
+            <a:ext cx="10789920" cy="492443"/>
           </a:xfrm>
           <a:prstGeom prst="rect">
             <a:avLst/>
@@ -9935,109 +8934,13 @@
               </a:spcAft>
             </a:pPr>
             <a:r>
-              <a:rPr lang="pt-BR" sz="3200" b="1" noProof="0" dirty="0" err="1">
+              <a:rPr lang="pt-BR" sz="3200" b="1" noProof="0" dirty="0">
                 <a:solidFill>
                   <a:srgbClr val="0F1B2E"/>
                 </a:solidFill>
                 <a:latin typeface="Segoe UI Semibold"/>
               </a:rPr>
-              <a:t>Composicao</a:t>
-            </a:r>
-            <a:r>
-              <a:rPr lang="pt-BR" sz="3200" b="1" noProof="0" dirty="0">
-                <a:solidFill>
-                  <a:srgbClr val="0F1B2E"/>
-                </a:solidFill>
-                <a:latin typeface="Segoe UI Semibold"/>
-              </a:rPr>
-              <a:t> cumulativa dos </a:t>
-            </a:r>
-            <a:r>
-              <a:rPr lang="pt-BR" sz="3200" b="1" noProof="0" dirty="0" err="1">
-                <a:solidFill>
-                  <a:srgbClr val="0F1B2E"/>
-                </a:solidFill>
-                <a:latin typeface="Segoe UI Semibold"/>
-              </a:rPr>
-              <a:t>modulos</a:t>
-            </a:r>
-            <a:endParaRPr lang="pt-BR" sz="3200" b="1" noProof="0" dirty="0">
-              <a:solidFill>
-                <a:srgbClr val="0F1B2E"/>
-              </a:solidFill>
-              <a:latin typeface="Segoe UI Semibold"/>
-            </a:endParaRPr>
-          </a:p>
-        </p:txBody>
-      </p:sp>
-      <p:sp>
-        <p:nvSpPr>
-          <p:cNvPr id="5" name="TextBox 4"/>
-          <p:cNvSpPr txBox="1"/>
-          <p:nvPr/>
-        </p:nvSpPr>
-        <p:spPr>
-          <a:xfrm>
-            <a:off x="502920" y="6446520"/>
-            <a:ext cx="5486400" cy="320040"/>
-          </a:xfrm>
-          <a:prstGeom prst="rect">
-            <a:avLst/>
-          </a:prstGeom>
-          <a:noFill/>
-        </p:spPr>
-        <p:txBody>
-          <a:bodyPr wrap="square" lIns="0" tIns="0" rIns="0" bIns="0" anchor="t">
-            <a:spAutoFit/>
-          </a:bodyPr>
-          <a:lstStyle/>
-          <a:p>
-            <a:pPr algn="l">
-              <a:lnSpc>
-                <a:spcPct val="100000"/>
-              </a:lnSpc>
-              <a:spcBef>
-                <a:spcPts val="0"/>
-              </a:spcBef>
-              <a:spcAft>
-                <a:spcPts val="400"/>
-              </a:spcAft>
-            </a:pPr>
-            <a:r>
-              <a:rPr lang="pt-BR" sz="900" b="1" noProof="0" dirty="0">
-                <a:solidFill>
-                  <a:srgbClr val="2B5CE6"/>
-                </a:solidFill>
-                <a:latin typeface="Segoe UI"/>
-              </a:rPr>
-              <a:t>GESTAO 360</a:t>
-            </a:r>
-            <a:r>
-              <a:rPr lang="pt-BR" sz="900" b="0" noProof="0" dirty="0">
-                <a:solidFill>
-                  <a:srgbClr val="5B6B82"/>
-                </a:solidFill>
-                <a:latin typeface="Segoe UI"/>
-              </a:rPr>
-              <a:t>   •   Plataforma corporativa de </a:t>
-            </a:r>
-            <a:r>
-              <a:rPr lang="pt-BR" sz="900" b="0" noProof="0" dirty="0" err="1">
-                <a:solidFill>
-                  <a:srgbClr val="5B6B82"/>
-                </a:solidFill>
-                <a:latin typeface="Segoe UI"/>
-              </a:rPr>
-              <a:t>gestao</a:t>
-            </a:r>
-            <a:r>
-              <a:rPr lang="pt-BR" sz="900" b="0" noProof="0" dirty="0">
-                <a:solidFill>
-                  <a:srgbClr val="5B6B82"/>
-                </a:solidFill>
-                <a:latin typeface="Segoe UI"/>
-              </a:rPr>
-              <a:t>   •   gestao360.org</a:t>
+              <a:t>Composição cumulativa dos módulos</a:t>
             </a:r>
           </a:p>
         </p:txBody>
@@ -10096,7 +8999,7 @@
           <p:nvPr>
             <p:extLst>
               <p:ext uri="{D42A27DB-BD31-4B8C-83A1-F6EECF244321}">
-                <p14:modId xmlns:p14="http://schemas.microsoft.com/office/powerpoint/2010/main" val="1473071450"/>
+                <p14:modId xmlns:p14="http://schemas.microsoft.com/office/powerpoint/2010/main" val="1902318509"/>
               </p:ext>
             </p:extLst>
           </p:nvPr>
@@ -10283,23 +9186,8 @@
                           </a:solidFill>
                           <a:latin typeface="Segoe UI"/>
                         </a:rPr>
-                        <a:t>Meu Dia, Tarefas e </a:t>
+                        <a:t>Meu Dia, Tarefas e Administração</a:t>
                       </a:r>
-                      <a:r>
-                        <a:rPr lang="pt-BR" sz="1150" b="1" noProof="0" dirty="0" err="1">
-                          <a:solidFill>
-                            <a:srgbClr val="0F1B2E"/>
-                          </a:solidFill>
-                          <a:latin typeface="Segoe UI"/>
-                        </a:rPr>
-                        <a:t>Administracao</a:t>
-                      </a:r>
-                      <a:endParaRPr lang="pt-BR" sz="1150" b="1" noProof="0" dirty="0">
-                        <a:solidFill>
-                          <a:srgbClr val="0F1B2E"/>
-                        </a:solidFill>
-                        <a:latin typeface="Segoe UI"/>
-                      </a:endParaRPr>
                     </a:p>
                   </a:txBody>
                   <a:tcPr marL="128016" anchor="ctr">
@@ -10413,40 +9301,13 @@
                     <a:lstStyle/>
                     <a:p>
                       <a:r>
-                        <a:rPr lang="pt-BR" sz="1150" b="1" noProof="0" dirty="0" err="1">
-                          <a:solidFill>
-                            <a:srgbClr val="0F1B2E"/>
-                          </a:solidFill>
-                          <a:latin typeface="Segoe UI"/>
-                        </a:rPr>
-                        <a:t>Gestao</a:t>
-                      </a:r>
-                      <a:r>
                         <a:rPr lang="pt-BR" sz="1150" b="1" noProof="0" dirty="0">
                           <a:solidFill>
                             <a:srgbClr val="0F1B2E"/>
                           </a:solidFill>
                           <a:latin typeface="Segoe UI"/>
                         </a:rPr>
-                        <a:t> a Vista (</a:t>
-                      </a:r>
-                      <a:r>
-                        <a:rPr lang="pt-BR" sz="1150" b="1" noProof="0" dirty="0" err="1">
-                          <a:solidFill>
-                            <a:srgbClr val="0F1B2E"/>
-                          </a:solidFill>
-                          <a:latin typeface="Segoe UI"/>
-                        </a:rPr>
-                        <a:t>estrategia</a:t>
-                      </a:r>
-                      <a:r>
-                        <a:rPr lang="pt-BR" sz="1150" b="1" noProof="0" dirty="0">
-                          <a:solidFill>
-                            <a:srgbClr val="0F1B2E"/>
-                          </a:solidFill>
-                          <a:latin typeface="Segoe UI"/>
-                        </a:rPr>
-                        <a:t>)</a:t>
+                        <a:t>Gestão a Vista (estratégia)</a:t>
                       </a:r>
                     </a:p>
                   </a:txBody>
@@ -10682,20 +9543,14 @@
                     <a:lstStyle/>
                     <a:p>
                       <a:r>
-                        <a:rPr lang="pt-BR" sz="1150" b="1" noProof="0" dirty="0" err="1">
+                        <a:rPr lang="pt-BR" sz="1150" b="1" noProof="0" dirty="0">
                           <a:solidFill>
                             <a:srgbClr val="0F1B2E"/>
                           </a:solidFill>
                           <a:latin typeface="Segoe UI"/>
                         </a:rPr>
-                        <a:t>Comunicacao</a:t>
+                        <a:t>Comunicação</a:t>
                       </a:r>
-                      <a:endParaRPr lang="pt-BR" sz="1150" b="1" noProof="0" dirty="0">
-                        <a:solidFill>
-                          <a:srgbClr val="0F1B2E"/>
-                        </a:solidFill>
-                        <a:latin typeface="Segoe UI"/>
-                      </a:endParaRPr>
                     </a:p>
                   </a:txBody>
                   <a:tcPr marL="128016" anchor="ctr">
@@ -10815,23 +9670,8 @@
                           </a:solidFill>
                           <a:latin typeface="Segoe UI"/>
                         </a:rPr>
-                        <a:t>Cargos e </a:t>
+                        <a:t>Cargos e Salários</a:t>
                       </a:r>
-                      <a:r>
-                        <a:rPr lang="pt-BR" sz="1150" b="1" noProof="0" dirty="0" err="1">
-                          <a:solidFill>
-                            <a:srgbClr val="0F1B2E"/>
-                          </a:solidFill>
-                          <a:latin typeface="Segoe UI"/>
-                        </a:rPr>
-                        <a:t>Salarios</a:t>
-                      </a:r>
-                      <a:endParaRPr lang="pt-BR" sz="1150" b="1" noProof="0" dirty="0">
-                        <a:solidFill>
-                          <a:srgbClr val="0F1B2E"/>
-                        </a:solidFill>
-                        <a:latin typeface="Segoe UI"/>
-                      </a:endParaRPr>
                     </a:p>
                   </a:txBody>
                   <a:tcPr marL="128016" anchor="ctr">
@@ -10945,22 +9785,13 @@
                     <a:lstStyle/>
                     <a:p>
                       <a:r>
-                        <a:rPr lang="pt-BR" sz="1150" b="1" noProof="0" dirty="0" err="1">
-                          <a:solidFill>
-                            <a:srgbClr val="0F1B2E"/>
-                          </a:solidFill>
-                          <a:latin typeface="Segoe UI"/>
-                        </a:rPr>
-                        <a:t>Seguranca</a:t>
-                      </a:r>
-                      <a:r>
                         <a:rPr lang="pt-BR" sz="1150" b="1" noProof="0" dirty="0">
                           <a:solidFill>
                             <a:srgbClr val="0F1B2E"/>
                           </a:solidFill>
                           <a:latin typeface="Segoe UI"/>
                         </a:rPr>
-                        <a:t> dos Alimentos</a:t>
+                        <a:t>Segurança dos Alimentos</a:t>
                       </a:r>
                     </a:p>
                   </a:txBody>
@@ -11075,22 +9906,13 @@
                     <a:lstStyle/>
                     <a:p>
                       <a:r>
-                        <a:rPr lang="pt-BR" sz="1150" b="1" noProof="0" dirty="0" err="1">
-                          <a:solidFill>
-                            <a:srgbClr val="0F1B2E"/>
-                          </a:solidFill>
-                          <a:latin typeface="Segoe UI"/>
-                        </a:rPr>
-                        <a:t>Seguranca</a:t>
-                      </a:r>
-                      <a:r>
                         <a:rPr lang="pt-BR" sz="1150" b="1" noProof="0" dirty="0">
                           <a:solidFill>
                             <a:srgbClr val="0F1B2E"/>
                           </a:solidFill>
                           <a:latin typeface="Segoe UI"/>
                         </a:rPr>
-                        <a:t> Patrimonial</a:t>
+                        <a:t>Segurança Patrimonial</a:t>
                       </a:r>
                     </a:p>
                   </a:txBody>
@@ -11205,22 +10027,13 @@
                     <a:lstStyle/>
                     <a:p>
                       <a:r>
-                        <a:rPr lang="pt-BR" sz="1150" b="1" noProof="0" dirty="0" err="1">
-                          <a:solidFill>
-                            <a:srgbClr val="0F1B2E"/>
-                          </a:solidFill>
-                          <a:latin typeface="Segoe UI"/>
-                        </a:rPr>
-                        <a:t>Gestao</a:t>
-                      </a:r>
-                      <a:r>
                         <a:rPr lang="pt-BR" sz="1150" b="1" noProof="0" dirty="0">
                           <a:solidFill>
                             <a:srgbClr val="0F1B2E"/>
                           </a:solidFill>
                           <a:latin typeface="Segoe UI"/>
                         </a:rPr>
-                        <a:t> de Premio</a:t>
+                        <a:t>Gestão de Premio</a:t>
                       </a:r>
                     </a:p>
                   </a:txBody>
@@ -11464,7 +10277,7 @@
         <p:spPr>
           <a:xfrm>
             <a:off x="640080" y="868680"/>
-            <a:ext cx="10789920" cy="822960"/>
+            <a:ext cx="10789920" cy="492443"/>
           </a:xfrm>
           <a:prstGeom prst="rect">
             <a:avLst/>
@@ -11489,94 +10302,13 @@
               </a:spcAft>
             </a:pPr>
             <a:r>
-              <a:rPr lang="pt-BR" sz="3200" b="1" noProof="0" dirty="0" err="1">
+              <a:rPr lang="pt-BR" sz="3200" b="1" noProof="0" dirty="0">
                 <a:solidFill>
                   <a:srgbClr val="0F1B2E"/>
                 </a:solidFill>
                 <a:latin typeface="Segoe UI Semibold"/>
               </a:rPr>
-              <a:t>Seguranca</a:t>
-            </a:r>
-            <a:r>
-              <a:rPr lang="pt-BR" sz="3200" b="1" noProof="0" dirty="0">
-                <a:solidFill>
-                  <a:srgbClr val="0F1B2E"/>
-                </a:solidFill>
-                <a:latin typeface="Segoe UI Semibold"/>
-              </a:rPr>
-              <a:t>, conformidade e infraestrutura</a:t>
-            </a:r>
-          </a:p>
-        </p:txBody>
-      </p:sp>
-      <p:sp>
-        <p:nvSpPr>
-          <p:cNvPr id="5" name="TextBox 4"/>
-          <p:cNvSpPr txBox="1"/>
-          <p:nvPr/>
-        </p:nvSpPr>
-        <p:spPr>
-          <a:xfrm>
-            <a:off x="502920" y="6446520"/>
-            <a:ext cx="5486400" cy="320040"/>
-          </a:xfrm>
-          <a:prstGeom prst="rect">
-            <a:avLst/>
-          </a:prstGeom>
-          <a:noFill/>
-        </p:spPr>
-        <p:txBody>
-          <a:bodyPr wrap="square" lIns="0" tIns="0" rIns="0" bIns="0" anchor="t">
-            <a:spAutoFit/>
-          </a:bodyPr>
-          <a:lstStyle/>
-          <a:p>
-            <a:pPr algn="l">
-              <a:lnSpc>
-                <a:spcPct val="100000"/>
-              </a:lnSpc>
-              <a:spcBef>
-                <a:spcPts val="0"/>
-              </a:spcBef>
-              <a:spcAft>
-                <a:spcPts val="400"/>
-              </a:spcAft>
-            </a:pPr>
-            <a:r>
-              <a:rPr lang="pt-BR" sz="900" b="1" noProof="0" dirty="0">
-                <a:solidFill>
-                  <a:srgbClr val="2B5CE6"/>
-                </a:solidFill>
-                <a:latin typeface="Segoe UI"/>
-              </a:rPr>
-              <a:t>GESTAO 360</a:t>
-            </a:r>
-            <a:r>
-              <a:rPr lang="pt-BR" sz="900" b="0" noProof="0" dirty="0">
-                <a:solidFill>
-                  <a:srgbClr val="5B6B82"/>
-                </a:solidFill>
-                <a:latin typeface="Segoe UI"/>
-              </a:rPr>
-              <a:t>   •   Plataforma corporativa de </a:t>
-            </a:r>
-            <a:r>
-              <a:rPr lang="pt-BR" sz="900" b="0" noProof="0" dirty="0" err="1">
-                <a:solidFill>
-                  <a:srgbClr val="5B6B82"/>
-                </a:solidFill>
-                <a:latin typeface="Segoe UI"/>
-              </a:rPr>
-              <a:t>gestao</a:t>
-            </a:r>
-            <a:r>
-              <a:rPr lang="pt-BR" sz="900" b="0" noProof="0" dirty="0">
-                <a:solidFill>
-                  <a:srgbClr val="5B6B82"/>
-                </a:solidFill>
-                <a:latin typeface="Segoe UI"/>
-              </a:rPr>
-              <a:t>   •   gestao360.org</a:t>
+              <a:t>Segurança, conformidade e infraestrutura</a:t>
             </a:r>
           </a:p>
         </p:txBody>
@@ -11823,7 +10555,7 @@
         <p:spPr>
           <a:xfrm>
             <a:off x="1444752" y="2075688"/>
-            <a:ext cx="2514600" cy="548640"/>
+            <a:ext cx="2514600" cy="215444"/>
           </a:xfrm>
           <a:prstGeom prst="rect">
             <a:avLst/>
@@ -11848,22 +10580,13 @@
               </a:spcAft>
             </a:pPr>
             <a:r>
-              <a:rPr lang="pt-BR" sz="1400" b="1" noProof="0" dirty="0" err="1">
+              <a:rPr lang="pt-BR" sz="1400" b="1" noProof="0" dirty="0">
                 <a:solidFill>
                   <a:srgbClr val="0F1B2E"/>
                 </a:solidFill>
                 <a:latin typeface="Segoe UI Semibold"/>
               </a:rPr>
-              <a:t>Governanca</a:t>
-            </a:r>
-            <a:r>
-              <a:rPr lang="pt-BR" sz="1400" b="1" noProof="0" dirty="0">
-                <a:solidFill>
-                  <a:srgbClr val="0F1B2E"/>
-                </a:solidFill>
-                <a:latin typeface="Segoe UI Semibold"/>
-              </a:rPr>
-              <a:t> de acesso</a:t>
+              <a:t>Governança de acesso</a:t>
             </a:r>
           </a:p>
         </p:txBody>
@@ -11877,7 +10600,7 @@
         <p:spPr>
           <a:xfrm>
             <a:off x="914400" y="2697480"/>
-            <a:ext cx="3017520" cy="914400"/>
+            <a:ext cx="3017520" cy="380297"/>
           </a:xfrm>
           <a:prstGeom prst="rect">
             <a:avLst/>
@@ -11908,43 +10631,7 @@
                 </a:solidFill>
                 <a:latin typeface="Segoe UI"/>
               </a:rPr>
-              <a:t>RBAC com perfis, </a:t>
-            </a:r>
-            <a:r>
-              <a:rPr lang="pt-BR" sz="1150" b="0" noProof="0" dirty="0" err="1">
-                <a:solidFill>
-                  <a:srgbClr val="5B6B82"/>
-                </a:solidFill>
-                <a:latin typeface="Segoe UI"/>
-              </a:rPr>
-              <a:t>permissoes</a:t>
-            </a:r>
-            <a:r>
-              <a:rPr lang="pt-BR" sz="1150" b="0" noProof="0" dirty="0">
-                <a:solidFill>
-                  <a:srgbClr val="5B6B82"/>
-                </a:solidFill>
-                <a:latin typeface="Segoe UI"/>
-              </a:rPr>
-              <a:t> granulares e escopo por empresa, filial e </a:t>
-            </a:r>
-            <a:r>
-              <a:rPr lang="pt-BR" sz="1150" b="0" noProof="0" dirty="0" err="1">
-                <a:solidFill>
-                  <a:srgbClr val="5B6B82"/>
-                </a:solidFill>
-                <a:latin typeface="Segoe UI"/>
-              </a:rPr>
-              <a:t>area</a:t>
-            </a:r>
-            <a:r>
-              <a:rPr lang="pt-BR" sz="1150" b="0" noProof="0" dirty="0">
-                <a:solidFill>
-                  <a:srgbClr val="5B6B82"/>
-                </a:solidFill>
-                <a:latin typeface="Segoe UI"/>
-              </a:rPr>
-              <a:t>.</a:t>
+              <a:t>RBAC com perfis, permissões granulares e escopo por empresa, filial e área.</a:t>
             </a:r>
           </a:p>
         </p:txBody>
@@ -12191,7 +10878,7 @@
         <p:spPr>
           <a:xfrm>
             <a:off x="4608576" y="2697480"/>
-            <a:ext cx="3017520" cy="914400"/>
+            <a:ext cx="3017520" cy="380297"/>
           </a:xfrm>
           <a:prstGeom prst="rect">
             <a:avLst/>
@@ -12222,43 +10909,7 @@
                 </a:solidFill>
                 <a:latin typeface="Segoe UI"/>
               </a:rPr>
-              <a:t>Isolamento de dados por empresa; </a:t>
-            </a:r>
-            <a:r>
-              <a:rPr lang="pt-BR" sz="1150" b="0" noProof="0" dirty="0" err="1">
-                <a:solidFill>
-                  <a:srgbClr val="5B6B82"/>
-                </a:solidFill>
-                <a:latin typeface="Segoe UI"/>
-              </a:rPr>
-              <a:t>subdominio</a:t>
-            </a:r>
-            <a:r>
-              <a:rPr lang="pt-BR" sz="1150" b="0" noProof="0" dirty="0">
-                <a:solidFill>
-                  <a:srgbClr val="5B6B82"/>
-                </a:solidFill>
-                <a:latin typeface="Segoe UI"/>
-              </a:rPr>
-              <a:t> e marca </a:t>
-            </a:r>
-            <a:r>
-              <a:rPr lang="pt-BR" sz="1150" b="0" noProof="0" dirty="0" err="1">
-                <a:solidFill>
-                  <a:srgbClr val="5B6B82"/>
-                </a:solidFill>
-                <a:latin typeface="Segoe UI"/>
-              </a:rPr>
-              <a:t>proprios</a:t>
-            </a:r>
-            <a:r>
-              <a:rPr lang="pt-BR" sz="1150" b="0" noProof="0" dirty="0">
-                <a:solidFill>
-                  <a:srgbClr val="5B6B82"/>
-                </a:solidFill>
-                <a:latin typeface="Segoe UI"/>
-              </a:rPr>
-              <a:t> por cliente.</a:t>
+              <a:t>Isolamento de dados por empresa; subdomínio e marca próprios por cliente.</a:t>
             </a:r>
           </a:p>
         </p:txBody>
@@ -12783,7 +11434,7 @@
         <p:spPr>
           <a:xfrm>
             <a:off x="914400" y="4818888"/>
-            <a:ext cx="3017520" cy="914400"/>
+            <a:ext cx="3017520" cy="380297"/>
           </a:xfrm>
           <a:prstGeom prst="rect">
             <a:avLst/>
@@ -12814,61 +11465,7 @@
                 </a:solidFill>
                 <a:latin typeface="Segoe UI"/>
               </a:rPr>
-              <a:t>Modulo dedicado: </a:t>
-            </a:r>
-            <a:r>
-              <a:rPr lang="pt-BR" sz="1150" b="0" noProof="0" dirty="0" err="1">
-                <a:solidFill>
-                  <a:srgbClr val="5B6B82"/>
-                </a:solidFill>
-                <a:latin typeface="Segoe UI"/>
-              </a:rPr>
-              <a:t>RoPA</a:t>
-            </a:r>
-            <a:r>
-              <a:rPr lang="pt-BR" sz="1150" b="0" noProof="0" dirty="0">
-                <a:solidFill>
-                  <a:srgbClr val="5B6B82"/>
-                </a:solidFill>
-                <a:latin typeface="Segoe UI"/>
-              </a:rPr>
-              <a:t>, </a:t>
-            </a:r>
-            <a:r>
-              <a:rPr lang="pt-BR" sz="1150" b="0" noProof="0" dirty="0" err="1">
-                <a:solidFill>
-                  <a:srgbClr val="5B6B82"/>
-                </a:solidFill>
-                <a:latin typeface="Segoe UI"/>
-              </a:rPr>
-              <a:t>suboperadores</a:t>
-            </a:r>
-            <a:r>
-              <a:rPr lang="pt-BR" sz="1150" b="0" noProof="0" dirty="0">
-                <a:solidFill>
-                  <a:srgbClr val="5B6B82"/>
-                </a:solidFill>
-                <a:latin typeface="Segoe UI"/>
-              </a:rPr>
-              <a:t>, incidentes e </a:t>
-            </a:r>
-            <a:r>
-              <a:rPr lang="pt-BR" sz="1150" b="0" noProof="0" dirty="0" err="1">
-                <a:solidFill>
-                  <a:srgbClr val="5B6B82"/>
-                </a:solidFill>
-                <a:latin typeface="Segoe UI"/>
-              </a:rPr>
-              <a:t>area</a:t>
-            </a:r>
-            <a:r>
-              <a:rPr lang="pt-BR" sz="1150" b="0" noProof="0" dirty="0">
-                <a:solidFill>
-                  <a:srgbClr val="5B6B82"/>
-                </a:solidFill>
-                <a:latin typeface="Segoe UI"/>
-              </a:rPr>
-              <a:t> do DPO.</a:t>
+              <a:t>Modulo dedicado: RoPA, superadores, incidentes e área do DPO.</a:t>
             </a:r>
           </a:p>
         </p:txBody>
@@ -13115,7 +11712,7 @@
         <p:spPr>
           <a:xfrm>
             <a:off x="4608576" y="4818888"/>
-            <a:ext cx="3017520" cy="914400"/>
+            <a:ext cx="3017520" cy="380297"/>
           </a:xfrm>
           <a:prstGeom prst="rect">
             <a:avLst/>
@@ -13146,25 +11743,7 @@
                 </a:solidFill>
                 <a:latin typeface="Segoe UI"/>
               </a:rPr>
-              <a:t>PostgreSQL gerenciado, backups, TLS e </a:t>
-            </a:r>
-            <a:r>
-              <a:rPr lang="pt-BR" sz="1150" b="0" noProof="0" dirty="0" err="1">
-                <a:solidFill>
-                  <a:srgbClr val="5B6B82"/>
-                </a:solidFill>
-                <a:latin typeface="Segoe UI"/>
-              </a:rPr>
-              <a:t>observabilidade</a:t>
-            </a:r>
-            <a:r>
-              <a:rPr lang="pt-BR" sz="1150" b="0" noProof="0" dirty="0">
-                <a:solidFill>
-                  <a:srgbClr val="5B6B82"/>
-                </a:solidFill>
-                <a:latin typeface="Segoe UI"/>
-              </a:rPr>
-              <a:t> com logs estruturados.</a:t>
+              <a:t>PostgreSQL gerenciado, backups, TLS e observa ilidade com logs estruturados.</a:t>
             </a:r>
           </a:p>
         </p:txBody>
@@ -13411,7 +11990,7 @@
         <p:spPr>
           <a:xfrm>
             <a:off x="8302752" y="4818888"/>
-            <a:ext cx="3017520" cy="914400"/>
+            <a:ext cx="3017520" cy="380297"/>
           </a:xfrm>
           <a:prstGeom prst="rect">
             <a:avLst/>
@@ -13442,43 +12021,7 @@
                 </a:solidFill>
                 <a:latin typeface="Segoe UI"/>
               </a:rPr>
-              <a:t>SLA por plano, do </a:t>
-            </a:r>
-            <a:r>
-              <a:rPr lang="pt-BR" sz="1150" b="0" noProof="0" dirty="0" err="1">
-                <a:solidFill>
-                  <a:srgbClr val="5B6B82"/>
-                </a:solidFill>
-                <a:latin typeface="Segoe UI"/>
-              </a:rPr>
-              <a:t>proximo</a:t>
-            </a:r>
-            <a:r>
-              <a:rPr lang="pt-BR" sz="1150" b="0" noProof="0" dirty="0">
-                <a:solidFill>
-                  <a:srgbClr val="5B6B82"/>
-                </a:solidFill>
-                <a:latin typeface="Segoe UI"/>
-              </a:rPr>
-              <a:t> dia </a:t>
-            </a:r>
-            <a:r>
-              <a:rPr lang="pt-BR" sz="1150" b="0" noProof="0" dirty="0" err="1">
-                <a:solidFill>
-                  <a:srgbClr val="5B6B82"/>
-                </a:solidFill>
-                <a:latin typeface="Segoe UI"/>
-              </a:rPr>
-              <a:t>util</a:t>
-            </a:r>
-            <a:r>
-              <a:rPr lang="pt-BR" sz="1150" b="0" noProof="0" dirty="0">
-                <a:solidFill>
-                  <a:srgbClr val="5B6B82"/>
-                </a:solidFill>
-                <a:latin typeface="Segoe UI"/>
-              </a:rPr>
-              <a:t> ao contrato dedicado Enterprise.</a:t>
+              <a:t>SLA por plano, do próximo dia útil ao contrato dedicado Enterprise.</a:t>
             </a:r>
           </a:p>
         </p:txBody>
@@ -13705,7 +12248,7 @@
         <p:spPr>
           <a:xfrm>
             <a:off x="868680" y="1828800"/>
-            <a:ext cx="10058400" cy="1463040"/>
+            <a:ext cx="10058400" cy="1092735"/>
           </a:xfrm>
           <a:prstGeom prst="rect">
             <a:avLst/>
@@ -13736,25 +12279,7 @@
                 </a:solidFill>
                 <a:latin typeface="Segoe UI Semibold"/>
               </a:rPr>
-              <a:t>Experimente o </a:t>
-            </a:r>
-            <a:r>
-              <a:rPr lang="pt-BR" sz="4400" b="1" noProof="0" dirty="0" err="1">
-                <a:solidFill>
-                  <a:srgbClr val="FFFFFF"/>
-                </a:solidFill>
-                <a:latin typeface="Segoe UI Semibold"/>
-              </a:rPr>
-              <a:t>Gestao</a:t>
-            </a:r>
-            <a:r>
-              <a:rPr lang="pt-BR" sz="4400" b="1" noProof="0" dirty="0">
-                <a:solidFill>
-                  <a:srgbClr val="FFFFFF"/>
-                </a:solidFill>
-                <a:latin typeface="Segoe UI Semibold"/>
-              </a:rPr>
-              <a:t> 360</a:t>
+              <a:t>Experimente o Gestão 360</a:t>
             </a:r>
           </a:p>
           <a:p>
@@ -13974,7 +12499,7 @@
         <p:spPr>
           <a:xfrm>
             <a:off x="1161288" y="4590288"/>
-            <a:ext cx="2834640" cy="822960"/>
+            <a:ext cx="2834640" cy="374077"/>
           </a:xfrm>
           <a:prstGeom prst="rect">
             <a:avLst/>
@@ -14005,43 +12530,7 @@
                 </a:solidFill>
                 <a:latin typeface="Segoe UI"/>
               </a:rPr>
-              <a:t>Entendemos sua </a:t>
-            </a:r>
-            <a:r>
-              <a:rPr lang="pt-BR" sz="1150" b="0" noProof="0" dirty="0" err="1">
-                <a:solidFill>
-                  <a:srgbClr val="C7D4E6"/>
-                </a:solidFill>
-                <a:latin typeface="Segoe UI"/>
-              </a:rPr>
-              <a:t>operacao</a:t>
-            </a:r>
-            <a:r>
-              <a:rPr lang="pt-BR" sz="1150" b="0" noProof="0" dirty="0">
-                <a:solidFill>
-                  <a:srgbClr val="C7D4E6"/>
-                </a:solidFill>
-                <a:latin typeface="Segoe UI"/>
-              </a:rPr>
-              <a:t> e os </a:t>
-            </a:r>
-            <a:r>
-              <a:rPr lang="pt-BR" sz="1150" b="0" noProof="0" dirty="0" err="1">
-                <a:solidFill>
-                  <a:srgbClr val="C7D4E6"/>
-                </a:solidFill>
-                <a:latin typeface="Segoe UI"/>
-              </a:rPr>
-              <a:t>modulos</a:t>
-            </a:r>
-            <a:r>
-              <a:rPr lang="pt-BR" sz="1150" b="0" noProof="0" dirty="0">
-                <a:solidFill>
-                  <a:srgbClr val="C7D4E6"/>
-                </a:solidFill>
-                <a:latin typeface="Segoe UI"/>
-              </a:rPr>
-              <a:t> que geram valor primeiro.</a:t>
+              <a:t>Entendemos sua operação e os módulos que geram valor primeiro.</a:t>
             </a:r>
           </a:p>
         </p:txBody>
@@ -14194,7 +12683,7 @@
         <p:spPr>
           <a:xfrm>
             <a:off x="5349240" y="4005072"/>
-            <a:ext cx="2286000" cy="457200"/>
+            <a:ext cx="2286000" cy="230832"/>
           </a:xfrm>
           <a:prstGeom prst="rect">
             <a:avLst/>
@@ -14219,22 +12708,13 @@
               </a:spcAft>
             </a:pPr>
             <a:r>
-              <a:rPr lang="pt-BR" sz="1500" b="1" noProof="0" dirty="0" err="1">
+              <a:rPr lang="pt-BR" sz="1500" b="1" noProof="0" dirty="0">
                 <a:solidFill>
                   <a:srgbClr val="FFFFFF"/>
                 </a:solidFill>
                 <a:latin typeface="Segoe UI Semibold"/>
               </a:rPr>
-              <a:t>Ativacao</a:t>
-            </a:r>
-            <a:r>
-              <a:rPr lang="pt-BR" sz="1500" b="1" noProof="0" dirty="0">
-                <a:solidFill>
-                  <a:srgbClr val="FFFFFF"/>
-                </a:solidFill>
-                <a:latin typeface="Segoe UI Semibold"/>
-              </a:rPr>
-              <a:t> guiada</a:t>
+              <a:t>Ativação guiada</a:t>
             </a:r>
           </a:p>
         </p:txBody>
@@ -14248,7 +12728,7 @@
         <p:spPr>
           <a:xfrm>
             <a:off x="4727448" y="4590288"/>
-            <a:ext cx="2834640" cy="822960"/>
+            <a:ext cx="2834640" cy="374077"/>
           </a:xfrm>
           <a:prstGeom prst="rect">
             <a:avLst/>
@@ -14273,22 +12753,13 @@
               </a:spcAft>
             </a:pPr>
             <a:r>
-              <a:rPr lang="pt-BR" sz="1150" b="0" noProof="0" dirty="0" err="1">
+              <a:rPr lang="pt-BR" sz="1150" b="0" noProof="0" dirty="0">
                 <a:solidFill>
                   <a:srgbClr val="C7D4E6"/>
                 </a:solidFill>
                 <a:latin typeface="Segoe UI"/>
               </a:rPr>
-              <a:t>Implantacao</a:t>
-            </a:r>
-            <a:r>
-              <a:rPr lang="pt-BR" sz="1150" b="0" noProof="0" dirty="0">
-                <a:solidFill>
-                  <a:srgbClr val="C7D4E6"/>
-                </a:solidFill>
-                <a:latin typeface="Segoe UI"/>
-              </a:rPr>
-              <a:t> com dados reais e treinamento das equipes.</a:t>
+              <a:t>Implantação com dados reais e treinamento das equipes.</a:t>
             </a:r>
           </a:p>
         </p:txBody>
@@ -14486,7 +12957,7 @@
         <p:spPr>
           <a:xfrm>
             <a:off x="8293608" y="4590288"/>
-            <a:ext cx="2834640" cy="822960"/>
+            <a:ext cx="2834640" cy="374077"/>
           </a:xfrm>
           <a:prstGeom prst="rect">
             <a:avLst/>
@@ -14517,25 +12988,7 @@
                 </a:solidFill>
                 <a:latin typeface="Segoe UI"/>
               </a:rPr>
-              <a:t>Evolua de plano conforme novas </a:t>
-            </a:r>
-            <a:r>
-              <a:rPr lang="pt-BR" sz="1150" b="0" noProof="0" dirty="0" err="1">
-                <a:solidFill>
-                  <a:srgbClr val="C7D4E6"/>
-                </a:solidFill>
-                <a:latin typeface="Segoe UI"/>
-              </a:rPr>
-              <a:t>areas</a:t>
-            </a:r>
-            <a:r>
-              <a:rPr lang="pt-BR" sz="1150" b="0" noProof="0" dirty="0">
-                <a:solidFill>
-                  <a:srgbClr val="C7D4E6"/>
-                </a:solidFill>
-                <a:latin typeface="Segoe UI"/>
-              </a:rPr>
-              <a:t> entram na plataforma.</a:t>
+              <a:t>Evolua de plano conforme novas áreas entram na plataforma.</a:t>
             </a:r>
           </a:p>
         </p:txBody>
@@ -14595,8 +13048,8 @@
         </p:nvSpPr>
         <p:spPr>
           <a:xfrm>
-            <a:off x="868680" y="5806440"/>
-            <a:ext cx="10424160" cy="640080"/>
+            <a:off x="868680" y="6018758"/>
+            <a:ext cx="10424160" cy="215444"/>
           </a:xfrm>
           <a:prstGeom prst="rect">
             <a:avLst/>
@@ -14636,23 +13089,8 @@
                 </a:solidFill>
                 <a:latin typeface="Segoe UI"/>
               </a:rPr>
-              <a:t>      gestao360.org      ·      contato@gestao360.org      ·      Solicite uma </a:t>
-            </a:r>
-            <a:r>
-              <a:rPr lang="pt-BR" sz="1300" b="1" noProof="0" dirty="0" err="1">
-                <a:solidFill>
-                  <a:srgbClr val="0B1E3F"/>
-                </a:solidFill>
-                <a:latin typeface="Segoe UI"/>
-              </a:rPr>
-              <a:t>demonstracao</a:t>
-            </a:r>
-            <a:endParaRPr lang="pt-BR" sz="1300" b="1" noProof="0" dirty="0">
-              <a:solidFill>
-                <a:srgbClr val="0B1E3F"/>
-              </a:solidFill>
-              <a:latin typeface="Segoe UI"/>
-            </a:endParaRPr>
+              <a:t>      gestao360.org      ·      contato@gestao360.org      ·      Solicite uma demonstração</a:t>
+            </a:r>
           </a:p>
         </p:txBody>
       </p:sp>
@@ -14826,14 +13264,14 @@
       </p:sp>
       <p:sp>
         <p:nvSpPr>
-          <p:cNvPr id="5" name="TextBox 4"/>
+          <p:cNvPr id="6" name="TextBox 5"/>
           <p:cNvSpPr txBox="1"/>
           <p:nvPr/>
         </p:nvSpPr>
         <p:spPr>
           <a:xfrm>
-            <a:off x="502920" y="6446520"/>
-            <a:ext cx="5486400" cy="138499"/>
+            <a:off x="10332720" y="6446520"/>
+            <a:ext cx="1371600" cy="320040"/>
           </a:xfrm>
           <a:prstGeom prst="rect">
             <a:avLst/>
@@ -14846,7 +13284,7 @@
           </a:bodyPr>
           <a:lstStyle/>
           <a:p>
-            <a:pPr algn="l">
+            <a:pPr algn="r">
               <a:lnSpc>
                 <a:spcPct val="100000"/>
               </a:lnSpc>
@@ -14858,36 +13296,27 @@
               </a:spcAft>
             </a:pPr>
             <a:r>
-              <a:rPr lang="pt-BR" sz="900" b="1" noProof="0" dirty="0">
-                <a:solidFill>
-                  <a:srgbClr val="2B5CE6"/>
-                </a:solidFill>
-                <a:latin typeface="Segoe UI"/>
-              </a:rPr>
-              <a:t>GESTAO 360</a:t>
-            </a:r>
-            <a:r>
               <a:rPr lang="pt-BR" sz="900" b="0" noProof="0" dirty="0">
                 <a:solidFill>
                   <a:srgbClr val="5B6B82"/>
                 </a:solidFill>
                 <a:latin typeface="Segoe UI"/>
               </a:rPr>
-              <a:t>   •   Plataforma corporativa de gestão   •   gestao360.org</a:t>
-            </a:r>
-          </a:p>
-        </p:txBody>
-      </p:sp>
-      <p:sp>
-        <p:nvSpPr>
-          <p:cNvPr id="6" name="TextBox 5"/>
+              <a:t>02</a:t>
+            </a:r>
+          </a:p>
+        </p:txBody>
+      </p:sp>
+      <p:sp>
+        <p:nvSpPr>
+          <p:cNvPr id="7" name="TextBox 6"/>
           <p:cNvSpPr txBox="1"/>
           <p:nvPr/>
         </p:nvSpPr>
         <p:spPr>
           <a:xfrm>
-            <a:off x="10332720" y="6446520"/>
-            <a:ext cx="1371600" cy="320040"/>
+            <a:off x="640080" y="1691640"/>
+            <a:ext cx="5486400" cy="1698157"/>
           </a:xfrm>
           <a:prstGeom prst="rect">
             <a:avLst/>
@@ -14900,51 +13329,6 @@
           </a:bodyPr>
           <a:lstStyle/>
           <a:p>
-            <a:pPr algn="r">
-              <a:lnSpc>
-                <a:spcPct val="100000"/>
-              </a:lnSpc>
-              <a:spcBef>
-                <a:spcPts val="0"/>
-              </a:spcBef>
-              <a:spcAft>
-                <a:spcPts val="400"/>
-              </a:spcAft>
-            </a:pPr>
-            <a:r>
-              <a:rPr lang="pt-BR" sz="900" b="0" noProof="0" dirty="0">
-                <a:solidFill>
-                  <a:srgbClr val="5B6B82"/>
-                </a:solidFill>
-                <a:latin typeface="Segoe UI"/>
-              </a:rPr>
-              <a:t>02</a:t>
-            </a:r>
-          </a:p>
-        </p:txBody>
-      </p:sp>
-      <p:sp>
-        <p:nvSpPr>
-          <p:cNvPr id="7" name="TextBox 6"/>
-          <p:cNvSpPr txBox="1"/>
-          <p:nvPr/>
-        </p:nvSpPr>
-        <p:spPr>
-          <a:xfrm>
-            <a:off x="640080" y="1691640"/>
-            <a:ext cx="5486400" cy="1698157"/>
-          </a:xfrm>
-          <a:prstGeom prst="rect">
-            <a:avLst/>
-          </a:prstGeom>
-          <a:noFill/>
-        </p:spPr>
-        <p:txBody>
-          <a:bodyPr wrap="square" lIns="0" tIns="0" rIns="0" bIns="0" anchor="t">
-            <a:spAutoFit/>
-          </a:bodyPr>
-          <a:lstStyle/>
-          <a:p>
             <a:pPr algn="l">
               <a:lnSpc>
                 <a:spcPct val="115000"/>
@@ -14998,7 +13382,7 @@
         </p:nvSpPr>
         <p:spPr>
           <a:xfrm>
-            <a:off x="640080" y="3429000"/>
+            <a:off x="640080" y="3570398"/>
             <a:ext cx="2670048" cy="2377440"/>
           </a:xfrm>
           <a:prstGeom prst="roundRect">
@@ -15051,7 +13435,7 @@
         </p:nvSpPr>
         <p:spPr>
           <a:xfrm>
-            <a:off x="640080" y="3429000"/>
+            <a:off x="640080" y="3570398"/>
             <a:ext cx="2670048" cy="109728"/>
           </a:xfrm>
           <a:prstGeom prst="rect">
@@ -15096,7 +13480,7 @@
         </p:nvSpPr>
         <p:spPr>
           <a:xfrm>
-            <a:off x="868680" y="3749040"/>
+            <a:off x="868680" y="3890438"/>
             <a:ext cx="2212848" cy="457200"/>
           </a:xfrm>
           <a:prstGeom prst="rect">
@@ -15141,7 +13525,7 @@
         </p:nvSpPr>
         <p:spPr>
           <a:xfrm>
-            <a:off x="868680" y="4297680"/>
+            <a:off x="868680" y="4439078"/>
             <a:ext cx="2212848" cy="396840"/>
           </a:xfrm>
           <a:prstGeom prst="rect">
@@ -15186,7 +13570,7 @@
         </p:nvSpPr>
         <p:spPr>
           <a:xfrm>
-            <a:off x="3474720" y="3429000"/>
+            <a:off x="3474720" y="3570398"/>
             <a:ext cx="2670048" cy="2377440"/>
           </a:xfrm>
           <a:prstGeom prst="roundRect">
@@ -15239,7 +13623,7 @@
         </p:nvSpPr>
         <p:spPr>
           <a:xfrm>
-            <a:off x="3474720" y="3429000"/>
+            <a:off x="3474720" y="3570398"/>
             <a:ext cx="2670048" cy="109728"/>
           </a:xfrm>
           <a:prstGeom prst="rect">
@@ -15284,7 +13668,7 @@
         </p:nvSpPr>
         <p:spPr>
           <a:xfrm>
-            <a:off x="3703320" y="3749040"/>
+            <a:off x="3703320" y="3890438"/>
             <a:ext cx="2212848" cy="457200"/>
           </a:xfrm>
           <a:prstGeom prst="rect">
@@ -15329,7 +13713,7 @@
         </p:nvSpPr>
         <p:spPr>
           <a:xfrm>
-            <a:off x="3703320" y="4297680"/>
+            <a:off x="3703320" y="4439078"/>
             <a:ext cx="2212848" cy="603691"/>
           </a:xfrm>
           <a:prstGeom prst="rect">
@@ -15374,7 +13758,7 @@
         </p:nvSpPr>
         <p:spPr>
           <a:xfrm>
-            <a:off x="6309360" y="3429000"/>
+            <a:off x="6309360" y="3570398"/>
             <a:ext cx="2670048" cy="2377440"/>
           </a:xfrm>
           <a:prstGeom prst="roundRect">
@@ -15427,7 +13811,7 @@
         </p:nvSpPr>
         <p:spPr>
           <a:xfrm>
-            <a:off x="6309360" y="3429000"/>
+            <a:off x="6309360" y="3570398"/>
             <a:ext cx="2670048" cy="109728"/>
           </a:xfrm>
           <a:prstGeom prst="rect">
@@ -15472,7 +13856,7 @@
         </p:nvSpPr>
         <p:spPr>
           <a:xfrm>
-            <a:off x="6537960" y="3749040"/>
+            <a:off x="6537960" y="3890438"/>
             <a:ext cx="2212848" cy="230832"/>
           </a:xfrm>
           <a:prstGeom prst="rect">
@@ -15517,7 +13901,7 @@
         </p:nvSpPr>
         <p:spPr>
           <a:xfrm>
-            <a:off x="6537960" y="4297680"/>
+            <a:off x="6537960" y="4439078"/>
             <a:ext cx="2212848" cy="603691"/>
           </a:xfrm>
           <a:prstGeom prst="rect">
@@ -15562,7 +13946,7 @@
         </p:nvSpPr>
         <p:spPr>
           <a:xfrm>
-            <a:off x="9144000" y="3429000"/>
+            <a:off x="9144000" y="3570398"/>
             <a:ext cx="2670048" cy="2377440"/>
           </a:xfrm>
           <a:prstGeom prst="roundRect">
@@ -15615,7 +13999,7 @@
         </p:nvSpPr>
         <p:spPr>
           <a:xfrm>
-            <a:off x="9144000" y="3429000"/>
+            <a:off x="9144000" y="3570398"/>
             <a:ext cx="2670048" cy="109728"/>
           </a:xfrm>
           <a:prstGeom prst="rect">
@@ -15660,7 +14044,7 @@
         </p:nvSpPr>
         <p:spPr>
           <a:xfrm>
-            <a:off x="9372600" y="3749040"/>
+            <a:off x="9372600" y="3890438"/>
             <a:ext cx="2212848" cy="230832"/>
           </a:xfrm>
           <a:prstGeom prst="rect">
@@ -15705,7 +14089,7 @@
         </p:nvSpPr>
         <p:spPr>
           <a:xfrm>
-            <a:off x="9372600" y="4297680"/>
+            <a:off x="9372600" y="4439078"/>
             <a:ext cx="2212848" cy="396840"/>
           </a:xfrm>
           <a:prstGeom prst="rect">
@@ -15912,60 +14296,6 @@
       </p:sp>
       <p:sp>
         <p:nvSpPr>
-          <p:cNvPr id="5" name="TextBox 4"/>
-          <p:cNvSpPr txBox="1"/>
-          <p:nvPr/>
-        </p:nvSpPr>
-        <p:spPr>
-          <a:xfrm>
-            <a:off x="502920" y="6446520"/>
-            <a:ext cx="5486400" cy="138499"/>
-          </a:xfrm>
-          <a:prstGeom prst="rect">
-            <a:avLst/>
-          </a:prstGeom>
-          <a:noFill/>
-        </p:spPr>
-        <p:txBody>
-          <a:bodyPr wrap="square" lIns="0" tIns="0" rIns="0" bIns="0" anchor="t">
-            <a:spAutoFit/>
-          </a:bodyPr>
-          <a:lstStyle/>
-          <a:p>
-            <a:pPr algn="l">
-              <a:lnSpc>
-                <a:spcPct val="100000"/>
-              </a:lnSpc>
-              <a:spcBef>
-                <a:spcPts val="0"/>
-              </a:spcBef>
-              <a:spcAft>
-                <a:spcPts val="400"/>
-              </a:spcAft>
-            </a:pPr>
-            <a:r>
-              <a:rPr lang="pt-BR" sz="900" b="1" noProof="0" dirty="0">
-                <a:solidFill>
-                  <a:srgbClr val="2B5CE6"/>
-                </a:solidFill>
-                <a:latin typeface="Segoe UI"/>
-              </a:rPr>
-              <a:t>GESTAO 360</a:t>
-            </a:r>
-            <a:r>
-              <a:rPr lang="pt-BR" sz="900" b="0" noProof="0" dirty="0">
-                <a:solidFill>
-                  <a:srgbClr val="5B6B82"/>
-                </a:solidFill>
-                <a:latin typeface="Segoe UI"/>
-              </a:rPr>
-              <a:t>   •   Plataforma corporativa de gestão   •   gestao360.org</a:t>
-            </a:r>
-          </a:p>
-        </p:txBody>
-      </p:sp>
-      <p:sp>
-        <p:nvSpPr>
           <p:cNvPr id="6" name="TextBox 5"/>
           <p:cNvSpPr txBox="1"/>
           <p:nvPr/>
@@ -16802,7 +15132,7 @@
         <p:spPr>
           <a:xfrm>
             <a:off x="640080" y="3977639"/>
-            <a:ext cx="10972800" cy="365760"/>
+            <a:ext cx="10972800" cy="246221"/>
           </a:xfrm>
           <a:prstGeom prst="rect">
             <a:avLst/>
@@ -16833,25 +15163,7 @@
                 </a:solidFill>
                 <a:latin typeface="Segoe UI Semibold"/>
               </a:rPr>
-              <a:t>Quatro pilares, um ciclo de </a:t>
-            </a:r>
-            <a:r>
-              <a:rPr lang="pt-BR" sz="1600" b="1" noProof="0" dirty="0" err="1">
-                <a:solidFill>
-                  <a:srgbClr val="0F1B2E"/>
-                </a:solidFill>
-                <a:latin typeface="Segoe UI Semibold"/>
-              </a:rPr>
-              <a:t>gestao</a:t>
-            </a:r>
-            <a:r>
-              <a:rPr lang="pt-BR" sz="1600" b="1" noProof="0" dirty="0">
-                <a:solidFill>
-                  <a:srgbClr val="0F1B2E"/>
-                </a:solidFill>
-                <a:latin typeface="Segoe UI Semibold"/>
-              </a:rPr>
-              <a:t> continuo</a:t>
+              <a:t>Quatro pilares, um ciclo de gestão continuo</a:t>
             </a:r>
           </a:p>
         </p:txBody>
@@ -17740,7 +16052,7 @@
         <p:spPr>
           <a:xfrm>
             <a:off x="640080" y="868680"/>
-            <a:ext cx="10789920" cy="822960"/>
+            <a:ext cx="10789920" cy="492443"/>
           </a:xfrm>
           <a:prstGeom prst="rect">
             <a:avLst/>
@@ -17771,115 +16083,7 @@
                 </a:solidFill>
                 <a:latin typeface="Segoe UI Semibold"/>
               </a:rPr>
-              <a:t>Os 10 </a:t>
-            </a:r>
-            <a:r>
-              <a:rPr lang="pt-BR" sz="3200" b="1" noProof="0" dirty="0" err="1">
-                <a:solidFill>
-                  <a:srgbClr val="0F1B2E"/>
-                </a:solidFill>
-                <a:latin typeface="Segoe UI Semibold"/>
-              </a:rPr>
-              <a:t>modulos</a:t>
-            </a:r>
-            <a:r>
-              <a:rPr lang="pt-BR" sz="3200" b="1" noProof="0" dirty="0">
-                <a:solidFill>
-                  <a:srgbClr val="0F1B2E"/>
-                </a:solidFill>
-                <a:latin typeface="Segoe UI Semibold"/>
-              </a:rPr>
-              <a:t> do </a:t>
-            </a:r>
-            <a:r>
-              <a:rPr lang="pt-BR" sz="3200" b="1" noProof="0" dirty="0" err="1">
-                <a:solidFill>
-                  <a:srgbClr val="0F1B2E"/>
-                </a:solidFill>
-                <a:latin typeface="Segoe UI Semibold"/>
-              </a:rPr>
-              <a:t>Gestao</a:t>
-            </a:r>
-            <a:r>
-              <a:rPr lang="pt-BR" sz="3200" b="1" noProof="0" dirty="0">
-                <a:solidFill>
-                  <a:srgbClr val="0F1B2E"/>
-                </a:solidFill>
-                <a:latin typeface="Segoe UI Semibold"/>
-              </a:rPr>
-              <a:t> 360</a:t>
-            </a:r>
-          </a:p>
-        </p:txBody>
-      </p:sp>
-      <p:sp>
-        <p:nvSpPr>
-          <p:cNvPr id="5" name="TextBox 4"/>
-          <p:cNvSpPr txBox="1"/>
-          <p:nvPr/>
-        </p:nvSpPr>
-        <p:spPr>
-          <a:xfrm>
-            <a:off x="502920" y="6446520"/>
-            <a:ext cx="5486400" cy="320040"/>
-          </a:xfrm>
-          <a:prstGeom prst="rect">
-            <a:avLst/>
-          </a:prstGeom>
-          <a:noFill/>
-        </p:spPr>
-        <p:txBody>
-          <a:bodyPr wrap="square" lIns="0" tIns="0" rIns="0" bIns="0" anchor="t">
-            <a:spAutoFit/>
-          </a:bodyPr>
-          <a:lstStyle/>
-          <a:p>
-            <a:pPr algn="l">
-              <a:lnSpc>
-                <a:spcPct val="100000"/>
-              </a:lnSpc>
-              <a:spcBef>
-                <a:spcPts val="0"/>
-              </a:spcBef>
-              <a:spcAft>
-                <a:spcPts val="400"/>
-              </a:spcAft>
-            </a:pPr>
-            <a:r>
-              <a:rPr lang="pt-BR" sz="900" b="1" noProof="0" dirty="0">
-                <a:solidFill>
-                  <a:srgbClr val="2B5CE6"/>
-                </a:solidFill>
-                <a:latin typeface="Segoe UI"/>
-              </a:rPr>
-              <a:t>GESTAO 360</a:t>
-            </a:r>
-            <a:r>
-              <a:rPr lang="pt-BR" sz="900" b="0" noProof="0" dirty="0">
-                <a:solidFill>
-                  <a:srgbClr val="5B6B82"/>
-                </a:solidFill>
-                <a:latin typeface="Segoe UI"/>
-              </a:rPr>
-              <a:t>   •   Plataforma corporativa de </a:t>
-            </a:r>
-            <a:r>
-              <a:rPr lang="pt-BR" sz="900" b="0" noProof="0" dirty="0" err="1">
-                <a:solidFill>
-                  <a:srgbClr val="5B6B82"/>
-                </a:solidFill>
-                <a:latin typeface="Segoe UI"/>
-              </a:rPr>
-              <a:t>gestao</a:t>
-            </a:r>
-            <a:r>
-              <a:rPr lang="pt-BR" sz="900" b="0" noProof="0" dirty="0">
-                <a:solidFill>
-                  <a:srgbClr val="5B6B82"/>
-                </a:solidFill>
-                <a:latin typeface="Segoe UI"/>
-              </a:rPr>
-              <a:t>   •   gestao360.org</a:t>
+              <a:t>Os 10 módulos do Gestão 360</a:t>
             </a:r>
           </a:p>
         </p:txBody>
@@ -18171,7 +16375,7 @@
         <p:spPr>
           <a:xfrm>
             <a:off x="822960" y="3108960"/>
-            <a:ext cx="1755648" cy="685800"/>
+            <a:ext cx="1755648" cy="449739"/>
           </a:xfrm>
           <a:prstGeom prst="rect">
             <a:avLst/>
@@ -18202,25 +16406,7 @@
                 </a:solidFill>
                 <a:latin typeface="Segoe UI"/>
               </a:rPr>
-              <a:t>Caixa de entrada corporativa: tudo que exige sua </a:t>
-            </a:r>
-            <a:r>
-              <a:rPr lang="pt-BR" sz="950" b="0" noProof="0" dirty="0" err="1">
-                <a:solidFill>
-                  <a:srgbClr val="5B6B82"/>
-                </a:solidFill>
-                <a:latin typeface="Segoe UI"/>
-              </a:rPr>
-              <a:t>acao</a:t>
-            </a:r>
-            <a:r>
-              <a:rPr lang="pt-BR" sz="950" b="0" noProof="0" dirty="0">
-                <a:solidFill>
-                  <a:srgbClr val="5B6B82"/>
-                </a:solidFill>
-                <a:latin typeface="Segoe UI"/>
-              </a:rPr>
-              <a:t> em um lugar.</a:t>
+              <a:t>Caixa de entrada corporativa: tudo que exige sua ação em um lugar.</a:t>
             </a:r>
           </a:p>
         </p:txBody>
@@ -18512,7 +16698,7 @@
         <p:spPr>
           <a:xfrm>
             <a:off x="3081528" y="3108960"/>
-            <a:ext cx="1755648" cy="685800"/>
+            <a:ext cx="1755648" cy="296235"/>
           </a:xfrm>
           <a:prstGeom prst="rect">
             <a:avLst/>
@@ -18537,40 +16723,13 @@
               </a:spcAft>
             </a:pPr>
             <a:r>
-              <a:rPr lang="pt-BR" sz="950" b="0" noProof="0" dirty="0" err="1">
+              <a:rPr lang="pt-BR" sz="950" b="0" noProof="0" dirty="0">
                 <a:solidFill>
                   <a:srgbClr val="5B6B82"/>
                 </a:solidFill>
                 <a:latin typeface="Segoe UI"/>
               </a:rPr>
-              <a:t>Gestao</a:t>
-            </a:r>
-            <a:r>
-              <a:rPr lang="pt-BR" sz="950" b="0" noProof="0" dirty="0">
-                <a:solidFill>
-                  <a:srgbClr val="5B6B82"/>
-                </a:solidFill>
-                <a:latin typeface="Segoe UI"/>
-              </a:rPr>
-              <a:t> de tarefas e demandas com prazos e </a:t>
-            </a:r>
-            <a:r>
-              <a:rPr lang="pt-BR" sz="950" b="0" noProof="0" dirty="0" err="1">
-                <a:solidFill>
-                  <a:srgbClr val="5B6B82"/>
-                </a:solidFill>
-                <a:latin typeface="Segoe UI"/>
-              </a:rPr>
-              <a:t>responsaveis</a:t>
-            </a:r>
-            <a:r>
-              <a:rPr lang="pt-BR" sz="950" b="0" noProof="0" dirty="0">
-                <a:solidFill>
-                  <a:srgbClr val="5B6B82"/>
-                </a:solidFill>
-                <a:latin typeface="Segoe UI"/>
-              </a:rPr>
-              <a:t>.</a:t>
+              <a:t>Gestão de tarefas e demandas com prazos e responsáveis.</a:t>
             </a:r>
           </a:p>
         </p:txBody>
@@ -18817,7 +16976,7 @@
         <p:spPr>
           <a:xfrm>
             <a:off x="5340096" y="2532888"/>
-            <a:ext cx="1755648" cy="566928"/>
+            <a:ext cx="1755648" cy="188513"/>
           </a:xfrm>
           <a:prstGeom prst="rect">
             <a:avLst/>
@@ -18842,20 +17001,14 @@
               </a:spcAft>
             </a:pPr>
             <a:r>
-              <a:rPr lang="pt-BR" sz="1250" b="1" noProof="0" dirty="0" err="1">
+              <a:rPr lang="pt-BR" sz="1250" b="1" noProof="0" dirty="0">
                 <a:solidFill>
                   <a:srgbClr val="0F1B2E"/>
                 </a:solidFill>
                 <a:latin typeface="Segoe UI Semibold"/>
               </a:rPr>
-              <a:t>Administracao</a:t>
-            </a:r>
-            <a:endParaRPr lang="pt-BR" sz="1250" b="1" noProof="0" dirty="0">
-              <a:solidFill>
-                <a:srgbClr val="0F1B2E"/>
-              </a:solidFill>
-              <a:latin typeface="Segoe UI Semibold"/>
-            </a:endParaRPr>
+              <a:t>Administração</a:t>
+            </a:r>
           </a:p>
         </p:txBody>
       </p:sp>
@@ -18868,7 +17021,7 @@
         <p:spPr>
           <a:xfrm>
             <a:off x="5340096" y="3108960"/>
-            <a:ext cx="1755648" cy="685800"/>
+            <a:ext cx="1755648" cy="296235"/>
           </a:xfrm>
           <a:prstGeom prst="rect">
             <a:avLst/>
@@ -18893,94 +17046,13 @@
               </a:spcAft>
             </a:pPr>
             <a:r>
-              <a:rPr lang="pt-BR" sz="950" b="0" noProof="0" dirty="0" err="1">
+              <a:rPr lang="pt-BR" sz="950" b="0" noProof="0" dirty="0">
                 <a:solidFill>
                   <a:srgbClr val="5B6B82"/>
                 </a:solidFill>
                 <a:latin typeface="Segoe UI"/>
               </a:rPr>
-              <a:t>Usuarios</a:t>
-            </a:r>
-            <a:r>
-              <a:rPr lang="pt-BR" sz="950" b="0" noProof="0" dirty="0">
-                <a:solidFill>
-                  <a:srgbClr val="5B6B82"/>
-                </a:solidFill>
-                <a:latin typeface="Segoe UI"/>
-              </a:rPr>
-              <a:t>, </a:t>
-            </a:r>
-            <a:r>
-              <a:rPr lang="pt-BR" sz="950" b="0" noProof="0" dirty="0" err="1">
-                <a:solidFill>
-                  <a:srgbClr val="5B6B82"/>
-                </a:solidFill>
-                <a:latin typeface="Segoe UI"/>
-              </a:rPr>
-              <a:t>aprovacoes</a:t>
-            </a:r>
-            <a:r>
-              <a:rPr lang="pt-BR" sz="950" b="0" noProof="0" dirty="0">
-                <a:solidFill>
-                  <a:srgbClr val="5B6B82"/>
-                </a:solidFill>
-                <a:latin typeface="Segoe UI"/>
-              </a:rPr>
-              <a:t>, </a:t>
-            </a:r>
-            <a:r>
-              <a:rPr lang="pt-BR" sz="950" b="0" noProof="0" dirty="0" err="1">
-                <a:solidFill>
-                  <a:srgbClr val="5B6B82"/>
-                </a:solidFill>
-                <a:latin typeface="Segoe UI"/>
-              </a:rPr>
-              <a:t>periodos</a:t>
-            </a:r>
-            <a:r>
-              <a:rPr lang="pt-BR" sz="950" b="0" noProof="0" dirty="0">
-                <a:solidFill>
-                  <a:srgbClr val="5B6B82"/>
-                </a:solidFill>
-                <a:latin typeface="Segoe UI"/>
-              </a:rPr>
-              <a:t>, </a:t>
-            </a:r>
-            <a:r>
-              <a:rPr lang="pt-BR" sz="950" b="0" noProof="0" dirty="0" err="1">
-                <a:solidFill>
-                  <a:srgbClr val="5B6B82"/>
-                </a:solidFill>
-                <a:latin typeface="Segoe UI"/>
-              </a:rPr>
-              <a:t>automacoes</a:t>
-            </a:r>
-            <a:r>
-              <a:rPr lang="pt-BR" sz="950" b="0" noProof="0" dirty="0">
-                <a:solidFill>
-                  <a:srgbClr val="5B6B82"/>
-                </a:solidFill>
-                <a:latin typeface="Segoe UI"/>
-              </a:rPr>
-              <a:t> e </a:t>
-            </a:r>
-            <a:r>
-              <a:rPr lang="pt-BR" sz="950" b="0" noProof="0" dirty="0" err="1">
-                <a:solidFill>
-                  <a:srgbClr val="5B6B82"/>
-                </a:solidFill>
-                <a:latin typeface="Segoe UI"/>
-              </a:rPr>
-              <a:t>relatorios</a:t>
-            </a:r>
-            <a:r>
-              <a:rPr lang="pt-BR" sz="950" b="0" noProof="0" dirty="0">
-                <a:solidFill>
-                  <a:srgbClr val="5B6B82"/>
-                </a:solidFill>
-                <a:latin typeface="Segoe UI"/>
-              </a:rPr>
-              <a:t>.</a:t>
+              <a:t>Usuários, aprovações, períodos, automações e relatórios.</a:t>
             </a:r>
           </a:p>
         </p:txBody>
@@ -19227,7 +17299,7 @@
         <p:spPr>
           <a:xfrm>
             <a:off x="7598664" y="2532888"/>
-            <a:ext cx="1755648" cy="566928"/>
+            <a:ext cx="1755648" cy="188513"/>
           </a:xfrm>
           <a:prstGeom prst="rect">
             <a:avLst/>
@@ -19252,22 +17324,13 @@
               </a:spcAft>
             </a:pPr>
             <a:r>
-              <a:rPr lang="pt-BR" sz="1250" b="1" noProof="0" dirty="0" err="1">
+              <a:rPr lang="pt-BR" sz="1250" b="1" noProof="0" dirty="0">
                 <a:solidFill>
                   <a:srgbClr val="0F1B2E"/>
                 </a:solidFill>
                 <a:latin typeface="Segoe UI Semibold"/>
               </a:rPr>
-              <a:t>Gestao</a:t>
-            </a:r>
-            <a:r>
-              <a:rPr lang="pt-BR" sz="1250" b="1" noProof="0" dirty="0">
-                <a:solidFill>
-                  <a:srgbClr val="0F1B2E"/>
-                </a:solidFill>
-                <a:latin typeface="Segoe UI Semibold"/>
-              </a:rPr>
-              <a:t> a Vista</a:t>
+              <a:t>Gestão a Vista</a:t>
             </a:r>
           </a:p>
         </p:txBody>
@@ -19281,7 +17344,7 @@
         <p:spPr>
           <a:xfrm>
             <a:off x="7598664" y="3108960"/>
-            <a:ext cx="1755648" cy="685800"/>
+            <a:ext cx="1755648" cy="449739"/>
           </a:xfrm>
           <a:prstGeom prst="rect">
             <a:avLst/>
@@ -19312,25 +17375,7 @@
                 </a:solidFill>
                 <a:latin typeface="Segoe UI"/>
               </a:rPr>
-              <a:t>Indicadores, metas, farol, painel executivo, desvios e </a:t>
-            </a:r>
-            <a:r>
-              <a:rPr lang="pt-BR" sz="950" b="0" noProof="0" dirty="0" err="1">
-                <a:solidFill>
-                  <a:srgbClr val="5B6B82"/>
-                </a:solidFill>
-                <a:latin typeface="Segoe UI"/>
-              </a:rPr>
-              <a:t>reuniao</a:t>
-            </a:r>
-            <a:r>
-              <a:rPr lang="pt-BR" sz="950" b="0" noProof="0" dirty="0">
-                <a:solidFill>
-                  <a:srgbClr val="5B6B82"/>
-                </a:solidFill>
-                <a:latin typeface="Segoe UI"/>
-              </a:rPr>
-              <a:t> mensal.</a:t>
+              <a:t>Indicadores, metas, farol, painel executivo, desvios e reunião mensal.</a:t>
             </a:r>
           </a:p>
         </p:txBody>
@@ -19622,7 +17667,7 @@
         <p:spPr>
           <a:xfrm>
             <a:off x="9857232" y="3108960"/>
-            <a:ext cx="1755648" cy="685800"/>
+            <a:ext cx="1755648" cy="296235"/>
           </a:xfrm>
           <a:prstGeom prst="rect">
             <a:avLst/>
@@ -19653,25 +17698,7 @@
                 </a:solidFill>
                 <a:latin typeface="Segoe UI"/>
               </a:rPr>
-              <a:t>Riscos 5x5, </a:t>
-            </a:r>
-            <a:r>
-              <a:rPr lang="pt-BR" sz="950" b="0" noProof="0" dirty="0" err="1">
-                <a:solidFill>
-                  <a:srgbClr val="5B6B82"/>
-                </a:solidFill>
-                <a:latin typeface="Segoe UI"/>
-              </a:rPr>
-              <a:t>nao</a:t>
-            </a:r>
-            <a:r>
-              <a:rPr lang="pt-BR" sz="950" b="0" noProof="0" dirty="0">
-                <a:solidFill>
-                  <a:srgbClr val="5B6B82"/>
-                </a:solidFill>
-                <a:latin typeface="Segoe UI"/>
-              </a:rPr>
-              <a:t> conformidades, auditorias, GED e processos.</a:t>
+              <a:t>Riscos 5x5, não conformidades, auditorias, GED e processos.</a:t>
             </a:r>
           </a:p>
         </p:txBody>
@@ -19918,7 +17945,7 @@
         <p:spPr>
           <a:xfrm>
             <a:off x="822960" y="4864608"/>
-            <a:ext cx="1755648" cy="566928"/>
+            <a:ext cx="1755648" cy="188513"/>
           </a:xfrm>
           <a:prstGeom prst="rect">
             <a:avLst/>
@@ -19943,20 +17970,14 @@
               </a:spcAft>
             </a:pPr>
             <a:r>
-              <a:rPr lang="pt-BR" sz="1250" b="1" noProof="0" dirty="0" err="1">
+              <a:rPr lang="pt-BR" sz="1250" b="1" noProof="0" dirty="0">
                 <a:solidFill>
                   <a:srgbClr val="0F1B2E"/>
                 </a:solidFill>
                 <a:latin typeface="Segoe UI Semibold"/>
               </a:rPr>
-              <a:t>Comunicacao</a:t>
-            </a:r>
-            <a:endParaRPr lang="pt-BR" sz="1250" b="1" noProof="0" dirty="0">
-              <a:solidFill>
-                <a:srgbClr val="0F1B2E"/>
-              </a:solidFill>
-              <a:latin typeface="Segoe UI Semibold"/>
-            </a:endParaRPr>
+              <a:t>Comunicação</a:t>
+            </a:r>
           </a:p>
         </p:txBody>
       </p:sp>
@@ -20247,7 +18268,7 @@
         <p:spPr>
           <a:xfrm>
             <a:off x="3081528" y="4864608"/>
-            <a:ext cx="1755648" cy="566928"/>
+            <a:ext cx="1755648" cy="188513"/>
           </a:xfrm>
           <a:prstGeom prst="rect">
             <a:avLst/>
@@ -20278,23 +18299,8 @@
                 </a:solidFill>
                 <a:latin typeface="Segoe UI Semibold"/>
               </a:rPr>
-              <a:t>Cargos e </a:t>
-            </a:r>
-            <a:r>
-              <a:rPr lang="pt-BR" sz="1250" b="1" noProof="0" dirty="0" err="1">
-                <a:solidFill>
-                  <a:srgbClr val="0F1B2E"/>
-                </a:solidFill>
-                <a:latin typeface="Segoe UI Semibold"/>
-              </a:rPr>
-              <a:t>Salarios</a:t>
-            </a:r>
-            <a:endParaRPr lang="pt-BR" sz="1250" b="1" noProof="0" dirty="0">
-              <a:solidFill>
-                <a:srgbClr val="0F1B2E"/>
-              </a:solidFill>
-              <a:latin typeface="Segoe UI Semibold"/>
-            </a:endParaRPr>
+              <a:t>Cargos e Salários</a:t>
+            </a:r>
           </a:p>
         </p:txBody>
       </p:sp>
@@ -20307,7 +18313,7 @@
         <p:spPr>
           <a:xfrm>
             <a:off x="3081528" y="5440680"/>
-            <a:ext cx="1755648" cy="685800"/>
+            <a:ext cx="1755648" cy="449739"/>
           </a:xfrm>
           <a:prstGeom prst="rect">
             <a:avLst/>
@@ -20338,25 +18344,7 @@
                 </a:solidFill>
                 <a:latin typeface="Segoe UI"/>
               </a:rPr>
-              <a:t>Estrutura de cargos, tabela salarial, </a:t>
-            </a:r>
-            <a:r>
-              <a:rPr lang="pt-BR" sz="950" b="0" noProof="0" dirty="0" err="1">
-                <a:solidFill>
-                  <a:srgbClr val="5B6B82"/>
-                </a:solidFill>
-                <a:latin typeface="Segoe UI"/>
-              </a:rPr>
-              <a:t>merito</a:t>
-            </a:r>
-            <a:r>
-              <a:rPr lang="pt-BR" sz="950" b="0" noProof="0" dirty="0">
-                <a:solidFill>
-                  <a:srgbClr val="5B6B82"/>
-                </a:solidFill>
-                <a:latin typeface="Segoe UI"/>
-              </a:rPr>
-              <a:t> e equidade (Lei 14.611).</a:t>
+              <a:t>Estrutura de cargos, tabela salarial, mérito e equidade (Lei 14.611).</a:t>
             </a:r>
           </a:p>
         </p:txBody>
@@ -20603,7 +18591,7 @@
         <p:spPr>
           <a:xfrm>
             <a:off x="5340096" y="4864608"/>
-            <a:ext cx="1755648" cy="566928"/>
+            <a:ext cx="1755648" cy="377026"/>
           </a:xfrm>
           <a:prstGeom prst="rect">
             <a:avLst/>
@@ -20628,22 +18616,13 @@
               </a:spcAft>
             </a:pPr>
             <a:r>
-              <a:rPr lang="pt-BR" sz="1250" b="1" noProof="0" dirty="0" err="1">
+              <a:rPr lang="pt-BR" sz="1250" b="1" noProof="0" dirty="0">
                 <a:solidFill>
                   <a:srgbClr val="0F1B2E"/>
                 </a:solidFill>
                 <a:latin typeface="Segoe UI Semibold"/>
               </a:rPr>
-              <a:t>Seguranca</a:t>
-            </a:r>
-            <a:r>
-              <a:rPr lang="pt-BR" sz="1250" b="1" noProof="0" dirty="0">
-                <a:solidFill>
-                  <a:srgbClr val="0F1B2E"/>
-                </a:solidFill>
-                <a:latin typeface="Segoe UI Semibold"/>
-              </a:rPr>
-              <a:t> dos Alimentos</a:t>
+              <a:t>Segurança dos Alimentos</a:t>
             </a:r>
           </a:p>
         </p:txBody>
@@ -20657,7 +18636,7 @@
         <p:spPr>
           <a:xfrm>
             <a:off x="5340096" y="5440680"/>
-            <a:ext cx="1755648" cy="685800"/>
+            <a:ext cx="1755648" cy="449739"/>
           </a:xfrm>
           <a:prstGeom prst="rect">
             <a:avLst/>
@@ -20688,25 +18667,7 @@
                 </a:solidFill>
                 <a:latin typeface="Segoe UI"/>
               </a:rPr>
-              <a:t>Fluxos APPCC/HACCP e controles de </a:t>
-            </a:r>
-            <a:r>
-              <a:rPr lang="pt-BR" sz="950" b="0" noProof="0" dirty="0" err="1">
-                <a:solidFill>
-                  <a:srgbClr val="5B6B82"/>
-                </a:solidFill>
-                <a:latin typeface="Segoe UI"/>
-              </a:rPr>
-              <a:t>seguranca</a:t>
-            </a:r>
-            <a:r>
-              <a:rPr lang="pt-BR" sz="950" b="0" noProof="0" dirty="0">
-                <a:solidFill>
-                  <a:srgbClr val="5B6B82"/>
-                </a:solidFill>
-                <a:latin typeface="Segoe UI"/>
-              </a:rPr>
-              <a:t> de alimentos.</a:t>
+              <a:t>Fluxos APPCC/HACCP e controles de segurança de alimentos.</a:t>
             </a:r>
           </a:p>
         </p:txBody>
@@ -20953,7 +18914,7 @@
         <p:spPr>
           <a:xfrm>
             <a:off x="7598664" y="4864608"/>
-            <a:ext cx="1755648" cy="566928"/>
+            <a:ext cx="1755648" cy="188513"/>
           </a:xfrm>
           <a:prstGeom prst="rect">
             <a:avLst/>
@@ -20978,22 +18939,13 @@
               </a:spcAft>
             </a:pPr>
             <a:r>
-              <a:rPr lang="pt-BR" sz="1250" b="1" noProof="0" dirty="0" err="1">
+              <a:rPr lang="pt-BR" sz="1250" b="1" noProof="0" dirty="0">
                 <a:solidFill>
                   <a:srgbClr val="0F1B2E"/>
                 </a:solidFill>
                 <a:latin typeface="Segoe UI Semibold"/>
               </a:rPr>
-              <a:t>Seguranca</a:t>
-            </a:r>
-            <a:r>
-              <a:rPr lang="pt-BR" sz="1250" b="1" noProof="0" dirty="0">
-                <a:solidFill>
-                  <a:srgbClr val="0F1B2E"/>
-                </a:solidFill>
-                <a:latin typeface="Segoe UI Semibold"/>
-              </a:rPr>
-              <a:t> Patrimonial</a:t>
+              <a:t>Segurança Patrimonial</a:t>
             </a:r>
           </a:p>
         </p:txBody>
@@ -21007,7 +18959,7 @@
         <p:spPr>
           <a:xfrm>
             <a:off x="7598664" y="5440680"/>
-            <a:ext cx="1755648" cy="685800"/>
+            <a:ext cx="1755648" cy="449739"/>
           </a:xfrm>
           <a:prstGeom prst="rect">
             <a:avLst/>
@@ -21038,43 +18990,7 @@
                 </a:solidFill>
                 <a:latin typeface="Segoe UI"/>
               </a:rPr>
-              <a:t>Rondas com QR, </a:t>
-            </a:r>
-            <a:r>
-              <a:rPr lang="pt-BR" sz="950" b="0" noProof="0" dirty="0" err="1">
-                <a:solidFill>
-                  <a:srgbClr val="5B6B82"/>
-                </a:solidFill>
-                <a:latin typeface="Segoe UI"/>
-              </a:rPr>
-              <a:t>autorizacoes</a:t>
-            </a:r>
-            <a:r>
-              <a:rPr lang="pt-BR" sz="950" b="0" noProof="0" dirty="0">
-                <a:solidFill>
-                  <a:srgbClr val="5B6B82"/>
-                </a:solidFill>
-                <a:latin typeface="Segoe UI"/>
-              </a:rPr>
-              <a:t>, </a:t>
-            </a:r>
-            <a:r>
-              <a:rPr lang="pt-BR" sz="950" b="0" noProof="0" dirty="0" err="1">
-                <a:solidFill>
-                  <a:srgbClr val="5B6B82"/>
-                </a:solidFill>
-                <a:latin typeface="Segoe UI"/>
-              </a:rPr>
-              <a:t>ocorrencias</a:t>
-            </a:r>
-            <a:r>
-              <a:rPr lang="pt-BR" sz="950" b="0" noProof="0" dirty="0">
-                <a:solidFill>
-                  <a:srgbClr val="5B6B82"/>
-                </a:solidFill>
-                <a:latin typeface="Segoe UI"/>
-              </a:rPr>
-              <a:t> e portaria com modo offline.</a:t>
+              <a:t>Rondas com QR, autorizações, ocorrências e portaria com modo offline.</a:t>
             </a:r>
           </a:p>
         </p:txBody>
@@ -21321,7 +19237,7 @@
         <p:spPr>
           <a:xfrm>
             <a:off x="9857232" y="4864608"/>
-            <a:ext cx="1755648" cy="566928"/>
+            <a:ext cx="1755648" cy="188513"/>
           </a:xfrm>
           <a:prstGeom prst="rect">
             <a:avLst/>
@@ -21346,22 +19262,13 @@
               </a:spcAft>
             </a:pPr>
             <a:r>
-              <a:rPr lang="pt-BR" sz="1250" b="1" noProof="0" dirty="0" err="1">
+              <a:rPr lang="pt-BR" sz="1250" b="1" noProof="0" dirty="0">
                 <a:solidFill>
                   <a:srgbClr val="0F1B2E"/>
                 </a:solidFill>
                 <a:latin typeface="Segoe UI Semibold"/>
               </a:rPr>
-              <a:t>Gestao</a:t>
-            </a:r>
-            <a:r>
-              <a:rPr lang="pt-BR" sz="1250" b="1" noProof="0" dirty="0">
-                <a:solidFill>
-                  <a:srgbClr val="0F1B2E"/>
-                </a:solidFill>
-                <a:latin typeface="Segoe UI Semibold"/>
-              </a:rPr>
-              <a:t> de Premio</a:t>
+              <a:t>Gestão de Premio</a:t>
             </a:r>
           </a:p>
         </p:txBody>
@@ -21375,7 +19282,7 @@
         <p:spPr>
           <a:xfrm>
             <a:off x="9857232" y="5440680"/>
-            <a:ext cx="1755648" cy="685800"/>
+            <a:ext cx="1755648" cy="449739"/>
           </a:xfrm>
           <a:prstGeom prst="rect">
             <a:avLst/>
@@ -21400,40 +19307,13 @@
               </a:spcAft>
             </a:pPr>
             <a:r>
-              <a:rPr lang="pt-BR" sz="950" b="0" noProof="0" dirty="0" err="1">
+              <a:rPr lang="pt-BR" sz="950" b="0" noProof="0" dirty="0">
                 <a:solidFill>
                   <a:srgbClr val="5B6B82"/>
                 </a:solidFill>
                 <a:latin typeface="Segoe UI"/>
               </a:rPr>
-              <a:t>Remuneracao</a:t>
-            </a:r>
-            <a:r>
-              <a:rPr lang="pt-BR" sz="950" b="0" noProof="0" dirty="0">
-                <a:solidFill>
-                  <a:srgbClr val="5B6B82"/>
-                </a:solidFill>
-                <a:latin typeface="Segoe UI"/>
-              </a:rPr>
-              <a:t> </a:t>
-            </a:r>
-            <a:r>
-              <a:rPr lang="pt-BR" sz="950" b="0" noProof="0" dirty="0" err="1">
-                <a:solidFill>
-                  <a:srgbClr val="5B6B82"/>
-                </a:solidFill>
-                <a:latin typeface="Segoe UI"/>
-              </a:rPr>
-              <a:t>variavel</a:t>
-            </a:r>
-            <a:r>
-              <a:rPr lang="pt-BR" sz="950" b="0" noProof="0" dirty="0">
-                <a:solidFill>
-                  <a:srgbClr val="5B6B82"/>
-                </a:solidFill>
-                <a:latin typeface="Segoe UI"/>
-              </a:rPr>
-              <a:t> com regras em matriz e motor de calculo calibrado.</a:t>
+              <a:t>Remuneração variável com regras em matriz e motor de calculo calibrado.</a:t>
             </a:r>
           </a:p>
         </p:txBody>
@@ -21615,7 +19495,7 @@
         <p:spPr>
           <a:xfrm>
             <a:off x="640080" y="868680"/>
-            <a:ext cx="10789920" cy="822960"/>
+            <a:ext cx="10789920" cy="492443"/>
           </a:xfrm>
           <a:prstGeom prst="rect">
             <a:avLst/>
@@ -21640,109 +19520,13 @@
               </a:spcAft>
             </a:pPr>
             <a:r>
-              <a:rPr lang="pt-BR" sz="3200" b="1" noProof="0" dirty="0" err="1">
+              <a:rPr lang="pt-BR" sz="3200" b="1" noProof="0" dirty="0">
                 <a:solidFill>
                   <a:srgbClr val="0F1B2E"/>
                 </a:solidFill>
                 <a:latin typeface="Segoe UI Semibold"/>
               </a:rPr>
-              <a:t>Gestao</a:t>
-            </a:r>
-            <a:r>
-              <a:rPr lang="pt-BR" sz="3200" b="1" noProof="0" dirty="0">
-                <a:solidFill>
-                  <a:srgbClr val="0F1B2E"/>
-                </a:solidFill>
-                <a:latin typeface="Segoe UI Semibold"/>
-              </a:rPr>
-              <a:t> a Vista — do indicador a </a:t>
-            </a:r>
-            <a:r>
-              <a:rPr lang="pt-BR" sz="3200" b="1" noProof="0" dirty="0" err="1">
-                <a:solidFill>
-                  <a:srgbClr val="0F1B2E"/>
-                </a:solidFill>
-                <a:latin typeface="Segoe UI Semibold"/>
-              </a:rPr>
-              <a:t>decisao</a:t>
-            </a:r>
-            <a:endParaRPr lang="pt-BR" sz="3200" b="1" noProof="0" dirty="0">
-              <a:solidFill>
-                <a:srgbClr val="0F1B2E"/>
-              </a:solidFill>
-              <a:latin typeface="Segoe UI Semibold"/>
-            </a:endParaRPr>
-          </a:p>
-        </p:txBody>
-      </p:sp>
-      <p:sp>
-        <p:nvSpPr>
-          <p:cNvPr id="5" name="TextBox 4"/>
-          <p:cNvSpPr txBox="1"/>
-          <p:nvPr/>
-        </p:nvSpPr>
-        <p:spPr>
-          <a:xfrm>
-            <a:off x="502920" y="6446520"/>
-            <a:ext cx="5486400" cy="320040"/>
-          </a:xfrm>
-          <a:prstGeom prst="rect">
-            <a:avLst/>
-          </a:prstGeom>
-          <a:noFill/>
-        </p:spPr>
-        <p:txBody>
-          <a:bodyPr wrap="square" lIns="0" tIns="0" rIns="0" bIns="0" anchor="t">
-            <a:spAutoFit/>
-          </a:bodyPr>
-          <a:lstStyle/>
-          <a:p>
-            <a:pPr algn="l">
-              <a:lnSpc>
-                <a:spcPct val="100000"/>
-              </a:lnSpc>
-              <a:spcBef>
-                <a:spcPts val="0"/>
-              </a:spcBef>
-              <a:spcAft>
-                <a:spcPts val="400"/>
-              </a:spcAft>
-            </a:pPr>
-            <a:r>
-              <a:rPr lang="pt-BR" sz="900" b="1" noProof="0" dirty="0">
-                <a:solidFill>
-                  <a:srgbClr val="2B5CE6"/>
-                </a:solidFill>
-                <a:latin typeface="Segoe UI"/>
-              </a:rPr>
-              <a:t>GESTAO 360</a:t>
-            </a:r>
-            <a:r>
-              <a:rPr lang="pt-BR" sz="900" b="0" noProof="0" dirty="0">
-                <a:solidFill>
-                  <a:srgbClr val="5B6B82"/>
-                </a:solidFill>
-                <a:latin typeface="Segoe UI"/>
-              </a:rPr>
-              <a:t>   •   Plataforma corporativa de </a:t>
-            </a:r>
-            <a:r>
-              <a:rPr lang="pt-BR" sz="900" b="0" noProof="0" dirty="0" err="1">
-                <a:solidFill>
-                  <a:srgbClr val="5B6B82"/>
-                </a:solidFill>
-                <a:latin typeface="Segoe UI"/>
-              </a:rPr>
-              <a:t>gestao</a:t>
-            </a:r>
-            <a:r>
-              <a:rPr lang="pt-BR" sz="900" b="0" noProof="0" dirty="0">
-                <a:solidFill>
-                  <a:srgbClr val="5B6B82"/>
-                </a:solidFill>
-                <a:latin typeface="Segoe UI"/>
-              </a:rPr>
-              <a:t>   •   gestao360.org</a:t>
+              <a:t>Gestão a Vista — do indicador a decisão</a:t>
             </a:r>
           </a:p>
         </p:txBody>
@@ -21991,7 +19775,7 @@
         <p:spPr>
           <a:xfrm>
             <a:off x="896112" y="2651760"/>
-            <a:ext cx="2999232" cy="3337560"/>
+            <a:ext cx="2999232" cy="2138791"/>
           </a:xfrm>
           <a:prstGeom prst="rect">
             <a:avLst/>
@@ -22062,16 +19846,60 @@
                 </a:solidFill>
                 <a:latin typeface="Segoe UI"/>
               </a:rPr>
-              <a:t>Farol por atingimento real (</a:t>
-            </a:r>
-            <a:r>
-              <a:rPr lang="pt-BR" sz="1200" b="0" noProof="0" dirty="0" err="1">
+              <a:t>Farol por atingimento real (não desvio bruto)</a:t>
+            </a:r>
+          </a:p>
+          <a:p>
+            <a:pPr algn="l">
+              <a:lnSpc>
+                <a:spcPct val="108000"/>
+              </a:lnSpc>
+              <a:spcBef>
+                <a:spcPts val="0"/>
+              </a:spcBef>
+              <a:spcAft>
+                <a:spcPts val="700"/>
+              </a:spcAft>
+            </a:pPr>
+            <a:r>
+              <a:rPr lang="pt-BR" sz="1200" b="1" noProof="0" dirty="0">
+                <a:solidFill>
+                  <a:srgbClr val="2B5CE6"/>
+                </a:solidFill>
+                <a:latin typeface="Segoe UI"/>
+              </a:rPr>
+              <a:t>•  </a:t>
+            </a:r>
+            <a:r>
+              <a:rPr lang="pt-BR" sz="1200" b="0" noProof="0" dirty="0">
                 <a:solidFill>
                   <a:srgbClr val="0F1B2E"/>
                 </a:solidFill>
                 <a:latin typeface="Segoe UI"/>
               </a:rPr>
-              <a:t>nao</a:t>
+              <a:t>Painel Executivo Mensal e Acumulado</a:t>
+            </a:r>
+          </a:p>
+          <a:p>
+            <a:pPr algn="l">
+              <a:lnSpc>
+                <a:spcPct val="108000"/>
+              </a:lnSpc>
+              <a:spcBef>
+                <a:spcPts val="0"/>
+              </a:spcBef>
+              <a:spcAft>
+                <a:spcPts val="700"/>
+              </a:spcAft>
+            </a:pPr>
+            <a:r>
+              <a:rPr lang="pt-BR" sz="1200" b="1" noProof="0" dirty="0">
+                <a:solidFill>
+                  <a:srgbClr val="2B5CE6"/>
+                </a:solidFill>
+                <a:latin typeface="Segoe UI"/>
+              </a:rPr>
+              <a:t>•  </a:t>
             </a:r>
             <a:r>
               <a:rPr lang="pt-BR" sz="1200" b="0" noProof="0" dirty="0">
@@ -22080,114 +19908,7 @@
                 </a:solidFill>
                 <a:latin typeface="Segoe UI"/>
               </a:rPr>
-              <a:t> desvio bruto)</a:t>
-            </a:r>
-          </a:p>
-          <a:p>
-            <a:pPr algn="l">
-              <a:lnSpc>
-                <a:spcPct val="108000"/>
-              </a:lnSpc>
-              <a:spcBef>
-                <a:spcPts val="0"/>
-              </a:spcBef>
-              <a:spcAft>
-                <a:spcPts val="700"/>
-              </a:spcAft>
-            </a:pPr>
-            <a:r>
-              <a:rPr lang="pt-BR" sz="1200" b="1" noProof="0" dirty="0">
-                <a:solidFill>
-                  <a:srgbClr val="2B5CE6"/>
-                </a:solidFill>
-                <a:latin typeface="Segoe UI"/>
-              </a:rPr>
-              <a:t>•  </a:t>
-            </a:r>
-            <a:r>
-              <a:rPr lang="pt-BR" sz="1200" b="0" noProof="0" dirty="0">
-                <a:solidFill>
-                  <a:srgbClr val="0F1B2E"/>
-                </a:solidFill>
-                <a:latin typeface="Segoe UI"/>
-              </a:rPr>
-              <a:t>Painel Executivo Mensal e Acumulado</a:t>
-            </a:r>
-          </a:p>
-          <a:p>
-            <a:pPr algn="l">
-              <a:lnSpc>
-                <a:spcPct val="108000"/>
-              </a:lnSpc>
-              <a:spcBef>
-                <a:spcPts val="0"/>
-              </a:spcBef>
-              <a:spcAft>
-                <a:spcPts val="700"/>
-              </a:spcAft>
-            </a:pPr>
-            <a:r>
-              <a:rPr lang="pt-BR" sz="1200" b="1" noProof="0" dirty="0">
-                <a:solidFill>
-                  <a:srgbClr val="2B5CE6"/>
-                </a:solidFill>
-                <a:latin typeface="Segoe UI"/>
-              </a:rPr>
-              <a:t>•  </a:t>
-            </a:r>
-            <a:r>
-              <a:rPr lang="pt-BR" sz="1200" b="0" noProof="0" dirty="0" err="1">
-                <a:solidFill>
-                  <a:srgbClr val="0F1B2E"/>
-                </a:solidFill>
-                <a:latin typeface="Segoe UI"/>
-              </a:rPr>
-              <a:t>Drill-down</a:t>
-            </a:r>
-            <a:r>
-              <a:rPr lang="pt-BR" sz="1200" b="0" noProof="0" dirty="0">
-                <a:solidFill>
-                  <a:srgbClr val="0F1B2E"/>
-                </a:solidFill>
-                <a:latin typeface="Segoe UI"/>
-              </a:rPr>
-              <a:t> por </a:t>
-            </a:r>
-            <a:r>
-              <a:rPr lang="pt-BR" sz="1200" b="0" noProof="0" dirty="0" err="1">
-                <a:solidFill>
-                  <a:srgbClr val="0F1B2E"/>
-                </a:solidFill>
-                <a:latin typeface="Segoe UI"/>
-              </a:rPr>
-              <a:t>mes</a:t>
-            </a:r>
-            <a:r>
-              <a:rPr lang="pt-BR" sz="1200" b="0" noProof="0" dirty="0">
-                <a:solidFill>
-                  <a:srgbClr val="0F1B2E"/>
-                </a:solidFill>
-                <a:latin typeface="Segoe UI"/>
-              </a:rPr>
-              <a:t> e </a:t>
-            </a:r>
-            <a:r>
-              <a:rPr lang="pt-BR" sz="1200" b="0" noProof="0" dirty="0" err="1">
-                <a:solidFill>
-                  <a:srgbClr val="0F1B2E"/>
-                </a:solidFill>
-                <a:latin typeface="Segoe UI"/>
-              </a:rPr>
-              <a:t>Visao</a:t>
-            </a:r>
-            <a:r>
-              <a:rPr lang="pt-BR" sz="1200" b="0" noProof="0" dirty="0">
-                <a:solidFill>
-                  <a:srgbClr val="0F1B2E"/>
-                </a:solidFill>
-                <a:latin typeface="Segoe UI"/>
-              </a:rPr>
-              <a:t> 360 do indicador</a:t>
+              <a:t>Drill-down por mês e Visão 360 do indicador</a:t>
             </a:r>
           </a:p>
           <a:p>
@@ -22376,8 +20097,8 @@
         </p:nvSpPr>
         <p:spPr>
           <a:xfrm>
-            <a:off x="4572000" y="1783080"/>
-            <a:ext cx="3044952" cy="658368"/>
+            <a:off x="4572000" y="2004542"/>
+            <a:ext cx="3044952" cy="215444"/>
           </a:xfrm>
           <a:prstGeom prst="rect">
             <a:avLst/>
@@ -22408,23 +20129,8 @@
                 </a:solidFill>
                 <a:latin typeface="Segoe UI Semibold"/>
               </a:rPr>
-              <a:t>Analise &amp; </a:t>
-            </a:r>
-            <a:r>
-              <a:rPr lang="pt-BR" sz="1400" b="1" noProof="0" dirty="0" err="1">
-                <a:solidFill>
-                  <a:srgbClr val="FFFFFF"/>
-                </a:solidFill>
-                <a:latin typeface="Segoe UI Semibold"/>
-              </a:rPr>
-              <a:t>Acao</a:t>
-            </a:r>
-            <a:endParaRPr lang="pt-BR" sz="1400" b="1" noProof="0" dirty="0">
-              <a:solidFill>
-                <a:srgbClr val="FFFFFF"/>
-              </a:solidFill>
-              <a:latin typeface="Segoe UI Semibold"/>
-            </a:endParaRPr>
+              <a:t>Analise &amp; Ação</a:t>
+            </a:r>
           </a:p>
         </p:txBody>
       </p:sp>
@@ -22437,7 +20143,7 @@
         <p:spPr>
           <a:xfrm>
             <a:off x="4599432" y="2651760"/>
-            <a:ext cx="2999232" cy="3337560"/>
+            <a:ext cx="2999232" cy="1341136"/>
           </a:xfrm>
           <a:prstGeom prst="rect">
             <a:avLst/>
@@ -22508,23 +20214,39 @@
                 </a:solidFill>
                 <a:latin typeface="Segoe UI"/>
               </a:rPr>
-              <a:t>Ishikawa, PDCA, 5W2H e 5 </a:t>
-            </a:r>
-            <a:r>
-              <a:rPr lang="pt-BR" sz="1200" b="0" noProof="0" dirty="0" err="1">
+              <a:t>Ishikawa, PDCA, 5W2H e 5 Porquês</a:t>
+            </a:r>
+          </a:p>
+          <a:p>
+            <a:pPr algn="l">
+              <a:lnSpc>
+                <a:spcPct val="108000"/>
+              </a:lnSpc>
+              <a:spcBef>
+                <a:spcPts val="0"/>
+              </a:spcBef>
+              <a:spcAft>
+                <a:spcPts val="700"/>
+              </a:spcAft>
+            </a:pPr>
+            <a:r>
+              <a:rPr lang="pt-BR" sz="1200" b="1" noProof="0" dirty="0">
+                <a:solidFill>
+                  <a:srgbClr val="14B8A6"/>
+                </a:solidFill>
+                <a:latin typeface="Segoe UI"/>
+              </a:rPr>
+              <a:t>•  </a:t>
+            </a:r>
+            <a:r>
+              <a:rPr lang="pt-BR" sz="1200" b="0" noProof="0" dirty="0">
                 <a:solidFill>
                   <a:srgbClr val="0F1B2E"/>
                 </a:solidFill>
                 <a:latin typeface="Segoe UI"/>
               </a:rPr>
-              <a:t>Porques</a:t>
-            </a:r>
-            <a:endParaRPr lang="pt-BR" sz="1200" b="0" noProof="0" dirty="0">
-              <a:solidFill>
-                <a:srgbClr val="0F1B2E"/>
-              </a:solidFill>
-              <a:latin typeface="Segoe UI"/>
-            </a:endParaRPr>
+              <a:t>Planos de ação e tratamento</a:t>
+            </a:r>
           </a:p>
           <a:p>
             <a:pPr algn="l">
@@ -22554,120 +20276,38 @@
                 </a:solidFill>
                 <a:latin typeface="Segoe UI"/>
               </a:rPr>
-              <a:t>Planos de </a:t>
-            </a:r>
-            <a:r>
-              <a:rPr lang="pt-BR" sz="1200" b="0" noProof="0" dirty="0" err="1">
+              <a:t>Verificação de eficácia</a:t>
+            </a:r>
+          </a:p>
+          <a:p>
+            <a:pPr algn="l">
+              <a:lnSpc>
+                <a:spcPct val="108000"/>
+              </a:lnSpc>
+              <a:spcBef>
+                <a:spcPts val="0"/>
+              </a:spcBef>
+              <a:spcAft>
+                <a:spcPts val="700"/>
+              </a:spcAft>
+            </a:pPr>
+            <a:r>
+              <a:rPr lang="pt-BR" sz="1200" b="1" noProof="0" dirty="0">
+                <a:solidFill>
+                  <a:srgbClr val="14B8A6"/>
+                </a:solidFill>
+                <a:latin typeface="Segoe UI"/>
+              </a:rPr>
+              <a:t>•  </a:t>
+            </a:r>
+            <a:r>
+              <a:rPr lang="pt-BR" sz="1200" b="0" noProof="0" dirty="0">
                 <a:solidFill>
                   <a:srgbClr val="0F1B2E"/>
                 </a:solidFill>
                 <a:latin typeface="Segoe UI"/>
               </a:rPr>
-              <a:t>acao</a:t>
-            </a:r>
-            <a:r>
-              <a:rPr lang="pt-BR" sz="1200" b="0" noProof="0" dirty="0">
-                <a:solidFill>
-                  <a:srgbClr val="0F1B2E"/>
-                </a:solidFill>
-                <a:latin typeface="Segoe UI"/>
-              </a:rPr>
-              <a:t> e tratamento</a:t>
-            </a:r>
-          </a:p>
-          <a:p>
-            <a:pPr algn="l">
-              <a:lnSpc>
-                <a:spcPct val="108000"/>
-              </a:lnSpc>
-              <a:spcBef>
-                <a:spcPts val="0"/>
-              </a:spcBef>
-              <a:spcAft>
-                <a:spcPts val="700"/>
-              </a:spcAft>
-            </a:pPr>
-            <a:r>
-              <a:rPr lang="pt-BR" sz="1200" b="1" noProof="0" dirty="0">
-                <a:solidFill>
-                  <a:srgbClr val="14B8A6"/>
-                </a:solidFill>
-                <a:latin typeface="Segoe UI"/>
-              </a:rPr>
-              <a:t>•  </a:t>
-            </a:r>
-            <a:r>
-              <a:rPr lang="pt-BR" sz="1200" b="0" noProof="0" dirty="0" err="1">
-                <a:solidFill>
-                  <a:srgbClr val="0F1B2E"/>
-                </a:solidFill>
-                <a:latin typeface="Segoe UI"/>
-              </a:rPr>
-              <a:t>Verificacao</a:t>
-            </a:r>
-            <a:r>
-              <a:rPr lang="pt-BR" sz="1200" b="0" noProof="0" dirty="0">
-                <a:solidFill>
-                  <a:srgbClr val="0F1B2E"/>
-                </a:solidFill>
-                <a:latin typeface="Segoe UI"/>
-              </a:rPr>
-              <a:t> de </a:t>
-            </a:r>
-            <a:r>
-              <a:rPr lang="pt-BR" sz="1200" b="0" noProof="0" dirty="0" err="1">
-                <a:solidFill>
-                  <a:srgbClr val="0F1B2E"/>
-                </a:solidFill>
-                <a:latin typeface="Segoe UI"/>
-              </a:rPr>
-              <a:t>eficacia</a:t>
-            </a:r>
-            <a:endParaRPr lang="pt-BR" sz="1200" b="0" noProof="0" dirty="0">
-              <a:solidFill>
-                <a:srgbClr val="0F1B2E"/>
-              </a:solidFill>
-              <a:latin typeface="Segoe UI"/>
-            </a:endParaRPr>
-          </a:p>
-          <a:p>
-            <a:pPr algn="l">
-              <a:lnSpc>
-                <a:spcPct val="108000"/>
-              </a:lnSpc>
-              <a:spcBef>
-                <a:spcPts val="0"/>
-              </a:spcBef>
-              <a:spcAft>
-                <a:spcPts val="700"/>
-              </a:spcAft>
-            </a:pPr>
-            <a:r>
-              <a:rPr lang="pt-BR" sz="1200" b="1" noProof="0" dirty="0">
-                <a:solidFill>
-                  <a:srgbClr val="14B8A6"/>
-                </a:solidFill>
-                <a:latin typeface="Segoe UI"/>
-              </a:rPr>
-              <a:t>•  </a:t>
-            </a:r>
-            <a:r>
-              <a:rPr lang="pt-BR" sz="1200" b="0" noProof="0" dirty="0" err="1">
-                <a:solidFill>
-                  <a:srgbClr val="0F1B2E"/>
-                </a:solidFill>
-                <a:latin typeface="Segoe UI"/>
-              </a:rPr>
-              <a:t>Importacao</a:t>
-            </a:r>
-            <a:r>
-              <a:rPr lang="pt-BR" sz="1200" b="0" noProof="0" dirty="0">
-                <a:solidFill>
-                  <a:srgbClr val="0F1B2E"/>
-                </a:solidFill>
-                <a:latin typeface="Segoe UI"/>
-              </a:rPr>
-              <a:t> de dados em lote</a:t>
+              <a:t>Importação de dados em lote</a:t>
             </a:r>
           </a:p>
         </p:txBody>
@@ -22825,8 +20465,8 @@
         </p:nvSpPr>
         <p:spPr>
           <a:xfrm>
-            <a:off x="8275320" y="1783080"/>
-            <a:ext cx="3044952" cy="658368"/>
+            <a:off x="8275320" y="2004542"/>
+            <a:ext cx="3044952" cy="215444"/>
           </a:xfrm>
           <a:prstGeom prst="rect">
             <a:avLst/>
@@ -22851,38 +20491,14 @@
               </a:spcAft>
             </a:pPr>
             <a:r>
-              <a:rPr lang="pt-BR" sz="1400" b="1" noProof="0" dirty="0" err="1">
+              <a:rPr lang="pt-BR" sz="1400" b="1" noProof="0" dirty="0">
                 <a:solidFill>
                   <a:srgbClr val="FFFFFF"/>
                 </a:solidFill>
                 <a:latin typeface="Segoe UI Semibold"/>
               </a:rPr>
-              <a:t>Governanca</a:t>
-            </a:r>
-            <a:r>
-              <a:rPr lang="pt-BR" sz="1400" b="1" noProof="0" dirty="0">
-                <a:solidFill>
-                  <a:srgbClr val="FFFFFF"/>
-                </a:solidFill>
-                <a:latin typeface="Segoe UI Semibold"/>
-              </a:rPr>
-              <a:t> </a:t>
-            </a:r>
-            <a:r>
-              <a:rPr lang="pt-BR" sz="1400" b="1" noProof="0" dirty="0" err="1">
-                <a:solidFill>
-                  <a:srgbClr val="FFFFFF"/>
-                </a:solidFill>
-                <a:latin typeface="Segoe UI Semibold"/>
-              </a:rPr>
-              <a:t>estrategica</a:t>
-            </a:r>
-            <a:endParaRPr lang="pt-BR" sz="1400" b="1" noProof="0" dirty="0">
-              <a:solidFill>
-                <a:srgbClr val="FFFFFF"/>
-              </a:solidFill>
-              <a:latin typeface="Segoe UI Semibold"/>
-            </a:endParaRPr>
+              <a:t>Governança estratégica</a:t>
+            </a:r>
           </a:p>
         </p:txBody>
       </p:sp>
@@ -22895,7 +20511,7 @@
         <p:spPr>
           <a:xfrm>
             <a:off x="8302752" y="2651760"/>
-            <a:ext cx="2999232" cy="3337560"/>
+            <a:ext cx="2999232" cy="1341136"/>
           </a:xfrm>
           <a:prstGeom prst="rect">
             <a:avLst/>
@@ -22935,16 +20551,60 @@
                 </a:solidFill>
                 <a:latin typeface="Segoe UI"/>
               </a:rPr>
-              <a:t>OKR e </a:t>
-            </a:r>
-            <a:r>
-              <a:rPr lang="pt-BR" sz="1200" b="0" noProof="0" dirty="0" err="1">
+              <a:t>OKR e Balanced Scorecard (BSC)</a:t>
+            </a:r>
+          </a:p>
+          <a:p>
+            <a:pPr algn="l">
+              <a:lnSpc>
+                <a:spcPct val="108000"/>
+              </a:lnSpc>
+              <a:spcBef>
+                <a:spcPts val="0"/>
+              </a:spcBef>
+              <a:spcAft>
+                <a:spcPts val="700"/>
+              </a:spcAft>
+            </a:pPr>
+            <a:r>
+              <a:rPr lang="pt-BR" sz="1200" b="1" noProof="0" dirty="0">
+                <a:solidFill>
+                  <a:srgbClr val="102A54"/>
+                </a:solidFill>
+                <a:latin typeface="Segoe UI"/>
+              </a:rPr>
+              <a:t>•  </a:t>
+            </a:r>
+            <a:r>
+              <a:rPr lang="pt-BR" sz="1200" b="0" noProof="0" dirty="0">
                 <a:solidFill>
                   <a:srgbClr val="0F1B2E"/>
                 </a:solidFill>
                 <a:latin typeface="Segoe UI"/>
               </a:rPr>
-              <a:t>Balanced</a:t>
+              <a:t>Organograma e estrutura organizacional</a:t>
+            </a:r>
+          </a:p>
+          <a:p>
+            <a:pPr algn="l">
+              <a:lnSpc>
+                <a:spcPct val="108000"/>
+              </a:lnSpc>
+              <a:spcBef>
+                <a:spcPts val="0"/>
+              </a:spcBef>
+              <a:spcAft>
+                <a:spcPts val="700"/>
+              </a:spcAft>
+            </a:pPr>
+            <a:r>
+              <a:rPr lang="pt-BR" sz="1200" b="1" noProof="0" dirty="0">
+                <a:solidFill>
+                  <a:srgbClr val="102A54"/>
+                </a:solidFill>
+                <a:latin typeface="Segoe UI"/>
+              </a:rPr>
+              <a:t>•  </a:t>
             </a:r>
             <a:r>
               <a:rPr lang="pt-BR" sz="1200" b="0" noProof="0" dirty="0">
@@ -22953,7 +20613,7 @@
                 </a:solidFill>
                 <a:latin typeface="Segoe UI"/>
               </a:rPr>
-              <a:t> Scorecard (BSC)</a:t>
+              <a:t>Reunião Mensal de Resultados</a:t>
             </a:r>
           </a:p>
           <a:p>
@@ -22984,7 +20644,7 @@
                 </a:solidFill>
                 <a:latin typeface="Segoe UI"/>
               </a:rPr>
-              <a:t>Organograma e estrutura organizacional</a:t>
+              <a:t>Workspace da reunião + apresentação</a:t>
             </a:r>
           </a:p>
           <a:p>
@@ -23009,135 +20669,13 @@
               <a:t>•  </a:t>
             </a:r>
             <a:r>
-              <a:rPr lang="pt-BR" sz="1200" b="0" noProof="0" dirty="0" err="1">
+              <a:rPr lang="pt-BR" sz="1200" b="0" noProof="0" dirty="0">
                 <a:solidFill>
                   <a:srgbClr val="0F1B2E"/>
                 </a:solidFill>
                 <a:latin typeface="Segoe UI"/>
               </a:rPr>
-              <a:t>Reuniao</a:t>
-            </a:r>
-            <a:r>
-              <a:rPr lang="pt-BR" sz="1200" b="0" noProof="0" dirty="0">
-                <a:solidFill>
-                  <a:srgbClr val="0F1B2E"/>
-                </a:solidFill>
-                <a:latin typeface="Segoe UI"/>
-              </a:rPr>
-              <a:t> Mensal de Resultados</a:t>
-            </a:r>
-          </a:p>
-          <a:p>
-            <a:pPr algn="l">
-              <a:lnSpc>
-                <a:spcPct val="108000"/>
-              </a:lnSpc>
-              <a:spcBef>
-                <a:spcPts val="0"/>
-              </a:spcBef>
-              <a:spcAft>
-                <a:spcPts val="700"/>
-              </a:spcAft>
-            </a:pPr>
-            <a:r>
-              <a:rPr lang="pt-BR" sz="1200" b="1" noProof="0" dirty="0">
-                <a:solidFill>
-                  <a:srgbClr val="102A54"/>
-                </a:solidFill>
-                <a:latin typeface="Segoe UI"/>
-              </a:rPr>
-              <a:t>•  </a:t>
-            </a:r>
-            <a:r>
-              <a:rPr lang="pt-BR" sz="1200" b="0" noProof="0" dirty="0" err="1">
-                <a:solidFill>
-                  <a:srgbClr val="0F1B2E"/>
-                </a:solidFill>
-                <a:latin typeface="Segoe UI"/>
-              </a:rPr>
-              <a:t>Workspace</a:t>
-            </a:r>
-            <a:r>
-              <a:rPr lang="pt-BR" sz="1200" b="0" noProof="0" dirty="0">
-                <a:solidFill>
-                  <a:srgbClr val="0F1B2E"/>
-                </a:solidFill>
-                <a:latin typeface="Segoe UI"/>
-              </a:rPr>
-              <a:t> da </a:t>
-            </a:r>
-            <a:r>
-              <a:rPr lang="pt-BR" sz="1200" b="0" noProof="0" dirty="0" err="1">
-                <a:solidFill>
-                  <a:srgbClr val="0F1B2E"/>
-                </a:solidFill>
-                <a:latin typeface="Segoe UI"/>
-              </a:rPr>
-              <a:t>reuniao</a:t>
-            </a:r>
-            <a:r>
-              <a:rPr lang="pt-BR" sz="1200" b="0" noProof="0" dirty="0">
-                <a:solidFill>
-                  <a:srgbClr val="0F1B2E"/>
-                </a:solidFill>
-                <a:latin typeface="Segoe UI"/>
-              </a:rPr>
-              <a:t> + </a:t>
-            </a:r>
-            <a:r>
-              <a:rPr lang="pt-BR" sz="1200" b="0" noProof="0" dirty="0" err="1">
-                <a:solidFill>
-                  <a:srgbClr val="0F1B2E"/>
-                </a:solidFill>
-                <a:latin typeface="Segoe UI"/>
-              </a:rPr>
-              <a:t>apresentacao</a:t>
-            </a:r>
-            <a:endParaRPr lang="pt-BR" sz="1200" b="0" noProof="0" dirty="0">
-              <a:solidFill>
-                <a:srgbClr val="0F1B2E"/>
-              </a:solidFill>
-              <a:latin typeface="Segoe UI"/>
-            </a:endParaRPr>
-          </a:p>
-          <a:p>
-            <a:pPr algn="l">
-              <a:lnSpc>
-                <a:spcPct val="108000"/>
-              </a:lnSpc>
-              <a:spcBef>
-                <a:spcPts val="0"/>
-              </a:spcBef>
-              <a:spcAft>
-                <a:spcPts val="700"/>
-              </a:spcAft>
-            </a:pPr>
-            <a:r>
-              <a:rPr lang="pt-BR" sz="1200" b="1" noProof="0" dirty="0">
-                <a:solidFill>
-                  <a:srgbClr val="102A54"/>
-                </a:solidFill>
-                <a:latin typeface="Segoe UI"/>
-              </a:rPr>
-              <a:t>•  </a:t>
-            </a:r>
-            <a:r>
-              <a:rPr lang="pt-BR" sz="1200" b="0" noProof="0" dirty="0" err="1">
-                <a:solidFill>
-                  <a:srgbClr val="0F1B2E"/>
-                </a:solidFill>
-                <a:latin typeface="Segoe UI"/>
-              </a:rPr>
-              <a:t>Exports</a:t>
-            </a:r>
-            <a:r>
-              <a:rPr lang="pt-BR" sz="1200" b="0" noProof="0" dirty="0">
-                <a:solidFill>
-                  <a:srgbClr val="0F1B2E"/>
-                </a:solidFill>
-                <a:latin typeface="Segoe UI"/>
-              </a:rPr>
-              <a:t> executivos (PDF/imagem)</a:t>
+              <a:t>Exports executivos (PDF/imagem)</a:t>
             </a:r>
           </a:p>
         </p:txBody>
@@ -23274,7 +20812,7 @@
         <p:spPr>
           <a:xfrm>
             <a:off x="640080" y="868680"/>
-            <a:ext cx="10789920" cy="822960"/>
+            <a:ext cx="10789920" cy="492443"/>
           </a:xfrm>
           <a:prstGeom prst="rect">
             <a:avLst/>
@@ -23305,94 +20843,7 @@
                 </a:solidFill>
                 <a:latin typeface="Segoe UI Semibold"/>
               </a:rPr>
-              <a:t>Qualidade, Compliance e </a:t>
-            </a:r>
-            <a:r>
-              <a:rPr lang="pt-BR" sz="3200" b="1" noProof="0" dirty="0" err="1">
-                <a:solidFill>
-                  <a:srgbClr val="0F1B2E"/>
-                </a:solidFill>
-                <a:latin typeface="Segoe UI Semibold"/>
-              </a:rPr>
-              <a:t>Comunicacao</a:t>
-            </a:r>
-            <a:endParaRPr lang="pt-BR" sz="3200" b="1" noProof="0" dirty="0">
-              <a:solidFill>
-                <a:srgbClr val="0F1B2E"/>
-              </a:solidFill>
-              <a:latin typeface="Segoe UI Semibold"/>
-            </a:endParaRPr>
-          </a:p>
-        </p:txBody>
-      </p:sp>
-      <p:sp>
-        <p:nvSpPr>
-          <p:cNvPr id="5" name="TextBox 4"/>
-          <p:cNvSpPr txBox="1"/>
-          <p:nvPr/>
-        </p:nvSpPr>
-        <p:spPr>
-          <a:xfrm>
-            <a:off x="502920" y="6446520"/>
-            <a:ext cx="5486400" cy="320040"/>
-          </a:xfrm>
-          <a:prstGeom prst="rect">
-            <a:avLst/>
-          </a:prstGeom>
-          <a:noFill/>
-        </p:spPr>
-        <p:txBody>
-          <a:bodyPr wrap="square" lIns="0" tIns="0" rIns="0" bIns="0" anchor="t">
-            <a:spAutoFit/>
-          </a:bodyPr>
-          <a:lstStyle/>
-          <a:p>
-            <a:pPr algn="l">
-              <a:lnSpc>
-                <a:spcPct val="100000"/>
-              </a:lnSpc>
-              <a:spcBef>
-                <a:spcPts val="0"/>
-              </a:spcBef>
-              <a:spcAft>
-                <a:spcPts val="400"/>
-              </a:spcAft>
-            </a:pPr>
-            <a:r>
-              <a:rPr lang="pt-BR" sz="900" b="1" noProof="0" dirty="0">
-                <a:solidFill>
-                  <a:srgbClr val="2B5CE6"/>
-                </a:solidFill>
-                <a:latin typeface="Segoe UI"/>
-              </a:rPr>
-              <a:t>GESTAO 360</a:t>
-            </a:r>
-            <a:r>
-              <a:rPr lang="pt-BR" sz="900" b="0" noProof="0" dirty="0">
-                <a:solidFill>
-                  <a:srgbClr val="5B6B82"/>
-                </a:solidFill>
-                <a:latin typeface="Segoe UI"/>
-              </a:rPr>
-              <a:t>   •   Plataforma corporativa de </a:t>
-            </a:r>
-            <a:r>
-              <a:rPr lang="pt-BR" sz="900" b="0" noProof="0" dirty="0" err="1">
-                <a:solidFill>
-                  <a:srgbClr val="5B6B82"/>
-                </a:solidFill>
-                <a:latin typeface="Segoe UI"/>
-              </a:rPr>
-              <a:t>gestao</a:t>
-            </a:r>
-            <a:r>
-              <a:rPr lang="pt-BR" sz="900" b="0" noProof="0" dirty="0">
-                <a:solidFill>
-                  <a:srgbClr val="5B6B82"/>
-                </a:solidFill>
-                <a:latin typeface="Segoe UI"/>
-              </a:rPr>
-              <a:t>   •   gestao360.org</a:t>
+              <a:t>Qualidade, Compliance e Comunicação</a:t>
             </a:r>
           </a:p>
         </p:txBody>
@@ -23641,7 +21092,7 @@
         <p:spPr>
           <a:xfrm>
             <a:off x="896112" y="2651760"/>
-            <a:ext cx="2999232" cy="3337560"/>
+            <a:ext cx="2999232" cy="1341136"/>
           </a:xfrm>
           <a:prstGeom prst="rect">
             <a:avLst/>
@@ -23706,13 +21157,35 @@
               <a:t>•  </a:t>
             </a:r>
             <a:r>
-              <a:rPr lang="pt-BR" sz="1200" b="0" noProof="0" dirty="0" err="1">
+              <a:rPr lang="pt-BR" sz="1200" b="0" noProof="0" dirty="0">
                 <a:solidFill>
                   <a:srgbClr val="0F1B2E"/>
                 </a:solidFill>
                 <a:latin typeface="Segoe UI"/>
               </a:rPr>
-              <a:t>Nao</a:t>
+              <a:t>Não conformidades (NC)</a:t>
+            </a:r>
+          </a:p>
+          <a:p>
+            <a:pPr algn="l">
+              <a:lnSpc>
+                <a:spcPct val="108000"/>
+              </a:lnSpc>
+              <a:spcBef>
+                <a:spcPts val="0"/>
+              </a:spcBef>
+              <a:spcAft>
+                <a:spcPts val="700"/>
+              </a:spcAft>
+            </a:pPr>
+            <a:r>
+              <a:rPr lang="pt-BR" sz="1200" b="1" noProof="0" dirty="0">
+                <a:solidFill>
+                  <a:srgbClr val="2B5CE6"/>
+                </a:solidFill>
+                <a:latin typeface="Segoe UI"/>
+              </a:rPr>
+              <a:t>•  </a:t>
             </a:r>
             <a:r>
               <a:rPr lang="pt-BR" sz="1200" b="0" noProof="0" dirty="0">
@@ -23721,54 +21194,8 @@
                 </a:solidFill>
                 <a:latin typeface="Segoe UI"/>
               </a:rPr>
-              <a:t> conformidades (NC)</a:t>
-            </a:r>
-          </a:p>
-          <a:p>
-            <a:pPr algn="l">
-              <a:lnSpc>
-                <a:spcPct val="108000"/>
-              </a:lnSpc>
-              <a:spcBef>
-                <a:spcPts val="0"/>
-              </a:spcBef>
-              <a:spcAft>
-                <a:spcPts val="700"/>
-              </a:spcAft>
-            </a:pPr>
-            <a:r>
-              <a:rPr lang="pt-BR" sz="1200" b="1" noProof="0" dirty="0">
-                <a:solidFill>
-                  <a:srgbClr val="2B5CE6"/>
-                </a:solidFill>
-                <a:latin typeface="Segoe UI"/>
-              </a:rPr>
-              <a:t>•  </a:t>
-            </a:r>
-            <a:r>
-              <a:rPr lang="pt-BR" sz="1200" b="0" noProof="0" dirty="0">
-                <a:solidFill>
-                  <a:srgbClr val="0F1B2E"/>
-                </a:solidFill>
-                <a:latin typeface="Segoe UI"/>
-              </a:rPr>
-              <a:t>Checklist que gera NC </a:t>
-            </a:r>
-            <a:r>
-              <a:rPr lang="pt-BR" sz="1200" b="0" noProof="0" dirty="0" err="1">
-                <a:solidFill>
-                  <a:srgbClr val="0F1B2E"/>
-                </a:solidFill>
-                <a:latin typeface="Segoe UI"/>
-              </a:rPr>
-              <a:t>automatica</a:t>
-            </a:r>
-            <a:endParaRPr lang="pt-BR" sz="1200" b="0" noProof="0" dirty="0">
-              <a:solidFill>
-                <a:srgbClr val="0F1B2E"/>
-              </a:solidFill>
-              <a:latin typeface="Segoe UI"/>
-            </a:endParaRPr>
+              <a:t>Checklist que gera NC automática</a:t>
+            </a:r>
           </a:p>
           <a:p>
             <a:pPr algn="l">
@@ -24033,7 +21460,7 @@
         <p:spPr>
           <a:xfrm>
             <a:off x="4599432" y="2651760"/>
-            <a:ext cx="2999232" cy="3337560"/>
+            <a:ext cx="2999232" cy="1341136"/>
           </a:xfrm>
           <a:prstGeom prst="rect">
             <a:avLst/>
@@ -24073,16 +21500,60 @@
                 </a:solidFill>
                 <a:latin typeface="Segoe UI"/>
               </a:rPr>
-              <a:t>GED com editor DOCX online (</a:t>
-            </a:r>
-            <a:r>
-              <a:rPr lang="pt-BR" sz="1200" b="0" noProof="0" dirty="0" err="1">
+              <a:t>GED com editor DOCX online (Collabora)</a:t>
+            </a:r>
+          </a:p>
+          <a:p>
+            <a:pPr algn="l">
+              <a:lnSpc>
+                <a:spcPct val="108000"/>
+              </a:lnSpc>
+              <a:spcBef>
+                <a:spcPts val="0"/>
+              </a:spcBef>
+              <a:spcAft>
+                <a:spcPts val="700"/>
+              </a:spcAft>
+            </a:pPr>
+            <a:r>
+              <a:rPr lang="pt-BR" sz="1200" b="1" noProof="0" dirty="0">
+                <a:solidFill>
+                  <a:srgbClr val="14B8A6"/>
+                </a:solidFill>
+                <a:latin typeface="Segoe UI"/>
+              </a:rPr>
+              <a:t>•  </a:t>
+            </a:r>
+            <a:r>
+              <a:rPr lang="pt-BR" sz="1200" b="0" noProof="0" dirty="0">
                 <a:solidFill>
                   <a:srgbClr val="0F1B2E"/>
                 </a:solidFill>
                 <a:latin typeface="Segoe UI"/>
               </a:rPr>
-              <a:t>Collabora</a:t>
+              <a:t>Galeria de modelos e publicação em PDF</a:t>
+            </a:r>
+          </a:p>
+          <a:p>
+            <a:pPr algn="l">
+              <a:lnSpc>
+                <a:spcPct val="108000"/>
+              </a:lnSpc>
+              <a:spcBef>
+                <a:spcPts val="0"/>
+              </a:spcBef>
+              <a:spcAft>
+                <a:spcPts val="700"/>
+              </a:spcAft>
+            </a:pPr>
+            <a:r>
+              <a:rPr lang="pt-BR" sz="1200" b="1" noProof="0" dirty="0">
+                <a:solidFill>
+                  <a:srgbClr val="14B8A6"/>
+                </a:solidFill>
+                <a:latin typeface="Segoe UI"/>
+              </a:rPr>
+              <a:t>•  </a:t>
             </a:r>
             <a:r>
               <a:rPr lang="pt-BR" sz="1200" b="0" noProof="0" dirty="0">
@@ -24091,7 +21562,7 @@
                 </a:solidFill>
                 <a:latin typeface="Segoe UI"/>
               </a:rPr>
-              <a:t>)</a:t>
+              <a:t>Versionamento e explorador ECM</a:t>
             </a:r>
           </a:p>
           <a:p>
@@ -24122,152 +21593,39 @@
                 </a:solidFill>
                 <a:latin typeface="Segoe UI"/>
               </a:rPr>
-              <a:t>Galeria de modelos e </a:t>
-            </a:r>
-            <a:r>
-              <a:rPr lang="pt-BR" sz="1200" b="0" noProof="0" dirty="0" err="1">
+              <a:t>Mapeamento de processos</a:t>
+            </a:r>
+          </a:p>
+          <a:p>
+            <a:pPr algn="l">
+              <a:lnSpc>
+                <a:spcPct val="108000"/>
+              </a:lnSpc>
+              <a:spcBef>
+                <a:spcPts val="0"/>
+              </a:spcBef>
+              <a:spcAft>
+                <a:spcPts val="700"/>
+              </a:spcAft>
+            </a:pPr>
+            <a:r>
+              <a:rPr lang="pt-BR" sz="1200" b="1" noProof="0" dirty="0">
+                <a:solidFill>
+                  <a:srgbClr val="14B8A6"/>
+                </a:solidFill>
+                <a:latin typeface="Segoe UI"/>
+              </a:rPr>
+              <a:t>•  </a:t>
+            </a:r>
+            <a:r>
+              <a:rPr lang="pt-BR" sz="1200" b="0" noProof="0" dirty="0">
                 <a:solidFill>
                   <a:srgbClr val="0F1B2E"/>
                 </a:solidFill>
                 <a:latin typeface="Segoe UI"/>
               </a:rPr>
-              <a:t>publicacao</a:t>
-            </a:r>
-            <a:r>
-              <a:rPr lang="pt-BR" sz="1200" b="0" noProof="0" dirty="0">
-                <a:solidFill>
-                  <a:srgbClr val="0F1B2E"/>
-                </a:solidFill>
-                <a:latin typeface="Segoe UI"/>
-              </a:rPr>
-              <a:t> em PDF</a:t>
-            </a:r>
-          </a:p>
-          <a:p>
-            <a:pPr algn="l">
-              <a:lnSpc>
-                <a:spcPct val="108000"/>
-              </a:lnSpc>
-              <a:spcBef>
-                <a:spcPts val="0"/>
-              </a:spcBef>
-              <a:spcAft>
-                <a:spcPts val="700"/>
-              </a:spcAft>
-            </a:pPr>
-            <a:r>
-              <a:rPr lang="pt-BR" sz="1200" b="1" noProof="0" dirty="0">
-                <a:solidFill>
-                  <a:srgbClr val="14B8A6"/>
-                </a:solidFill>
-                <a:latin typeface="Segoe UI"/>
-              </a:rPr>
-              <a:t>•  </a:t>
-            </a:r>
-            <a:r>
-              <a:rPr lang="pt-BR" sz="1200" b="0" noProof="0" dirty="0">
-                <a:solidFill>
-                  <a:srgbClr val="0F1B2E"/>
-                </a:solidFill>
-                <a:latin typeface="Segoe UI"/>
-              </a:rPr>
-              <a:t>Versionamento e explorador ECM</a:t>
-            </a:r>
-          </a:p>
-          <a:p>
-            <a:pPr algn="l">
-              <a:lnSpc>
-                <a:spcPct val="108000"/>
-              </a:lnSpc>
-              <a:spcBef>
-                <a:spcPts val="0"/>
-              </a:spcBef>
-              <a:spcAft>
-                <a:spcPts val="700"/>
-              </a:spcAft>
-            </a:pPr>
-            <a:r>
-              <a:rPr lang="pt-BR" sz="1200" b="1" noProof="0" dirty="0">
-                <a:solidFill>
-                  <a:srgbClr val="14B8A6"/>
-                </a:solidFill>
-                <a:latin typeface="Segoe UI"/>
-              </a:rPr>
-              <a:t>•  </a:t>
-            </a:r>
-            <a:r>
-              <a:rPr lang="pt-BR" sz="1200" b="0" noProof="0" dirty="0">
-                <a:solidFill>
-                  <a:srgbClr val="0F1B2E"/>
-                </a:solidFill>
-                <a:latin typeface="Segoe UI"/>
-              </a:rPr>
-              <a:t>Mapeamento de processos</a:t>
-            </a:r>
-          </a:p>
-          <a:p>
-            <a:pPr algn="l">
-              <a:lnSpc>
-                <a:spcPct val="108000"/>
-              </a:lnSpc>
-              <a:spcBef>
-                <a:spcPts val="0"/>
-              </a:spcBef>
-              <a:spcAft>
-                <a:spcPts val="700"/>
-              </a:spcAft>
-            </a:pPr>
-            <a:r>
-              <a:rPr lang="pt-BR" sz="1200" b="1" noProof="0" dirty="0">
-                <a:solidFill>
-                  <a:srgbClr val="14B8A6"/>
-                </a:solidFill>
-                <a:latin typeface="Segoe UI"/>
-              </a:rPr>
-              <a:t>•  </a:t>
-            </a:r>
-            <a:r>
-              <a:rPr lang="pt-BR" sz="1200" b="0" noProof="0" dirty="0">
-                <a:solidFill>
-                  <a:srgbClr val="0F1B2E"/>
-                </a:solidFill>
-                <a:latin typeface="Segoe UI"/>
-              </a:rPr>
-              <a:t>Construtor de </a:t>
-            </a:r>
-            <a:r>
-              <a:rPr lang="pt-BR" sz="1200" b="0" noProof="0" dirty="0" err="1">
-                <a:solidFill>
-                  <a:srgbClr val="0F1B2E"/>
-                </a:solidFill>
-                <a:latin typeface="Segoe UI"/>
-              </a:rPr>
-              <a:t>formularios</a:t>
-            </a:r>
-            <a:r>
-              <a:rPr lang="pt-BR" sz="1200" b="0" noProof="0" dirty="0">
-                <a:solidFill>
-                  <a:srgbClr val="0F1B2E"/>
-                </a:solidFill>
-                <a:latin typeface="Segoe UI"/>
-              </a:rPr>
-              <a:t> em </a:t>
-            </a:r>
-            <a:r>
-              <a:rPr lang="pt-BR" sz="1200" b="0" noProof="0" dirty="0" err="1">
-                <a:solidFill>
-                  <a:srgbClr val="0F1B2E"/>
-                </a:solidFill>
-                <a:latin typeface="Segoe UI"/>
-              </a:rPr>
-              <a:t>cartoes</a:t>
-            </a:r>
-            <a:endParaRPr lang="pt-BR" sz="1200" b="0" noProof="0" dirty="0">
-              <a:solidFill>
-                <a:srgbClr val="0F1B2E"/>
-              </a:solidFill>
-              <a:latin typeface="Segoe UI"/>
-            </a:endParaRPr>
+              <a:t>Construtor de formulários em cartões</a:t>
+            </a:r>
           </a:p>
         </p:txBody>
       </p:sp>
@@ -24424,8 +21782,8 @@
         </p:nvSpPr>
         <p:spPr>
           <a:xfrm>
-            <a:off x="8275320" y="1783080"/>
-            <a:ext cx="3044952" cy="658368"/>
+            <a:off x="8275320" y="2004542"/>
+            <a:ext cx="3044952" cy="215444"/>
           </a:xfrm>
           <a:prstGeom prst="rect">
             <a:avLst/>
@@ -24450,20 +21808,14 @@
               </a:spcAft>
             </a:pPr>
             <a:r>
-              <a:rPr lang="pt-BR" sz="1400" b="1" noProof="0" dirty="0" err="1">
+              <a:rPr lang="pt-BR" sz="1400" b="1" noProof="0" dirty="0">
                 <a:solidFill>
                   <a:srgbClr val="FFFFFF"/>
                 </a:solidFill>
                 <a:latin typeface="Segoe UI Semibold"/>
               </a:rPr>
-              <a:t>Comunicacao</a:t>
-            </a:r>
-            <a:endParaRPr lang="pt-BR" sz="1400" b="1" noProof="0" dirty="0">
-              <a:solidFill>
-                <a:srgbClr val="FFFFFF"/>
-              </a:solidFill>
-              <a:latin typeface="Segoe UI Semibold"/>
-            </a:endParaRPr>
+              <a:t>Comunicação</a:t>
+            </a:r>
           </a:p>
         </p:txBody>
       </p:sp>
@@ -24476,7 +21828,7 @@
         <p:spPr>
           <a:xfrm>
             <a:off x="8302752" y="2651760"/>
-            <a:ext cx="2999232" cy="3337560"/>
+            <a:ext cx="2999232" cy="1341136"/>
           </a:xfrm>
           <a:prstGeom prst="rect">
             <a:avLst/>
@@ -24578,23 +21930,39 @@
                 </a:solidFill>
                 <a:latin typeface="Segoe UI"/>
               </a:rPr>
-              <a:t>Mural e canais por </a:t>
-            </a:r>
-            <a:r>
-              <a:rPr lang="pt-BR" sz="1200" b="0" noProof="0" dirty="0" err="1">
+              <a:t>Mural e canais por área</a:t>
+            </a:r>
+          </a:p>
+          <a:p>
+            <a:pPr algn="l">
+              <a:lnSpc>
+                <a:spcPct val="108000"/>
+              </a:lnSpc>
+              <a:spcBef>
+                <a:spcPts val="0"/>
+              </a:spcBef>
+              <a:spcAft>
+                <a:spcPts val="700"/>
+              </a:spcAft>
+            </a:pPr>
+            <a:r>
+              <a:rPr lang="pt-BR" sz="1200" b="1" noProof="0" dirty="0">
+                <a:solidFill>
+                  <a:srgbClr val="102A54"/>
+                </a:solidFill>
+                <a:latin typeface="Segoe UI"/>
+              </a:rPr>
+              <a:t>•  </a:t>
+            </a:r>
+            <a:r>
+              <a:rPr lang="pt-BR" sz="1200" b="0" noProof="0" dirty="0">
                 <a:solidFill>
                   <a:srgbClr val="0F1B2E"/>
                 </a:solidFill>
                 <a:latin typeface="Segoe UI"/>
               </a:rPr>
-              <a:t>area</a:t>
-            </a:r>
-            <a:endParaRPr lang="pt-BR" sz="1200" b="0" noProof="0" dirty="0">
-              <a:solidFill>
-                <a:srgbClr val="0F1B2E"/>
-              </a:solidFill>
-              <a:latin typeface="Segoe UI"/>
-            </a:endParaRPr>
+              <a:t>Sete abas em uma única central</a:t>
+            </a:r>
           </a:p>
           <a:p>
             <a:pPr algn="l">
@@ -24624,65 +21992,7 @@
                 </a:solidFill>
                 <a:latin typeface="Segoe UI"/>
               </a:rPr>
-              <a:t>Sete abas em uma </a:t>
-            </a:r>
-            <a:r>
-              <a:rPr lang="pt-BR" sz="1200" b="0" noProof="0" dirty="0" err="1">
-                <a:solidFill>
-                  <a:srgbClr val="0F1B2E"/>
-                </a:solidFill>
-                <a:latin typeface="Segoe UI"/>
-              </a:rPr>
-              <a:t>unica</a:t>
-            </a:r>
-            <a:r>
-              <a:rPr lang="pt-BR" sz="1200" b="0" noProof="0" dirty="0">
-                <a:solidFill>
-                  <a:srgbClr val="0F1B2E"/>
-                </a:solidFill>
-                <a:latin typeface="Segoe UI"/>
-              </a:rPr>
-              <a:t> central</a:t>
-            </a:r>
-          </a:p>
-          <a:p>
-            <a:pPr algn="l">
-              <a:lnSpc>
-                <a:spcPct val="108000"/>
-              </a:lnSpc>
-              <a:spcBef>
-                <a:spcPts val="0"/>
-              </a:spcBef>
-              <a:spcAft>
-                <a:spcPts val="700"/>
-              </a:spcAft>
-            </a:pPr>
-            <a:r>
-              <a:rPr lang="pt-BR" sz="1200" b="1" noProof="0" dirty="0">
-                <a:solidFill>
-                  <a:srgbClr val="102A54"/>
-                </a:solidFill>
-                <a:latin typeface="Segoe UI"/>
-              </a:rPr>
-              <a:t>•  </a:t>
-            </a:r>
-            <a:r>
-              <a:rPr lang="pt-BR" sz="1200" b="0" noProof="0" dirty="0" err="1">
-                <a:solidFill>
-                  <a:srgbClr val="0F1B2E"/>
-                </a:solidFill>
-                <a:latin typeface="Segoe UI"/>
-              </a:rPr>
-              <a:t>Notificacoes</a:t>
-            </a:r>
-            <a:r>
-              <a:rPr lang="pt-BR" sz="1200" b="0" noProof="0" dirty="0">
-                <a:solidFill>
-                  <a:srgbClr val="0F1B2E"/>
-                </a:solidFill>
-                <a:latin typeface="Segoe UI"/>
-              </a:rPr>
-              <a:t> no Meu Dia</a:t>
+              <a:t>Notificações no Meu Dia</a:t>
             </a:r>
           </a:p>
         </p:txBody>
@@ -24819,7 +22129,7 @@
         <p:spPr>
           <a:xfrm>
             <a:off x="640080" y="868680"/>
-            <a:ext cx="10789920" cy="822960"/>
+            <a:ext cx="10789920" cy="492443"/>
           </a:xfrm>
           <a:prstGeom prst="rect">
             <a:avLst/>
@@ -24850,94 +22160,7 @@
                 </a:solidFill>
                 <a:latin typeface="Segoe UI Semibold"/>
               </a:rPr>
-              <a:t>Cargos, Equidade, Premio e </a:t>
-            </a:r>
-            <a:r>
-              <a:rPr lang="pt-BR" sz="3200" b="1" noProof="0" dirty="0" err="1">
-                <a:solidFill>
-                  <a:srgbClr val="0F1B2E"/>
-                </a:solidFill>
-                <a:latin typeface="Segoe UI Semibold"/>
-              </a:rPr>
-              <a:t>Seguranca</a:t>
-            </a:r>
-            <a:endParaRPr lang="pt-BR" sz="3200" b="1" noProof="0" dirty="0">
-              <a:solidFill>
-                <a:srgbClr val="0F1B2E"/>
-              </a:solidFill>
-              <a:latin typeface="Segoe UI Semibold"/>
-            </a:endParaRPr>
-          </a:p>
-        </p:txBody>
-      </p:sp>
-      <p:sp>
-        <p:nvSpPr>
-          <p:cNvPr id="5" name="TextBox 4"/>
-          <p:cNvSpPr txBox="1"/>
-          <p:nvPr/>
-        </p:nvSpPr>
-        <p:spPr>
-          <a:xfrm>
-            <a:off x="502920" y="6446520"/>
-            <a:ext cx="5486400" cy="320040"/>
-          </a:xfrm>
-          <a:prstGeom prst="rect">
-            <a:avLst/>
-          </a:prstGeom>
-          <a:noFill/>
-        </p:spPr>
-        <p:txBody>
-          <a:bodyPr wrap="square" lIns="0" tIns="0" rIns="0" bIns="0" anchor="t">
-            <a:spAutoFit/>
-          </a:bodyPr>
-          <a:lstStyle/>
-          <a:p>
-            <a:pPr algn="l">
-              <a:lnSpc>
-                <a:spcPct val="100000"/>
-              </a:lnSpc>
-              <a:spcBef>
-                <a:spcPts val="0"/>
-              </a:spcBef>
-              <a:spcAft>
-                <a:spcPts val="400"/>
-              </a:spcAft>
-            </a:pPr>
-            <a:r>
-              <a:rPr lang="pt-BR" sz="900" b="1" noProof="0" dirty="0">
-                <a:solidFill>
-                  <a:srgbClr val="2B5CE6"/>
-                </a:solidFill>
-                <a:latin typeface="Segoe UI"/>
-              </a:rPr>
-              <a:t>GESTAO 360</a:t>
-            </a:r>
-            <a:r>
-              <a:rPr lang="pt-BR" sz="900" b="0" noProof="0" dirty="0">
-                <a:solidFill>
-                  <a:srgbClr val="5B6B82"/>
-                </a:solidFill>
-                <a:latin typeface="Segoe UI"/>
-              </a:rPr>
-              <a:t>   •   Plataforma corporativa de </a:t>
-            </a:r>
-            <a:r>
-              <a:rPr lang="pt-BR" sz="900" b="0" noProof="0" dirty="0" err="1">
-                <a:solidFill>
-                  <a:srgbClr val="5B6B82"/>
-                </a:solidFill>
-                <a:latin typeface="Segoe UI"/>
-              </a:rPr>
-              <a:t>gestao</a:t>
-            </a:r>
-            <a:r>
-              <a:rPr lang="pt-BR" sz="900" b="0" noProof="0" dirty="0">
-                <a:solidFill>
-                  <a:srgbClr val="5B6B82"/>
-                </a:solidFill>
-                <a:latin typeface="Segoe UI"/>
-              </a:rPr>
-              <a:t>   •   gestao360.org</a:t>
+              <a:t>Cargos, Equidade, Premio e Segurança</a:t>
             </a:r>
           </a:p>
         </p:txBody>
@@ -25140,8 +22363,8 @@
         </p:nvSpPr>
         <p:spPr>
           <a:xfrm>
-            <a:off x="868680" y="1783080"/>
-            <a:ext cx="3044952" cy="658368"/>
+            <a:off x="868680" y="2004542"/>
+            <a:ext cx="3044952" cy="215444"/>
           </a:xfrm>
           <a:prstGeom prst="rect">
             <a:avLst/>
@@ -25172,23 +22395,8 @@
                 </a:solidFill>
                 <a:latin typeface="Segoe UI Semibold"/>
               </a:rPr>
-              <a:t>Cargos e </a:t>
-            </a:r>
-            <a:r>
-              <a:rPr lang="pt-BR" sz="1400" b="1" noProof="0" dirty="0" err="1">
-                <a:solidFill>
-                  <a:srgbClr val="FFFFFF"/>
-                </a:solidFill>
-                <a:latin typeface="Segoe UI Semibold"/>
-              </a:rPr>
-              <a:t>Salarios</a:t>
-            </a:r>
-            <a:endParaRPr lang="pt-BR" sz="1400" b="1" noProof="0" dirty="0">
-              <a:solidFill>
-                <a:srgbClr val="FFFFFF"/>
-              </a:solidFill>
-              <a:latin typeface="Segoe UI Semibold"/>
-            </a:endParaRPr>
+              <a:t>Cargos e Salários</a:t>
+            </a:r>
           </a:p>
         </p:txBody>
       </p:sp>
@@ -25201,7 +22409,7 @@
         <p:spPr>
           <a:xfrm>
             <a:off x="896112" y="2651760"/>
-            <a:ext cx="2999232" cy="3337560"/>
+            <a:ext cx="2999232" cy="1341136"/>
           </a:xfrm>
           <a:prstGeom prst="rect">
             <a:avLst/>
@@ -25297,13 +22505,35 @@
               <a:t>•  </a:t>
             </a:r>
             <a:r>
-              <a:rPr lang="pt-BR" sz="1200" b="0" noProof="0" dirty="0" err="1">
+              <a:rPr lang="pt-BR" sz="1200" b="0" noProof="0" dirty="0">
                 <a:solidFill>
                   <a:srgbClr val="0F1B2E"/>
                 </a:solidFill>
                 <a:latin typeface="Segoe UI"/>
               </a:rPr>
-              <a:t>Merito</a:t>
+              <a:t>Mérito com distribuição de ratings</a:t>
+            </a:r>
+          </a:p>
+          <a:p>
+            <a:pPr algn="l">
+              <a:lnSpc>
+                <a:spcPct val="108000"/>
+              </a:lnSpc>
+              <a:spcBef>
+                <a:spcPts val="0"/>
+              </a:spcBef>
+              <a:spcAft>
+                <a:spcPts val="700"/>
+              </a:spcAft>
+            </a:pPr>
+            <a:r>
+              <a:rPr lang="pt-BR" sz="1200" b="1" noProof="0" dirty="0">
+                <a:solidFill>
+                  <a:srgbClr val="F59E0B"/>
+                </a:solidFill>
+                <a:latin typeface="Segoe UI"/>
+              </a:rPr>
+              <a:t>•  </a:t>
             </a:r>
             <a:r>
               <a:rPr lang="pt-BR" sz="1200" b="0" noProof="0" dirty="0">
@@ -25312,112 +22542,39 @@
                 </a:solidFill>
                 <a:latin typeface="Segoe UI"/>
               </a:rPr>
-              <a:t> com </a:t>
-            </a:r>
-            <a:r>
-              <a:rPr lang="pt-BR" sz="1200" b="0" noProof="0" dirty="0" err="1">
+              <a:t>Equidade Salarial — Lei 14.611</a:t>
+            </a:r>
+          </a:p>
+          <a:p>
+            <a:pPr algn="l">
+              <a:lnSpc>
+                <a:spcPct val="108000"/>
+              </a:lnSpc>
+              <a:spcBef>
+                <a:spcPts val="0"/>
+              </a:spcBef>
+              <a:spcAft>
+                <a:spcPts val="700"/>
+              </a:spcAft>
+            </a:pPr>
+            <a:r>
+              <a:rPr lang="pt-BR" sz="1200" b="1" noProof="0" dirty="0">
+                <a:solidFill>
+                  <a:srgbClr val="F59E0B"/>
+                </a:solidFill>
+                <a:latin typeface="Segoe UI"/>
+              </a:rPr>
+              <a:t>•  </a:t>
+            </a:r>
+            <a:r>
+              <a:rPr lang="pt-BR" sz="1200" b="0" noProof="0" dirty="0">
                 <a:solidFill>
                   <a:srgbClr val="0F1B2E"/>
                 </a:solidFill>
                 <a:latin typeface="Segoe UI"/>
               </a:rPr>
-              <a:t>distribuicao</a:t>
-            </a:r>
-            <a:r>
-              <a:rPr lang="pt-BR" sz="1200" b="0" noProof="0" dirty="0">
-                <a:solidFill>
-                  <a:srgbClr val="0F1B2E"/>
-                </a:solidFill>
-                <a:latin typeface="Segoe UI"/>
-              </a:rPr>
-              <a:t> de ratings</a:t>
-            </a:r>
-          </a:p>
-          <a:p>
-            <a:pPr algn="l">
-              <a:lnSpc>
-                <a:spcPct val="108000"/>
-              </a:lnSpc>
-              <a:spcBef>
-                <a:spcPts val="0"/>
-              </a:spcBef>
-              <a:spcAft>
-                <a:spcPts val="700"/>
-              </a:spcAft>
-            </a:pPr>
-            <a:r>
-              <a:rPr lang="pt-BR" sz="1200" b="1" noProof="0" dirty="0">
-                <a:solidFill>
-                  <a:srgbClr val="F59E0B"/>
-                </a:solidFill>
-                <a:latin typeface="Segoe UI"/>
-              </a:rPr>
-              <a:t>•  </a:t>
-            </a:r>
-            <a:r>
-              <a:rPr lang="pt-BR" sz="1200" b="0" noProof="0" dirty="0">
-                <a:solidFill>
-                  <a:srgbClr val="0F1B2E"/>
-                </a:solidFill>
-                <a:latin typeface="Segoe UI"/>
-              </a:rPr>
-              <a:t>Equidade Salarial — Lei 14.611</a:t>
-            </a:r>
-          </a:p>
-          <a:p>
-            <a:pPr algn="l">
-              <a:lnSpc>
-                <a:spcPct val="108000"/>
-              </a:lnSpc>
-              <a:spcBef>
-                <a:spcPts val="0"/>
-              </a:spcBef>
-              <a:spcAft>
-                <a:spcPts val="700"/>
-              </a:spcAft>
-            </a:pPr>
-            <a:r>
-              <a:rPr lang="pt-BR" sz="1200" b="1" noProof="0" dirty="0">
-                <a:solidFill>
-                  <a:srgbClr val="F59E0B"/>
-                </a:solidFill>
-                <a:latin typeface="Segoe UI"/>
-              </a:rPr>
-              <a:t>•  </a:t>
-            </a:r>
-            <a:r>
-              <a:rPr lang="pt-BR" sz="1200" b="0" noProof="0" dirty="0" err="1">
-                <a:solidFill>
-                  <a:srgbClr val="0F1B2E"/>
-                </a:solidFill>
-                <a:latin typeface="Segoe UI"/>
-              </a:rPr>
-              <a:t>Relatorio</a:t>
-            </a:r>
-            <a:r>
-              <a:rPr lang="pt-BR" sz="1200" b="0" noProof="0" dirty="0">
-                <a:solidFill>
-                  <a:srgbClr val="0F1B2E"/>
-                </a:solidFill>
-                <a:latin typeface="Segoe UI"/>
-              </a:rPr>
-              <a:t> de </a:t>
-            </a:r>
-            <a:r>
-              <a:rPr lang="pt-BR" sz="1200" b="0" noProof="0" dirty="0" err="1">
-                <a:solidFill>
-                  <a:srgbClr val="0F1B2E"/>
-                </a:solidFill>
-                <a:latin typeface="Segoe UI"/>
-              </a:rPr>
-              <a:t>Transparencia</a:t>
-            </a:r>
-            <a:endParaRPr lang="pt-BR" sz="1200" b="0" noProof="0" dirty="0">
-              <a:solidFill>
-                <a:srgbClr val="0F1B2E"/>
-              </a:solidFill>
-              <a:latin typeface="Segoe UI"/>
-            </a:endParaRPr>
+              <a:t>Relatório de Transparência</a:t>
+            </a:r>
           </a:p>
         </p:txBody>
       </p:sp>
@@ -25574,8 +22731,8 @@
         </p:nvSpPr>
         <p:spPr>
           <a:xfrm>
-            <a:off x="4572000" y="1783080"/>
-            <a:ext cx="3044952" cy="658368"/>
+            <a:off x="4572000" y="2004542"/>
+            <a:ext cx="3044952" cy="215444"/>
           </a:xfrm>
           <a:prstGeom prst="rect">
             <a:avLst/>
@@ -25600,22 +22757,13 @@
               </a:spcAft>
             </a:pPr>
             <a:r>
-              <a:rPr lang="pt-BR" sz="1400" b="1" noProof="0" dirty="0" err="1">
+              <a:rPr lang="pt-BR" sz="1400" b="1" noProof="0" dirty="0">
                 <a:solidFill>
                   <a:srgbClr val="FFFFFF"/>
                 </a:solidFill>
                 <a:latin typeface="Segoe UI Semibold"/>
               </a:rPr>
-              <a:t>Gestao</a:t>
-            </a:r>
-            <a:r>
-              <a:rPr lang="pt-BR" sz="1400" b="1" noProof="0" dirty="0">
-                <a:solidFill>
-                  <a:srgbClr val="FFFFFF"/>
-                </a:solidFill>
-                <a:latin typeface="Segoe UI Semibold"/>
-              </a:rPr>
-              <a:t> de Premio</a:t>
+              <a:t>Gestão de Premio</a:t>
             </a:r>
           </a:p>
         </p:txBody>
@@ -25629,7 +22777,7 @@
         <p:spPr>
           <a:xfrm>
             <a:off x="4599432" y="2651760"/>
-            <a:ext cx="2999232" cy="3337560"/>
+            <a:ext cx="2999232" cy="1341136"/>
           </a:xfrm>
           <a:prstGeom prst="rect">
             <a:avLst/>
@@ -25663,13 +22811,35 @@
               <a:t>•  </a:t>
             </a:r>
             <a:r>
-              <a:rPr lang="pt-BR" sz="1200" b="0" noProof="0" dirty="0" err="1">
+              <a:rPr lang="pt-BR" sz="1200" b="0" noProof="0" dirty="0">
                 <a:solidFill>
                   <a:srgbClr val="0F1B2E"/>
                 </a:solidFill>
                 <a:latin typeface="Segoe UI"/>
               </a:rPr>
-              <a:t>Remuneracao</a:t>
+              <a:t>Remuneração variável ponta a ponta</a:t>
+            </a:r>
+          </a:p>
+          <a:p>
+            <a:pPr algn="l">
+              <a:lnSpc>
+                <a:spcPct val="108000"/>
+              </a:lnSpc>
+              <a:spcBef>
+                <a:spcPts val="0"/>
+              </a:spcBef>
+              <a:spcAft>
+                <a:spcPts val="700"/>
+              </a:spcAft>
+            </a:pPr>
+            <a:r>
+              <a:rPr lang="pt-BR" sz="1200" b="1" noProof="0" dirty="0">
+                <a:solidFill>
+                  <a:srgbClr val="16A34A"/>
+                </a:solidFill>
+                <a:latin typeface="Segoe UI"/>
+              </a:rPr>
+              <a:t>•  </a:t>
             </a:r>
             <a:r>
               <a:rPr lang="pt-BR" sz="1200" b="0" noProof="0" dirty="0">
@@ -25678,16 +22848,60 @@
                 </a:solidFill>
                 <a:latin typeface="Segoe UI"/>
               </a:rPr>
-              <a:t> </a:t>
-            </a:r>
-            <a:r>
-              <a:rPr lang="pt-BR" sz="1200" b="0" noProof="0" dirty="0" err="1">
+              <a:t>Regras em matriz (área x cargo)</a:t>
+            </a:r>
+          </a:p>
+          <a:p>
+            <a:pPr algn="l">
+              <a:lnSpc>
+                <a:spcPct val="108000"/>
+              </a:lnSpc>
+              <a:spcBef>
+                <a:spcPts val="0"/>
+              </a:spcBef>
+              <a:spcAft>
+                <a:spcPts val="700"/>
+              </a:spcAft>
+            </a:pPr>
+            <a:r>
+              <a:rPr lang="pt-BR" sz="1200" b="1" noProof="0" dirty="0">
+                <a:solidFill>
+                  <a:srgbClr val="16A34A"/>
+                </a:solidFill>
+                <a:latin typeface="Segoe UI"/>
+              </a:rPr>
+              <a:t>•  </a:t>
+            </a:r>
+            <a:r>
+              <a:rPr lang="pt-BR" sz="1200" b="0" noProof="0" dirty="0">
                 <a:solidFill>
                   <a:srgbClr val="0F1B2E"/>
                 </a:solidFill>
                 <a:latin typeface="Segoe UI"/>
               </a:rPr>
-              <a:t>variavel</a:t>
+              <a:t>Vinculo de indicadores ao premio</a:t>
+            </a:r>
+          </a:p>
+          <a:p>
+            <a:pPr algn="l">
+              <a:lnSpc>
+                <a:spcPct val="108000"/>
+              </a:lnSpc>
+              <a:spcBef>
+                <a:spcPts val="0"/>
+              </a:spcBef>
+              <a:spcAft>
+                <a:spcPts val="700"/>
+              </a:spcAft>
+            </a:pPr>
+            <a:r>
+              <a:rPr lang="pt-BR" sz="1200" b="1" noProof="0" dirty="0">
+                <a:solidFill>
+                  <a:srgbClr val="16A34A"/>
+                </a:solidFill>
+                <a:latin typeface="Segoe UI"/>
+              </a:rPr>
+              <a:t>•  </a:t>
             </a:r>
             <a:r>
               <a:rPr lang="pt-BR" sz="1200" b="0" noProof="0" dirty="0">
@@ -25696,7 +22910,7 @@
                 </a:solidFill>
                 <a:latin typeface="Segoe UI"/>
               </a:rPr>
-              <a:t> ponta a ponta</a:t>
+              <a:t>Motor de calculo calibrado</a:t>
             </a:r>
           </a:p>
           <a:p>
@@ -25727,143 +22941,8 @@
                 </a:solidFill>
                 <a:latin typeface="Segoe UI"/>
               </a:rPr>
-              <a:t>Regras em matriz (</a:t>
-            </a:r>
-            <a:r>
-              <a:rPr lang="pt-BR" sz="1200" b="0" noProof="0" dirty="0" err="1">
-                <a:solidFill>
-                  <a:srgbClr val="0F1B2E"/>
-                </a:solidFill>
-                <a:latin typeface="Segoe UI"/>
-              </a:rPr>
-              <a:t>area</a:t>
-            </a:r>
-            <a:r>
-              <a:rPr lang="pt-BR" sz="1200" b="0" noProof="0" dirty="0">
-                <a:solidFill>
-                  <a:srgbClr val="0F1B2E"/>
-                </a:solidFill>
-                <a:latin typeface="Segoe UI"/>
-              </a:rPr>
-              <a:t> x cargo)</a:t>
-            </a:r>
-          </a:p>
-          <a:p>
-            <a:pPr algn="l">
-              <a:lnSpc>
-                <a:spcPct val="108000"/>
-              </a:lnSpc>
-              <a:spcBef>
-                <a:spcPts val="0"/>
-              </a:spcBef>
-              <a:spcAft>
-                <a:spcPts val="700"/>
-              </a:spcAft>
-            </a:pPr>
-            <a:r>
-              <a:rPr lang="pt-BR" sz="1200" b="1" noProof="0" dirty="0">
-                <a:solidFill>
-                  <a:srgbClr val="16A34A"/>
-                </a:solidFill>
-                <a:latin typeface="Segoe UI"/>
-              </a:rPr>
-              <a:t>•  </a:t>
-            </a:r>
-            <a:r>
-              <a:rPr lang="pt-BR" sz="1200" b="0" noProof="0" dirty="0">
-                <a:solidFill>
-                  <a:srgbClr val="0F1B2E"/>
-                </a:solidFill>
-                <a:latin typeface="Segoe UI"/>
-              </a:rPr>
-              <a:t>Vinculo de indicadores ao premio</a:t>
-            </a:r>
-          </a:p>
-          <a:p>
-            <a:pPr algn="l">
-              <a:lnSpc>
-                <a:spcPct val="108000"/>
-              </a:lnSpc>
-              <a:spcBef>
-                <a:spcPts val="0"/>
-              </a:spcBef>
-              <a:spcAft>
-                <a:spcPts val="700"/>
-              </a:spcAft>
-            </a:pPr>
-            <a:r>
-              <a:rPr lang="pt-BR" sz="1200" b="1" noProof="0" dirty="0">
-                <a:solidFill>
-                  <a:srgbClr val="16A34A"/>
-                </a:solidFill>
-                <a:latin typeface="Segoe UI"/>
-              </a:rPr>
-              <a:t>•  </a:t>
-            </a:r>
-            <a:r>
-              <a:rPr lang="pt-BR" sz="1200" b="0" noProof="0" dirty="0">
-                <a:solidFill>
-                  <a:srgbClr val="0F1B2E"/>
-                </a:solidFill>
-                <a:latin typeface="Segoe UI"/>
-              </a:rPr>
-              <a:t>Motor de calculo calibrado</a:t>
-            </a:r>
-          </a:p>
-          <a:p>
-            <a:pPr algn="l">
-              <a:lnSpc>
-                <a:spcPct val="108000"/>
-              </a:lnSpc>
-              <a:spcBef>
-                <a:spcPts val="0"/>
-              </a:spcBef>
-              <a:spcAft>
-                <a:spcPts val="700"/>
-              </a:spcAft>
-            </a:pPr>
-            <a:r>
-              <a:rPr lang="pt-BR" sz="1200" b="1" noProof="0" dirty="0">
-                <a:solidFill>
-                  <a:srgbClr val="16A34A"/>
-                </a:solidFill>
-                <a:latin typeface="Segoe UI"/>
-              </a:rPr>
-              <a:t>•  </a:t>
-            </a:r>
-            <a:r>
-              <a:rPr lang="pt-BR" sz="1200" b="0" noProof="0" dirty="0" err="1">
-                <a:solidFill>
-                  <a:srgbClr val="0F1B2E"/>
-                </a:solidFill>
-                <a:latin typeface="Segoe UI"/>
-              </a:rPr>
-              <a:t>Importacao</a:t>
-            </a:r>
-            <a:r>
-              <a:rPr lang="pt-BR" sz="1200" b="0" noProof="0" dirty="0">
-                <a:solidFill>
-                  <a:srgbClr val="0F1B2E"/>
-                </a:solidFill>
-                <a:latin typeface="Segoe UI"/>
-              </a:rPr>
-              <a:t> CSV/XLSX e </a:t>
-            </a:r>
-            <a:r>
-              <a:rPr lang="pt-BR" sz="1200" b="0" noProof="0" dirty="0" err="1">
-                <a:solidFill>
-                  <a:srgbClr val="0F1B2E"/>
-                </a:solidFill>
-                <a:latin typeface="Segoe UI"/>
-              </a:rPr>
-              <a:t>validacao</a:t>
-            </a:r>
-            <a:endParaRPr lang="pt-BR" sz="1200" b="0" noProof="0" dirty="0">
-              <a:solidFill>
-                <a:srgbClr val="0F1B2E"/>
-              </a:solidFill>
-              <a:latin typeface="Segoe UI"/>
-            </a:endParaRPr>
+              <a:t>Importação CSV/XLSX e validação</a:t>
+            </a:r>
           </a:p>
         </p:txBody>
       </p:sp>
@@ -26020,8 +23099,8 @@
         </p:nvSpPr>
         <p:spPr>
           <a:xfrm>
-            <a:off x="8275320" y="1783080"/>
-            <a:ext cx="3044952" cy="658368"/>
+            <a:off x="8275320" y="2004542"/>
+            <a:ext cx="3044952" cy="215444"/>
           </a:xfrm>
           <a:prstGeom prst="rect">
             <a:avLst/>
@@ -26046,22 +23125,13 @@
               </a:spcAft>
             </a:pPr>
             <a:r>
-              <a:rPr lang="pt-BR" sz="1400" b="1" noProof="0" dirty="0" err="1">
+              <a:rPr lang="pt-BR" sz="1400" b="1" noProof="0" dirty="0">
                 <a:solidFill>
                   <a:srgbClr val="FFFFFF"/>
                 </a:solidFill>
                 <a:latin typeface="Segoe UI Semibold"/>
               </a:rPr>
-              <a:t>Seguranca</a:t>
-            </a:r>
-            <a:r>
-              <a:rPr lang="pt-BR" sz="1400" b="1" noProof="0" dirty="0">
-                <a:solidFill>
-                  <a:srgbClr val="FFFFFF"/>
-                </a:solidFill>
-                <a:latin typeface="Segoe UI Semibold"/>
-              </a:rPr>
-              <a:t> Patrimonial &amp; Alimentos</a:t>
+              <a:t>Segurança Patrimonial &amp; Alimentos</a:t>
             </a:r>
           </a:p>
         </p:txBody>
@@ -26075,7 +23145,7 @@
         <p:spPr>
           <a:xfrm>
             <a:off x="8302752" y="2651760"/>
-            <a:ext cx="2999232" cy="3337560"/>
+            <a:ext cx="2999232" cy="1341136"/>
           </a:xfrm>
           <a:prstGeom prst="rect">
             <a:avLst/>
@@ -26115,16 +23185,60 @@
                 </a:solidFill>
                 <a:latin typeface="Segoe UI"/>
               </a:rPr>
-              <a:t>Portaria: </a:t>
-            </a:r>
-            <a:r>
-              <a:rPr lang="pt-BR" sz="1200" b="0" noProof="0" dirty="0" err="1">
+              <a:t>Portaria: autorizações e correspondências</a:t>
+            </a:r>
+          </a:p>
+          <a:p>
+            <a:pPr algn="l">
+              <a:lnSpc>
+                <a:spcPct val="108000"/>
+              </a:lnSpc>
+              <a:spcBef>
+                <a:spcPts val="0"/>
+              </a:spcBef>
+              <a:spcAft>
+                <a:spcPts val="700"/>
+              </a:spcAft>
+            </a:pPr>
+            <a:r>
+              <a:rPr lang="pt-BR" sz="1200" b="1" noProof="0" dirty="0">
+                <a:solidFill>
+                  <a:srgbClr val="102A54"/>
+                </a:solidFill>
+                <a:latin typeface="Segoe UI"/>
+              </a:rPr>
+              <a:t>•  </a:t>
+            </a:r>
+            <a:r>
+              <a:rPr lang="pt-BR" sz="1200" b="0" noProof="0" dirty="0">
                 <a:solidFill>
                   <a:srgbClr val="0F1B2E"/>
                 </a:solidFill>
                 <a:latin typeface="Segoe UI"/>
               </a:rPr>
-              <a:t>autorizacoes</a:t>
+              <a:t>Rondas com planta, pinos e QR Code</a:t>
+            </a:r>
+          </a:p>
+          <a:p>
+            <a:pPr algn="l">
+              <a:lnSpc>
+                <a:spcPct val="108000"/>
+              </a:lnSpc>
+              <a:spcBef>
+                <a:spcPts val="0"/>
+              </a:spcBef>
+              <a:spcAft>
+                <a:spcPts val="700"/>
+              </a:spcAft>
+            </a:pPr>
+            <a:r>
+              <a:rPr lang="pt-BR" sz="1200" b="1" noProof="0" dirty="0">
+                <a:solidFill>
+                  <a:srgbClr val="102A54"/>
+                </a:solidFill>
+                <a:latin typeface="Segoe UI"/>
+              </a:rPr>
+              <a:t>•  </a:t>
             </a:r>
             <a:r>
               <a:rPr lang="pt-BR" sz="1200" b="0" noProof="0" dirty="0">
@@ -26133,23 +23247,39 @@
                 </a:solidFill>
                 <a:latin typeface="Segoe UI"/>
               </a:rPr>
-              <a:t> e </a:t>
-            </a:r>
-            <a:r>
-              <a:rPr lang="pt-BR" sz="1200" b="0" noProof="0" dirty="0" err="1">
+              <a:t>Ocorrências e turnos, modo offline</a:t>
+            </a:r>
+          </a:p>
+          <a:p>
+            <a:pPr algn="l">
+              <a:lnSpc>
+                <a:spcPct val="108000"/>
+              </a:lnSpc>
+              <a:spcBef>
+                <a:spcPts val="0"/>
+              </a:spcBef>
+              <a:spcAft>
+                <a:spcPts val="700"/>
+              </a:spcAft>
+            </a:pPr>
+            <a:r>
+              <a:rPr lang="pt-BR" sz="1200" b="1" noProof="0" dirty="0">
+                <a:solidFill>
+                  <a:srgbClr val="102A54"/>
+                </a:solidFill>
+                <a:latin typeface="Segoe UI"/>
+              </a:rPr>
+              <a:t>•  </a:t>
+            </a:r>
+            <a:r>
+              <a:rPr lang="pt-BR" sz="1200" b="0" noProof="0" dirty="0">
                 <a:solidFill>
                   <a:srgbClr val="0F1B2E"/>
                 </a:solidFill>
                 <a:latin typeface="Segoe UI"/>
               </a:rPr>
-              <a:t>correspondencias</a:t>
-            </a:r>
-            <a:endParaRPr lang="pt-BR" sz="1200" b="0" noProof="0" dirty="0">
-              <a:solidFill>
-                <a:srgbClr val="0F1B2E"/>
-              </a:solidFill>
-              <a:latin typeface="Segoe UI"/>
-            </a:endParaRPr>
+              <a:t>Fluxos APPCC/HACCP de alimentos</a:t>
+            </a:r>
           </a:p>
           <a:p>
             <a:pPr algn="l">
@@ -26179,133 +23309,7 @@
                 </a:solidFill>
                 <a:latin typeface="Segoe UI"/>
               </a:rPr>
-              <a:t>Rondas com planta, pinos e QR </a:t>
-            </a:r>
-            <a:r>
-              <a:rPr lang="pt-BR" sz="1200" b="0" noProof="0" dirty="0" err="1">
-                <a:solidFill>
-                  <a:srgbClr val="0F1B2E"/>
-                </a:solidFill>
-                <a:latin typeface="Segoe UI"/>
-              </a:rPr>
-              <a:t>Code</a:t>
-            </a:r>
-            <a:endParaRPr lang="pt-BR" sz="1200" b="0" noProof="0" dirty="0">
-              <a:solidFill>
-                <a:srgbClr val="0F1B2E"/>
-              </a:solidFill>
-              <a:latin typeface="Segoe UI"/>
-            </a:endParaRPr>
-          </a:p>
-          <a:p>
-            <a:pPr algn="l">
-              <a:lnSpc>
-                <a:spcPct val="108000"/>
-              </a:lnSpc>
-              <a:spcBef>
-                <a:spcPts val="0"/>
-              </a:spcBef>
-              <a:spcAft>
-                <a:spcPts val="700"/>
-              </a:spcAft>
-            </a:pPr>
-            <a:r>
-              <a:rPr lang="pt-BR" sz="1200" b="1" noProof="0" dirty="0">
-                <a:solidFill>
-                  <a:srgbClr val="102A54"/>
-                </a:solidFill>
-                <a:latin typeface="Segoe UI"/>
-              </a:rPr>
-              <a:t>•  </a:t>
-            </a:r>
-            <a:r>
-              <a:rPr lang="pt-BR" sz="1200" b="0" noProof="0" dirty="0" err="1">
-                <a:solidFill>
-                  <a:srgbClr val="0F1B2E"/>
-                </a:solidFill>
-                <a:latin typeface="Segoe UI"/>
-              </a:rPr>
-              <a:t>Ocorrencias</a:t>
-            </a:r>
-            <a:r>
-              <a:rPr lang="pt-BR" sz="1200" b="0" noProof="0" dirty="0">
-                <a:solidFill>
-                  <a:srgbClr val="0F1B2E"/>
-                </a:solidFill>
-                <a:latin typeface="Segoe UI"/>
-              </a:rPr>
-              <a:t> e turnos, modo offline</a:t>
-            </a:r>
-          </a:p>
-          <a:p>
-            <a:pPr algn="l">
-              <a:lnSpc>
-                <a:spcPct val="108000"/>
-              </a:lnSpc>
-              <a:spcBef>
-                <a:spcPts val="0"/>
-              </a:spcBef>
-              <a:spcAft>
-                <a:spcPts val="700"/>
-              </a:spcAft>
-            </a:pPr>
-            <a:r>
-              <a:rPr lang="pt-BR" sz="1200" b="1" noProof="0" dirty="0">
-                <a:solidFill>
-                  <a:srgbClr val="102A54"/>
-                </a:solidFill>
-                <a:latin typeface="Segoe UI"/>
-              </a:rPr>
-              <a:t>•  </a:t>
-            </a:r>
-            <a:r>
-              <a:rPr lang="pt-BR" sz="1200" b="0" noProof="0" dirty="0">
-                <a:solidFill>
-                  <a:srgbClr val="0F1B2E"/>
-                </a:solidFill>
-                <a:latin typeface="Segoe UI"/>
-              </a:rPr>
-              <a:t>Fluxos APPCC/HACCP de alimentos</a:t>
-            </a:r>
-          </a:p>
-          <a:p>
-            <a:pPr algn="l">
-              <a:lnSpc>
-                <a:spcPct val="108000"/>
-              </a:lnSpc>
-              <a:spcBef>
-                <a:spcPts val="0"/>
-              </a:spcBef>
-              <a:spcAft>
-                <a:spcPts val="700"/>
-              </a:spcAft>
-            </a:pPr>
-            <a:r>
-              <a:rPr lang="pt-BR" sz="1200" b="1" noProof="0" dirty="0">
-                <a:solidFill>
-                  <a:srgbClr val="102A54"/>
-                </a:solidFill>
-                <a:latin typeface="Segoe UI"/>
-              </a:rPr>
-              <a:t>•  </a:t>
-            </a:r>
-            <a:r>
-              <a:rPr lang="pt-BR" sz="1200" b="0" noProof="0" dirty="0" err="1">
-                <a:solidFill>
-                  <a:srgbClr val="0F1B2E"/>
-                </a:solidFill>
-                <a:latin typeface="Segoe UI"/>
-              </a:rPr>
-              <a:t>Exigencia</a:t>
-            </a:r>
-            <a:r>
-              <a:rPr lang="pt-BR" sz="1200" b="0" noProof="0" dirty="0">
-                <a:solidFill>
-                  <a:srgbClr val="0F1B2E"/>
-                </a:solidFill>
-                <a:latin typeface="Segoe UI"/>
-              </a:rPr>
-              <a:t> documental e auditoria</a:t>
+              <a:t>Exigência documental e auditoria</a:t>
             </a:r>
           </a:p>
         </p:txBody>
@@ -26441,8 +23445,8 @@
         </p:nvSpPr>
         <p:spPr>
           <a:xfrm>
-            <a:off x="640080" y="868680"/>
-            <a:ext cx="10789920" cy="822960"/>
+            <a:off x="640080" y="799396"/>
+            <a:ext cx="10789920" cy="984885"/>
           </a:xfrm>
           <a:prstGeom prst="rect">
             <a:avLst/>
@@ -26467,72 +23471,27 @@
               </a:spcAft>
             </a:pPr>
             <a:r>
-              <a:rPr lang="pt-BR" sz="3200" b="1" noProof="0" dirty="0" err="1">
+              <a:rPr lang="pt-BR" sz="3200" b="1" noProof="0" dirty="0">
                 <a:solidFill>
                   <a:srgbClr val="0F1B2E"/>
                 </a:solidFill>
                 <a:latin typeface="Segoe UI Semibold"/>
               </a:rPr>
-              <a:t>Inteligencia</a:t>
-            </a:r>
-            <a:r>
-              <a:rPr lang="pt-BR" sz="3200" b="1" noProof="0" dirty="0">
-                <a:solidFill>
-                  <a:srgbClr val="0F1B2E"/>
-                </a:solidFill>
-                <a:latin typeface="Segoe UI Semibold"/>
-              </a:rPr>
-              <a:t>, </a:t>
-            </a:r>
-            <a:r>
-              <a:rPr lang="pt-BR" sz="3200" b="1" noProof="0" dirty="0" err="1">
-                <a:solidFill>
-                  <a:srgbClr val="0F1B2E"/>
-                </a:solidFill>
-                <a:latin typeface="Segoe UI Semibold"/>
-              </a:rPr>
-              <a:t>automacao</a:t>
-            </a:r>
-            <a:r>
-              <a:rPr lang="pt-BR" sz="3200" b="1" noProof="0" dirty="0">
-                <a:solidFill>
-                  <a:srgbClr val="0F1B2E"/>
-                </a:solidFill>
-                <a:latin typeface="Segoe UI Semibold"/>
-              </a:rPr>
-              <a:t> e </a:t>
-            </a:r>
-            <a:r>
-              <a:rPr lang="pt-BR" sz="3200" b="1" noProof="0" dirty="0" err="1">
-                <a:solidFill>
-                  <a:srgbClr val="0F1B2E"/>
-                </a:solidFill>
-                <a:latin typeface="Segoe UI Semibold"/>
-              </a:rPr>
-              <a:t>governanca</a:t>
-            </a:r>
-            <a:r>
-              <a:rPr lang="pt-BR" sz="3200" b="1" noProof="0" dirty="0">
-                <a:solidFill>
-                  <a:srgbClr val="0F1B2E"/>
-                </a:solidFill>
-                <a:latin typeface="Segoe UI Semibold"/>
-              </a:rPr>
-              <a:t> em toda a plataforma</a:t>
-            </a:r>
-          </a:p>
-        </p:txBody>
-      </p:sp>
-      <p:sp>
-        <p:nvSpPr>
-          <p:cNvPr id="5" name="TextBox 4"/>
+              <a:t>Inteligência, automação e governança em toda a plataforma</a:t>
+            </a:r>
+          </a:p>
+        </p:txBody>
+      </p:sp>
+      <p:sp>
+        <p:nvSpPr>
+          <p:cNvPr id="6" name="TextBox 5"/>
           <p:cNvSpPr txBox="1"/>
           <p:nvPr/>
         </p:nvSpPr>
         <p:spPr>
           <a:xfrm>
-            <a:off x="502920" y="6446520"/>
-            <a:ext cx="5486400" cy="320040"/>
+            <a:off x="10332720" y="6446520"/>
+            <a:ext cx="1371600" cy="320040"/>
           </a:xfrm>
           <a:prstGeom prst="rect">
             <a:avLst/>
@@ -26545,78 +23504,6 @@
           </a:bodyPr>
           <a:lstStyle/>
           <a:p>
-            <a:pPr algn="l">
-              <a:lnSpc>
-                <a:spcPct val="100000"/>
-              </a:lnSpc>
-              <a:spcBef>
-                <a:spcPts val="0"/>
-              </a:spcBef>
-              <a:spcAft>
-                <a:spcPts val="400"/>
-              </a:spcAft>
-            </a:pPr>
-            <a:r>
-              <a:rPr lang="pt-BR" sz="900" b="1" noProof="0" dirty="0">
-                <a:solidFill>
-                  <a:srgbClr val="2B5CE6"/>
-                </a:solidFill>
-                <a:latin typeface="Segoe UI"/>
-              </a:rPr>
-              <a:t>GESTAO 360</a:t>
-            </a:r>
-            <a:r>
-              <a:rPr lang="pt-BR" sz="900" b="0" noProof="0" dirty="0">
-                <a:solidFill>
-                  <a:srgbClr val="5B6B82"/>
-                </a:solidFill>
-                <a:latin typeface="Segoe UI"/>
-              </a:rPr>
-              <a:t>   •   Plataforma corporativa de </a:t>
-            </a:r>
-            <a:r>
-              <a:rPr lang="pt-BR" sz="900" b="0" noProof="0" dirty="0" err="1">
-                <a:solidFill>
-                  <a:srgbClr val="5B6B82"/>
-                </a:solidFill>
-                <a:latin typeface="Segoe UI"/>
-              </a:rPr>
-              <a:t>gestao</a:t>
-            </a:r>
-            <a:r>
-              <a:rPr lang="pt-BR" sz="900" b="0" noProof="0" dirty="0">
-                <a:solidFill>
-                  <a:srgbClr val="5B6B82"/>
-                </a:solidFill>
-                <a:latin typeface="Segoe UI"/>
-              </a:rPr>
-              <a:t>   •   gestao360.org</a:t>
-            </a:r>
-          </a:p>
-        </p:txBody>
-      </p:sp>
-      <p:sp>
-        <p:nvSpPr>
-          <p:cNvPr id="6" name="TextBox 5"/>
-          <p:cNvSpPr txBox="1"/>
-          <p:nvPr/>
-        </p:nvSpPr>
-        <p:spPr>
-          <a:xfrm>
-            <a:off x="10332720" y="6446520"/>
-            <a:ext cx="1371600" cy="320040"/>
-          </a:xfrm>
-          <a:prstGeom prst="rect">
-            <a:avLst/>
-          </a:prstGeom>
-          <a:noFill/>
-        </p:spPr>
-        <p:txBody>
-          <a:bodyPr wrap="square" lIns="0" tIns="0" rIns="0" bIns="0" anchor="t">
-            <a:spAutoFit/>
-          </a:bodyPr>
-          <a:lstStyle/>
-          <a:p>
             <a:pPr algn="r">
               <a:lnSpc>
                 <a:spcPct val="100000"/>
@@ -26648,7 +23535,7 @@
         </p:nvSpPr>
         <p:spPr>
           <a:xfrm>
-            <a:off x="640080" y="1783080"/>
+            <a:off x="640080" y="1943337"/>
             <a:ext cx="2576322" cy="4343400"/>
           </a:xfrm>
           <a:prstGeom prst="roundRect">
@@ -26701,7 +23588,7 @@
         </p:nvSpPr>
         <p:spPr>
           <a:xfrm>
-            <a:off x="640080" y="1783080"/>
+            <a:off x="640080" y="1943337"/>
             <a:ext cx="2576322" cy="658368"/>
           </a:xfrm>
           <a:prstGeom prst="roundRect">
@@ -26748,7 +23635,7 @@
         </p:nvSpPr>
         <p:spPr>
           <a:xfrm>
-            <a:off x="640080" y="2112264"/>
+            <a:off x="640080" y="2272521"/>
             <a:ext cx="2576322" cy="329184"/>
           </a:xfrm>
           <a:prstGeom prst="rect">
@@ -26793,7 +23680,7 @@
         </p:nvSpPr>
         <p:spPr>
           <a:xfrm>
-            <a:off x="868680" y="1783080"/>
+            <a:off x="868680" y="1943337"/>
             <a:ext cx="2119122" cy="658368"/>
           </a:xfrm>
           <a:prstGeom prst="rect">
@@ -26838,8 +23725,8 @@
         </p:nvSpPr>
         <p:spPr>
           <a:xfrm>
-            <a:off x="896112" y="2651760"/>
-            <a:ext cx="2073402" cy="3337560"/>
+            <a:off x="896112" y="2812017"/>
+            <a:ext cx="2073402" cy="1849609"/>
           </a:xfrm>
           <a:prstGeom prst="rect">
             <a:avLst/>
@@ -26941,23 +23828,8 @@
                 </a:solidFill>
                 <a:latin typeface="Segoe UI"/>
               </a:rPr>
-              <a:t>Busca ao vivo no banco com </a:t>
-            </a:r>
-            <a:r>
-              <a:rPr lang="pt-BR" sz="1200" b="0" noProof="0" dirty="0" err="1">
-                <a:solidFill>
-                  <a:srgbClr val="0F1B2E"/>
-                </a:solidFill>
-                <a:latin typeface="Segoe UI"/>
-              </a:rPr>
-              <a:t>permissoes</a:t>
-            </a:r>
-            <a:endParaRPr lang="pt-BR" sz="1200" b="0" noProof="0" dirty="0">
-              <a:solidFill>
-                <a:srgbClr val="0F1B2E"/>
-              </a:solidFill>
-              <a:latin typeface="Segoe UI"/>
-            </a:endParaRPr>
+              <a:t>Busca ao vivo no banco com permissões</a:t>
+            </a:r>
           </a:p>
           <a:p>
             <a:pPr algn="l">
@@ -27000,7 +23872,7 @@
         </p:nvSpPr>
         <p:spPr>
           <a:xfrm>
-            <a:off x="3417570" y="1783080"/>
+            <a:off x="3417570" y="1943337"/>
             <a:ext cx="2576322" cy="4343400"/>
           </a:xfrm>
           <a:prstGeom prst="roundRect">
@@ -27053,7 +23925,7 @@
         </p:nvSpPr>
         <p:spPr>
           <a:xfrm>
-            <a:off x="3417570" y="1783080"/>
+            <a:off x="3417570" y="1943337"/>
             <a:ext cx="2576322" cy="658368"/>
           </a:xfrm>
           <a:prstGeom prst="roundRect">
@@ -27100,7 +23972,7 @@
         </p:nvSpPr>
         <p:spPr>
           <a:xfrm>
-            <a:off x="3417570" y="2112264"/>
+            <a:off x="3417570" y="2272521"/>
             <a:ext cx="2576322" cy="329184"/>
           </a:xfrm>
           <a:prstGeom prst="rect">
@@ -27145,8 +24017,8 @@
         </p:nvSpPr>
         <p:spPr>
           <a:xfrm>
-            <a:off x="3646170" y="1783080"/>
-            <a:ext cx="2119122" cy="658368"/>
+            <a:off x="3646170" y="2164799"/>
+            <a:ext cx="2119122" cy="215444"/>
           </a:xfrm>
           <a:prstGeom prst="rect">
             <a:avLst/>
@@ -27171,22 +24043,13 @@
               </a:spcAft>
             </a:pPr>
             <a:r>
-              <a:rPr lang="pt-BR" sz="1400" b="1" noProof="0" dirty="0" err="1">
+              <a:rPr lang="pt-BR" sz="1400" b="1" noProof="0" dirty="0">
                 <a:solidFill>
                   <a:srgbClr val="FFFFFF"/>
                 </a:solidFill>
                 <a:latin typeface="Segoe UI Semibold"/>
               </a:rPr>
-              <a:t>Automacoes</a:t>
-            </a:r>
-            <a:r>
-              <a:rPr lang="pt-BR" sz="1400" b="1" noProof="0" dirty="0">
-                <a:solidFill>
-                  <a:srgbClr val="FFFFFF"/>
-                </a:solidFill>
-                <a:latin typeface="Segoe UI Semibold"/>
-              </a:rPr>
-              <a:t> &amp; Meu Dia</a:t>
+              <a:t>Automações &amp; Meu Dia</a:t>
             </a:r>
           </a:p>
         </p:txBody>
@@ -27199,8 +24062,8 @@
         </p:nvSpPr>
         <p:spPr>
           <a:xfrm>
-            <a:off x="3673602" y="2651760"/>
-            <a:ext cx="2073402" cy="3337560"/>
+            <a:off x="3673602" y="2812017"/>
+            <a:ext cx="2073402" cy="1849609"/>
           </a:xfrm>
           <a:prstGeom prst="rect">
             <a:avLst/>
@@ -27240,16 +24103,60 @@
                 </a:solidFill>
                 <a:latin typeface="Segoe UI"/>
               </a:rPr>
-              <a:t>Central de </a:t>
-            </a:r>
-            <a:r>
-              <a:rPr lang="pt-BR" sz="1200" b="0" noProof="0" dirty="0" err="1">
+              <a:t>Central de Automações e workflows</a:t>
+            </a:r>
+          </a:p>
+          <a:p>
+            <a:pPr algn="l">
+              <a:lnSpc>
+                <a:spcPct val="108000"/>
+              </a:lnSpc>
+              <a:spcBef>
+                <a:spcPts val="0"/>
+              </a:spcBef>
+              <a:spcAft>
+                <a:spcPts val="700"/>
+              </a:spcAft>
+            </a:pPr>
+            <a:r>
+              <a:rPr lang="pt-BR" sz="1200" b="1" noProof="0" dirty="0">
+                <a:solidFill>
+                  <a:srgbClr val="14B8A6"/>
+                </a:solidFill>
+                <a:latin typeface="Segoe UI"/>
+              </a:rPr>
+              <a:t>•  </a:t>
+            </a:r>
+            <a:r>
+              <a:rPr lang="pt-BR" sz="1200" b="0" noProof="0" dirty="0">
                 <a:solidFill>
                   <a:srgbClr val="0F1B2E"/>
                 </a:solidFill>
                 <a:latin typeface="Segoe UI"/>
               </a:rPr>
-              <a:t>Automacoes</a:t>
+              <a:t>Politicas de SLA e escalonamentos</a:t>
+            </a:r>
+          </a:p>
+          <a:p>
+            <a:pPr algn="l">
+              <a:lnSpc>
+                <a:spcPct val="108000"/>
+              </a:lnSpc>
+              <a:spcBef>
+                <a:spcPts val="0"/>
+              </a:spcBef>
+              <a:spcAft>
+                <a:spcPts val="700"/>
+              </a:spcAft>
+            </a:pPr>
+            <a:r>
+              <a:rPr lang="pt-BR" sz="1200" b="1" noProof="0" dirty="0">
+                <a:solidFill>
+                  <a:srgbClr val="14B8A6"/>
+                </a:solidFill>
+                <a:latin typeface="Segoe UI"/>
+              </a:rPr>
+              <a:t>•  </a:t>
             </a:r>
             <a:r>
               <a:rPr lang="pt-BR" sz="1200" b="0" noProof="0" dirty="0">
@@ -27258,7 +24165,7 @@
                 </a:solidFill>
                 <a:latin typeface="Segoe UI"/>
               </a:rPr>
-              <a:t> e workflows</a:t>
+              <a:t>Meu Dia agrega tudo sem duplicar</a:t>
             </a:r>
           </a:p>
           <a:p>
@@ -27289,96 +24196,7 @@
                 </a:solidFill>
                 <a:latin typeface="Segoe UI"/>
               </a:rPr>
-              <a:t>Politicas de SLA e escalonamentos</a:t>
-            </a:r>
-          </a:p>
-          <a:p>
-            <a:pPr algn="l">
-              <a:lnSpc>
-                <a:spcPct val="108000"/>
-              </a:lnSpc>
-              <a:spcBef>
-                <a:spcPts val="0"/>
-              </a:spcBef>
-              <a:spcAft>
-                <a:spcPts val="700"/>
-              </a:spcAft>
-            </a:pPr>
-            <a:r>
-              <a:rPr lang="pt-BR" sz="1200" b="1" noProof="0" dirty="0">
-                <a:solidFill>
-                  <a:srgbClr val="14B8A6"/>
-                </a:solidFill>
-                <a:latin typeface="Segoe UI"/>
-              </a:rPr>
-              <a:t>•  </a:t>
-            </a:r>
-            <a:r>
-              <a:rPr lang="pt-BR" sz="1200" b="0" noProof="0" dirty="0">
-                <a:solidFill>
-                  <a:srgbClr val="0F1B2E"/>
-                </a:solidFill>
-                <a:latin typeface="Segoe UI"/>
-              </a:rPr>
-              <a:t>Meu Dia agrega tudo sem duplicar</a:t>
-            </a:r>
-          </a:p>
-          <a:p>
-            <a:pPr algn="l">
-              <a:lnSpc>
-                <a:spcPct val="108000"/>
-              </a:lnSpc>
-              <a:spcBef>
-                <a:spcPts val="0"/>
-              </a:spcBef>
-              <a:spcAft>
-                <a:spcPts val="700"/>
-              </a:spcAft>
-            </a:pPr>
-            <a:r>
-              <a:rPr lang="pt-BR" sz="1200" b="1" noProof="0" dirty="0">
-                <a:solidFill>
-                  <a:srgbClr val="14B8A6"/>
-                </a:solidFill>
-                <a:latin typeface="Segoe UI"/>
-              </a:rPr>
-              <a:t>•  </a:t>
-            </a:r>
-            <a:r>
-              <a:rPr lang="pt-BR" sz="1200" b="0" noProof="0" dirty="0" err="1">
-                <a:solidFill>
-                  <a:srgbClr val="0F1B2E"/>
-                </a:solidFill>
-                <a:latin typeface="Segoe UI"/>
-              </a:rPr>
-              <a:t>Delegacao</a:t>
-            </a:r>
-            <a:r>
-              <a:rPr lang="pt-BR" sz="1200" b="0" noProof="0" dirty="0">
-                <a:solidFill>
-                  <a:srgbClr val="0F1B2E"/>
-                </a:solidFill>
-                <a:latin typeface="Segoe UI"/>
-              </a:rPr>
-              <a:t> e </a:t>
-            </a:r>
-            <a:r>
-              <a:rPr lang="pt-BR" sz="1200" b="0" noProof="0" dirty="0" err="1">
-                <a:solidFill>
-                  <a:srgbClr val="0F1B2E"/>
-                </a:solidFill>
-                <a:latin typeface="Segoe UI"/>
-              </a:rPr>
-              <a:t>visoes</a:t>
-            </a:r>
-            <a:r>
-              <a:rPr lang="pt-BR" sz="1200" b="0" noProof="0" dirty="0">
-                <a:solidFill>
-                  <a:srgbClr val="0F1B2E"/>
-                </a:solidFill>
-                <a:latin typeface="Segoe UI"/>
-              </a:rPr>
-              <a:t> de equipe</a:t>
+              <a:t>Delegação e visões de equipe</a:t>
             </a:r>
           </a:p>
         </p:txBody>
@@ -27391,7 +24209,7 @@
         </p:nvSpPr>
         <p:spPr>
           <a:xfrm>
-            <a:off x="6195060" y="1783080"/>
+            <a:off x="6195060" y="1943337"/>
             <a:ext cx="2576322" cy="4343400"/>
           </a:xfrm>
           <a:prstGeom prst="roundRect">
@@ -27444,7 +24262,7 @@
         </p:nvSpPr>
         <p:spPr>
           <a:xfrm>
-            <a:off x="6195060" y="1783080"/>
+            <a:off x="6195060" y="1943337"/>
             <a:ext cx="2576322" cy="658368"/>
           </a:xfrm>
           <a:prstGeom prst="roundRect">
@@ -27491,7 +24309,7 @@
         </p:nvSpPr>
         <p:spPr>
           <a:xfrm>
-            <a:off x="6195060" y="2112264"/>
+            <a:off x="6195060" y="2272521"/>
             <a:ext cx="2576322" cy="329184"/>
           </a:xfrm>
           <a:prstGeom prst="rect">
@@ -27536,7 +24354,7 @@
         </p:nvSpPr>
         <p:spPr>
           <a:xfrm>
-            <a:off x="6423660" y="1783080"/>
+            <a:off x="6423660" y="1943337"/>
             <a:ext cx="2119122" cy="658368"/>
           </a:xfrm>
           <a:prstGeom prst="rect">
@@ -27581,8 +24399,8 @@
         </p:nvSpPr>
         <p:spPr>
           <a:xfrm>
-            <a:off x="6451092" y="2651760"/>
-            <a:ext cx="2073402" cy="3337560"/>
+            <a:off x="6451092" y="2812017"/>
+            <a:ext cx="2073402" cy="1849609"/>
           </a:xfrm>
           <a:prstGeom prst="rect">
             <a:avLst/>
@@ -27647,13 +24465,35 @@
               <a:t>•  </a:t>
             </a:r>
             <a:r>
-              <a:rPr lang="pt-BR" sz="1200" b="0" noProof="0" dirty="0" err="1">
+              <a:rPr lang="pt-BR" sz="1200" b="0" noProof="0" dirty="0">
                 <a:solidFill>
                   <a:srgbClr val="0F1B2E"/>
                 </a:solidFill>
                 <a:latin typeface="Segoe UI"/>
               </a:rPr>
-              <a:t>Multi-tenant</a:t>
+              <a:t>Multi-tenant por subdomínio</a:t>
+            </a:r>
+          </a:p>
+          <a:p>
+            <a:pPr algn="l">
+              <a:lnSpc>
+                <a:spcPct val="108000"/>
+              </a:lnSpc>
+              <a:spcBef>
+                <a:spcPts val="0"/>
+              </a:spcBef>
+              <a:spcAft>
+                <a:spcPts val="700"/>
+              </a:spcAft>
+            </a:pPr>
+            <a:r>
+              <a:rPr lang="pt-BR" sz="1200" b="1" noProof="0" dirty="0">
+                <a:solidFill>
+                  <a:srgbClr val="F59E0B"/>
+                </a:solidFill>
+                <a:latin typeface="Segoe UI"/>
+              </a:rPr>
+              <a:t>•  </a:t>
             </a:r>
             <a:r>
               <a:rPr lang="pt-BR" sz="1200" b="0" noProof="0" dirty="0">
@@ -27662,117 +24502,38 @@
                 </a:solidFill>
                 <a:latin typeface="Segoe UI"/>
               </a:rPr>
-              <a:t> por </a:t>
-            </a:r>
-            <a:r>
-              <a:rPr lang="pt-BR" sz="1200" b="0" noProof="0" dirty="0" err="1">
+              <a:t>empresa.gestao360.org com marca própria</a:t>
+            </a:r>
+          </a:p>
+          <a:p>
+            <a:pPr algn="l">
+              <a:lnSpc>
+                <a:spcPct val="108000"/>
+              </a:lnSpc>
+              <a:spcBef>
+                <a:spcPts val="0"/>
+              </a:spcBef>
+              <a:spcAft>
+                <a:spcPts val="700"/>
+              </a:spcAft>
+            </a:pPr>
+            <a:r>
+              <a:rPr lang="pt-BR" sz="1200" b="1" noProof="0" dirty="0">
+                <a:solidFill>
+                  <a:srgbClr val="F59E0B"/>
+                </a:solidFill>
+                <a:latin typeface="Segoe UI"/>
+              </a:rPr>
+              <a:t>•  </a:t>
+            </a:r>
+            <a:r>
+              <a:rPr lang="pt-BR" sz="1200" b="0" noProof="0" dirty="0">
                 <a:solidFill>
                   <a:srgbClr val="0F1B2E"/>
                 </a:solidFill>
                 <a:latin typeface="Segoe UI"/>
               </a:rPr>
-              <a:t>subdominio</a:t>
-            </a:r>
-            <a:endParaRPr lang="pt-BR" sz="1200" b="0" noProof="0" dirty="0">
-              <a:solidFill>
-                <a:srgbClr val="0F1B2E"/>
-              </a:solidFill>
-              <a:latin typeface="Segoe UI"/>
-            </a:endParaRPr>
-          </a:p>
-          <a:p>
-            <a:pPr algn="l">
-              <a:lnSpc>
-                <a:spcPct val="108000"/>
-              </a:lnSpc>
-              <a:spcBef>
-                <a:spcPts val="0"/>
-              </a:spcBef>
-              <a:spcAft>
-                <a:spcPts val="700"/>
-              </a:spcAft>
-            </a:pPr>
-            <a:r>
-              <a:rPr lang="pt-BR" sz="1200" b="1" noProof="0" dirty="0">
-                <a:solidFill>
-                  <a:srgbClr val="F59E0B"/>
-                </a:solidFill>
-                <a:latin typeface="Segoe UI"/>
-              </a:rPr>
-              <a:t>•  </a:t>
-            </a:r>
-            <a:r>
-              <a:rPr lang="pt-BR" sz="1200" b="0" noProof="0" dirty="0">
-                <a:solidFill>
-                  <a:srgbClr val="0F1B2E"/>
-                </a:solidFill>
-                <a:latin typeface="Segoe UI"/>
-              </a:rPr>
-              <a:t>empresa.gestao360.org com marca </a:t>
-            </a:r>
-            <a:r>
-              <a:rPr lang="pt-BR" sz="1200" b="0" noProof="0" dirty="0" err="1">
-                <a:solidFill>
-                  <a:srgbClr val="0F1B2E"/>
-                </a:solidFill>
-                <a:latin typeface="Segoe UI"/>
-              </a:rPr>
-              <a:t>propria</a:t>
-            </a:r>
-            <a:endParaRPr lang="pt-BR" sz="1200" b="0" noProof="0" dirty="0">
-              <a:solidFill>
-                <a:srgbClr val="0F1B2E"/>
-              </a:solidFill>
-              <a:latin typeface="Segoe UI"/>
-            </a:endParaRPr>
-          </a:p>
-          <a:p>
-            <a:pPr algn="l">
-              <a:lnSpc>
-                <a:spcPct val="108000"/>
-              </a:lnSpc>
-              <a:spcBef>
-                <a:spcPts val="0"/>
-              </a:spcBef>
-              <a:spcAft>
-                <a:spcPts val="700"/>
-              </a:spcAft>
-            </a:pPr>
-            <a:r>
-              <a:rPr lang="pt-BR" sz="1200" b="1" noProof="0" dirty="0">
-                <a:solidFill>
-                  <a:srgbClr val="F59E0B"/>
-                </a:solidFill>
-                <a:latin typeface="Segoe UI"/>
-              </a:rPr>
-              <a:t>•  </a:t>
-            </a:r>
-            <a:r>
-              <a:rPr lang="pt-BR" sz="1200" b="0" noProof="0" dirty="0">
-                <a:solidFill>
-                  <a:srgbClr val="0F1B2E"/>
-                </a:solidFill>
-                <a:latin typeface="Segoe UI"/>
-              </a:rPr>
-              <a:t>Troca de empresa ativa (</a:t>
-            </a:r>
-            <a:r>
-              <a:rPr lang="pt-BR" sz="1200" b="0" noProof="0" dirty="0" err="1">
-                <a:solidFill>
-                  <a:srgbClr val="0F1B2E"/>
-                </a:solidFill>
-                <a:latin typeface="Segoe UI"/>
-              </a:rPr>
-              <a:t>impersonacao</a:t>
-            </a:r>
-            <a:r>
-              <a:rPr lang="pt-BR" sz="1200" b="0" noProof="0" dirty="0">
-                <a:solidFill>
-                  <a:srgbClr val="0F1B2E"/>
-                </a:solidFill>
-                <a:latin typeface="Segoe UI"/>
-              </a:rPr>
-              <a:t>)</a:t>
+              <a:t>Troca de empresa ativa (impersonacao)</a:t>
             </a:r>
           </a:p>
         </p:txBody>
@@ -27785,7 +24546,7 @@
         </p:nvSpPr>
         <p:spPr>
           <a:xfrm>
-            <a:off x="8972550" y="1783080"/>
+            <a:off x="8972550" y="1943337"/>
             <a:ext cx="2576322" cy="4343400"/>
           </a:xfrm>
           <a:prstGeom prst="roundRect">
@@ -27838,7 +24599,7 @@
         </p:nvSpPr>
         <p:spPr>
           <a:xfrm>
-            <a:off x="8972550" y="1783080"/>
+            <a:off x="8972550" y="1943337"/>
             <a:ext cx="2576322" cy="658368"/>
           </a:xfrm>
           <a:prstGeom prst="roundRect">
@@ -27885,7 +24646,7 @@
         </p:nvSpPr>
         <p:spPr>
           <a:xfrm>
-            <a:off x="8972550" y="2112264"/>
+            <a:off x="8972550" y="2272521"/>
             <a:ext cx="2576322" cy="329184"/>
           </a:xfrm>
           <a:prstGeom prst="rect">
@@ -27930,8 +24691,8 @@
         </p:nvSpPr>
         <p:spPr>
           <a:xfrm>
-            <a:off x="9201150" y="1783080"/>
-            <a:ext cx="2119122" cy="658368"/>
+            <a:off x="9201150" y="2164799"/>
+            <a:ext cx="2119122" cy="215444"/>
           </a:xfrm>
           <a:prstGeom prst="rect">
             <a:avLst/>
@@ -27956,22 +24717,13 @@
               </a:spcAft>
             </a:pPr>
             <a:r>
-              <a:rPr lang="pt-BR" sz="1400" b="1" noProof="0" dirty="0" err="1">
+              <a:rPr lang="pt-BR" sz="1400" b="1" noProof="0" dirty="0">
                 <a:solidFill>
                   <a:srgbClr val="FFFFFF"/>
                 </a:solidFill>
                 <a:latin typeface="Segoe UI Semibold"/>
               </a:rPr>
-              <a:t>Seguranca</a:t>
-            </a:r>
-            <a:r>
-              <a:rPr lang="pt-BR" sz="1400" b="1" noProof="0" dirty="0">
-                <a:solidFill>
-                  <a:srgbClr val="FFFFFF"/>
-                </a:solidFill>
-                <a:latin typeface="Segoe UI Semibold"/>
-              </a:rPr>
-              <a:t> &amp; LGPD</a:t>
+              <a:t>Segurança &amp; LGPD</a:t>
             </a:r>
           </a:p>
         </p:txBody>
@@ -27984,7 +24736,7 @@
         </p:nvSpPr>
         <p:spPr>
           <a:xfrm>
-            <a:off x="9228582" y="2651760"/>
+            <a:off x="9228582" y="2812017"/>
             <a:ext cx="2073402" cy="3337560"/>
           </a:xfrm>
           <a:prstGeom prst="rect">
@@ -28087,65 +24839,38 @@
                 </a:solidFill>
                 <a:latin typeface="Segoe UI"/>
               </a:rPr>
-              <a:t>Modulo LGPD: </a:t>
-            </a:r>
-            <a:r>
-              <a:rPr lang="pt-BR" sz="1200" b="0" noProof="0" dirty="0" err="1">
+              <a:t>Modulo LGPD: RoPA e incidentes</a:t>
+            </a:r>
+          </a:p>
+          <a:p>
+            <a:pPr algn="l">
+              <a:lnSpc>
+                <a:spcPct val="108000"/>
+              </a:lnSpc>
+              <a:spcBef>
+                <a:spcPts val="0"/>
+              </a:spcBef>
+              <a:spcAft>
+                <a:spcPts val="700"/>
+              </a:spcAft>
+            </a:pPr>
+            <a:r>
+              <a:rPr lang="pt-BR" sz="1200" b="1" noProof="0" dirty="0">
+                <a:solidFill>
+                  <a:srgbClr val="16A34A"/>
+                </a:solidFill>
+                <a:latin typeface="Segoe UI"/>
+              </a:rPr>
+              <a:t>•  </a:t>
+            </a:r>
+            <a:r>
+              <a:rPr lang="pt-BR" sz="1200" b="0" noProof="0" dirty="0">
                 <a:solidFill>
                   <a:srgbClr val="0F1B2E"/>
                 </a:solidFill>
                 <a:latin typeface="Segoe UI"/>
               </a:rPr>
-              <a:t>RoPA</a:t>
-            </a:r>
-            <a:r>
-              <a:rPr lang="pt-BR" sz="1200" b="0" noProof="0" dirty="0">
-                <a:solidFill>
-                  <a:srgbClr val="0F1B2E"/>
-                </a:solidFill>
-                <a:latin typeface="Segoe UI"/>
-              </a:rPr>
-              <a:t> e incidentes</a:t>
-            </a:r>
-          </a:p>
-          <a:p>
-            <a:pPr algn="l">
-              <a:lnSpc>
-                <a:spcPct val="108000"/>
-              </a:lnSpc>
-              <a:spcBef>
-                <a:spcPts val="0"/>
-              </a:spcBef>
-              <a:spcAft>
-                <a:spcPts val="700"/>
-              </a:spcAft>
-            </a:pPr>
-            <a:r>
-              <a:rPr lang="pt-BR" sz="1200" b="1" noProof="0" dirty="0">
-                <a:solidFill>
-                  <a:srgbClr val="16A34A"/>
-                </a:solidFill>
-                <a:latin typeface="Segoe UI"/>
-              </a:rPr>
-              <a:t>•  </a:t>
-            </a:r>
-            <a:r>
-              <a:rPr lang="pt-BR" sz="1200" b="0" noProof="0" dirty="0" err="1">
-                <a:solidFill>
-                  <a:srgbClr val="0F1B2E"/>
-                </a:solidFill>
-                <a:latin typeface="Segoe UI"/>
-              </a:rPr>
-              <a:t>Observabilidade</a:t>
-            </a:r>
-            <a:r>
-              <a:rPr lang="pt-BR" sz="1200" b="0" noProof="0" dirty="0">
-                <a:solidFill>
-                  <a:srgbClr val="0F1B2E"/>
-                </a:solidFill>
-                <a:latin typeface="Segoe UI"/>
-              </a:rPr>
-              <a:t> e logs estruturados</a:t>
+              <a:t>Observabilidade e logs estruturados</a:t>
             </a:r>
           </a:p>
         </p:txBody>
@@ -28372,7 +25097,7 @@
         <p:spPr>
           <a:xfrm>
             <a:off x="868680" y="2788920"/>
-            <a:ext cx="9601200" cy="1463040"/>
+            <a:ext cx="9601200" cy="707886"/>
           </a:xfrm>
           <a:prstGeom prst="rect">
             <a:avLst/>
@@ -28403,23 +25128,8 @@
                 </a:solidFill>
                 <a:latin typeface="Segoe UI Semibold"/>
               </a:rPr>
-              <a:t>Planos e </a:t>
-            </a:r>
-            <a:r>
-              <a:rPr lang="pt-BR" sz="4600" b="1" noProof="0" dirty="0" err="1">
-                <a:solidFill>
-                  <a:srgbClr val="FFFFFF"/>
-                </a:solidFill>
-                <a:latin typeface="Segoe UI Semibold"/>
-              </a:rPr>
-              <a:t>precos</a:t>
-            </a:r>
-            <a:endParaRPr lang="pt-BR" sz="4600" b="1" noProof="0" dirty="0">
-              <a:solidFill>
-                <a:srgbClr val="FFFFFF"/>
-              </a:solidFill>
-              <a:latin typeface="Segoe UI Semibold"/>
-            </a:endParaRPr>
+              <a:t>Planos e preços</a:t>
+            </a:r>
           </a:p>
         </p:txBody>
       </p:sp>
@@ -28432,7 +25142,7 @@
         <p:spPr>
           <a:xfrm>
             <a:off x="868680" y="3886200"/>
-            <a:ext cx="9144000" cy="731520"/>
+            <a:ext cx="9144000" cy="552972"/>
           </a:xfrm>
           <a:prstGeom prst="rect">
             <a:avLst/>
@@ -28457,58 +25167,13 @@
               </a:spcAft>
             </a:pPr>
             <a:r>
-              <a:rPr lang="pt-BR" sz="1700" b="0" noProof="0" dirty="0" err="1">
+              <a:rPr lang="pt-BR" sz="1700" b="0" noProof="0" dirty="0">
                 <a:solidFill>
                   <a:srgbClr val="C7D4E6"/>
                 </a:solidFill>
                 <a:latin typeface="Segoe UI"/>
               </a:rPr>
-              <a:t>Contratacao</a:t>
-            </a:r>
-            <a:r>
-              <a:rPr lang="pt-BR" sz="1700" b="0" noProof="0" dirty="0">
-                <a:solidFill>
-                  <a:srgbClr val="C7D4E6"/>
-                </a:solidFill>
-                <a:latin typeface="Segoe UI"/>
-              </a:rPr>
-              <a:t> cumulativa: cada plano soma os </a:t>
-            </a:r>
-            <a:r>
-              <a:rPr lang="pt-BR" sz="1700" b="0" noProof="0" dirty="0" err="1">
-                <a:solidFill>
-                  <a:srgbClr val="C7D4E6"/>
-                </a:solidFill>
-                <a:latin typeface="Segoe UI"/>
-              </a:rPr>
-              <a:t>modulos</a:t>
-            </a:r>
-            <a:r>
-              <a:rPr lang="pt-BR" sz="1700" b="0" noProof="0" dirty="0">
-                <a:solidFill>
-                  <a:srgbClr val="C7D4E6"/>
-                </a:solidFill>
-                <a:latin typeface="Segoe UI"/>
-              </a:rPr>
-              <a:t> do anterior. Valores mensais em reais, sem fidelidade </a:t>
-            </a:r>
-            <a:r>
-              <a:rPr lang="pt-BR" sz="1700" b="0" noProof="0" dirty="0" err="1">
-                <a:solidFill>
-                  <a:srgbClr val="C7D4E6"/>
-                </a:solidFill>
-                <a:latin typeface="Segoe UI"/>
-              </a:rPr>
-              <a:t>obrigatoria</a:t>
-            </a:r>
-            <a:r>
-              <a:rPr lang="pt-BR" sz="1700" b="0" noProof="0" dirty="0">
-                <a:solidFill>
-                  <a:srgbClr val="C7D4E6"/>
-                </a:solidFill>
-                <a:latin typeface="Segoe UI"/>
-              </a:rPr>
-              <a:t>.</a:t>
+              <a:t>Contratação cumulativa: cada plano soma os módulos do anterior. Valores mensais em reais, sem fidelidade obrigatória.</a:t>
             </a:r>
           </a:p>
         </p:txBody>
